--- a/week 2/Intro to Data Science — Week 2 Python for Data Work.pptx
+++ b/week 2/Intro to Data Science — Week 2 Python for Data Work.pptx
@@ -4,6 +4,9 @@
   <p:sldMasterIdLst>
     <p:sldMasterId id="2147483648" r:id="rId1"/>
   </p:sldMasterIdLst>
+  <p:notesMasterIdLst>
+    <p:notesMasterId r:id="rId28"/>
+  </p:notesMasterIdLst>
   <p:sldIdLst>
     <p:sldId id="256" r:id="rId2"/>
     <p:sldId id="257" r:id="rId3"/>
@@ -32,9 +35,6 @@
     <p:sldId id="280" r:id="rId26"/>
     <p:sldId id="281" r:id="rId27"/>
   </p:sldIdLst>
-  <p:notesMasterIdLst>
-    <p:notesMasterId r:id="rId28"/>
-  </p:notesMasterIdLst>
   <p:sldSz cx="12192000" cy="6858000"/>
   <p:notesSz cx="6858000" cy="12192000"/>
   <p:defaultTextStyle>
@@ -129,6 +129,11 @@
       </a:defRPr>
     </a:lvl9pPr>
   </p:defaultTextStyle>
+  <p:extLst>
+    <p:ext uri="{EFAFB233-063F-42B5-8137-9DF3F51BA10A}">
+      <p15:sldGuideLst xmlns:p15="http://schemas.microsoft.com/office/powerpoint/2012/main"/>
+    </p:ext>
+  </p:extLst>
 </p:presentation>
 </file>
 
@@ -154,234 +159,10 @@
           <a:chExt cx="0" cy="0"/>
         </a:xfrm>
       </p:grpSpPr>
-      <p:sp>
-        <p:nvSpPr>
-          <p:cNvPr id="2" name="Header Placeholder 1"/>
-          <p:cNvSpPr>
-            <a:spLocks noGrp="1"/>
-          </p:cNvSpPr>
-          <p:nvPr>
-            <p:ph type="hdr" sz="quarter"/>
-          </p:nvPr>
-        </p:nvSpPr>
-        <p:spPr>
-          <a:xfrm>
-            <a:off x="0" y="0"/>
-            <a:ext cx="2971800" cy="458788"/>
-          </a:xfrm>
-          <a:prstGeom prst="rect">
-            <a:avLst/>
-          </a:prstGeom>
-        </p:spPr>
-        <p:txBody>
-          <a:bodyPr vert="horz" lIns="91440" tIns="45720" rIns="91440" bIns="45720" rtlCol="0"/>
-          <a:lstStyle>
-            <a:lvl1pPr algn="l">
-              <a:defRPr sz="1200"/>
-            </a:lvl1pPr>
-          </a:lstStyle>
-          <a:p>
-            <a:endParaRPr lang="en-US"/>
-          </a:p>
-        </p:txBody>
-      </p:sp>
-      <p:sp>
-        <p:nvSpPr>
-          <p:cNvPr id="3" name="Date Placeholder 2"/>
-          <p:cNvSpPr>
-            <a:spLocks noGrp="1"/>
-          </p:cNvSpPr>
-          <p:nvPr>
-            <p:ph type="dt" idx="1"/>
-          </p:nvPr>
-        </p:nvSpPr>
-        <p:spPr>
-          <a:xfrm>
-            <a:off x="3884613" y="0"/>
-            <a:ext cx="2971800" cy="458788"/>
-          </a:xfrm>
-          <a:prstGeom prst="rect">
-            <a:avLst/>
-          </a:prstGeom>
-        </p:spPr>
-        <p:txBody>
-          <a:bodyPr vert="horz" lIns="91440" tIns="45720" rIns="91440" bIns="45720" rtlCol="0"/>
-          <a:lstStyle>
-            <a:lvl1pPr algn="r">
-              <a:defRPr sz="1200"/>
-            </a:lvl1pPr>
-          </a:lstStyle>
-          <a:p>
-            <a:fld id="{5282F153-3F37-0F45-9E97-73ACFA13230C}" type="datetimeFigureOut">
-              <a:rPr lang="en-US"/>
-              <a:t>7/23/19</a:t>
-            </a:fld>
-            <a:endParaRPr lang="en-US"/>
-          </a:p>
-        </p:txBody>
-      </p:sp>
-      <p:sp>
-        <p:nvSpPr>
-          <p:cNvPr id="4" name="Slide Image Placeholder 3"/>
-          <p:cNvSpPr>
-            <a:spLocks noGrp="1" noRot="1" noChangeAspect="1"/>
-          </p:cNvSpPr>
-          <p:nvPr>
-            <p:ph type="sldImg" idx="2"/>
-          </p:nvPr>
-        </p:nvSpPr>
-        <p:spPr>
-          <a:xfrm>
-            <a:off x="685800" y="1143000"/>
-            <a:ext cx="5486400" cy="3086100"/>
-          </a:xfrm>
-          <a:prstGeom prst="rect">
-            <a:avLst/>
-          </a:prstGeom>
-          <a:noFill/>
-          <a:ln w="12700">
-            <a:solidFill>
-              <a:prstClr val="black"/>
-            </a:solidFill>
-          </a:ln>
-        </p:spPr>
-        <p:txBody>
-          <a:bodyPr vert="horz" lIns="91440" tIns="45720" rIns="91440" bIns="45720" rtlCol="0" anchor="ctr"/>
-          <a:lstStyle/>
-          <a:p>
-            <a:endParaRPr lang="en-US"/>
-          </a:p>
-        </p:txBody>
-      </p:sp>
-      <p:sp>
-        <p:nvSpPr>
-          <p:cNvPr id="5" name="Notes Placeholder 4"/>
-          <p:cNvSpPr>
-            <a:spLocks noGrp="1"/>
-          </p:cNvSpPr>
-          <p:nvPr>
-            <p:ph type="body" sz="quarter" idx="3"/>
-          </p:nvPr>
-        </p:nvSpPr>
-        <p:spPr>
-          <a:xfrm>
-            <a:off x="685800" y="4400550"/>
-            <a:ext cx="5486400" cy="3600450"/>
-          </a:xfrm>
-          <a:prstGeom prst="rect">
-            <a:avLst/>
-          </a:prstGeom>
-        </p:spPr>
-        <p:txBody>
-          <a:bodyPr vert="horz" lIns="91440" tIns="45720" rIns="91440" bIns="45720" rtlCol="0"/>
-          <a:lstStyle/>
-          <a:p>
-            <a:pPr lvl="0"/>
-            <a:r>
-              <a:rPr lang="en-US"/>
-              <a:t>Click to edit Master text styles</a:t>
-            </a:r>
-          </a:p>
-          <a:p>
-            <a:pPr lvl="1"/>
-            <a:r>
-              <a:rPr lang="en-US"/>
-              <a:t>Second level</a:t>
-            </a:r>
-          </a:p>
-          <a:p>
-            <a:pPr lvl="2"/>
-            <a:r>
-              <a:rPr lang="en-US"/>
-              <a:t>Third level</a:t>
-            </a:r>
-          </a:p>
-          <a:p>
-            <a:pPr lvl="3"/>
-            <a:r>
-              <a:rPr lang="en-US"/>
-              <a:t>Fourth level</a:t>
-            </a:r>
-          </a:p>
-          <a:p>
-            <a:pPr lvl="4"/>
-            <a:r>
-              <a:rPr lang="en-US"/>
-              <a:t>Fifth level</a:t>
-            </a:r>
-          </a:p>
-        </p:txBody>
-      </p:sp>
-      <p:sp>
-        <p:nvSpPr>
-          <p:cNvPr id="6" name="Footer Placeholder 5"/>
-          <p:cNvSpPr>
-            <a:spLocks noGrp="1"/>
-          </p:cNvSpPr>
-          <p:nvPr>
-            <p:ph type="ftr" sz="quarter" idx="4"/>
-          </p:nvPr>
-        </p:nvSpPr>
-        <p:spPr>
-          <a:xfrm>
-            <a:off x="0" y="8685213"/>
-            <a:ext cx="2971800" cy="458787"/>
-          </a:xfrm>
-          <a:prstGeom prst="rect">
-            <a:avLst/>
-          </a:prstGeom>
-        </p:spPr>
-        <p:txBody>
-          <a:bodyPr vert="horz" lIns="91440" tIns="45720" rIns="91440" bIns="45720" rtlCol="0" anchor="b"/>
-          <a:lstStyle>
-            <a:lvl1pPr algn="l">
-              <a:defRPr sz="1200"/>
-            </a:lvl1pPr>
-          </a:lstStyle>
-          <a:p>
-            <a:endParaRPr lang="en-US"/>
-          </a:p>
-        </p:txBody>
-      </p:sp>
-      <p:sp>
-        <p:nvSpPr>
-          <p:cNvPr id="7" name="Slide Number Placeholder 6"/>
-          <p:cNvSpPr>
-            <a:spLocks noGrp="1"/>
-          </p:cNvSpPr>
-          <p:nvPr>
-            <p:ph type="sldNum" sz="quarter" idx="5"/>
-          </p:nvPr>
-        </p:nvSpPr>
-        <p:spPr>
-          <a:xfrm>
-            <a:off x="3884613" y="8685213"/>
-            <a:ext cx="2971800" cy="458787"/>
-          </a:xfrm>
-          <a:prstGeom prst="rect">
-            <a:avLst/>
-          </a:prstGeom>
-        </p:spPr>
-        <p:txBody>
-          <a:bodyPr vert="horz" lIns="91440" tIns="45720" rIns="91440" bIns="45720" rtlCol="0" anchor="b"/>
-          <a:lstStyle>
-            <a:lvl1pPr algn="r">
-              <a:defRPr sz="1200"/>
-            </a:lvl1pPr>
-          </a:lstStyle>
-          <a:p>
-            <a:fld id="{CE5E9CC1-C706-0F49-92D6-E571CC5EEA8F}" type="slidenum">
-              <a:rPr lang="en-US"/>
-              <a:t>‹#›</a:t>
-            </a:fld>
-            <a:endParaRPr lang="en-US"/>
-          </a:p>
-        </p:txBody>
-      </p:sp>
     </p:spTree>
     <p:extLst>
       <p:ext uri="{BB962C8B-B14F-4D97-AF65-F5344CB8AC3E}">
-        <p14:creationId xmlns:p14="http://schemas.microsoft.com/office/powerpoint/2010/main" val="1024086991"/>
+        <p14:creationId xmlns:p14="http://schemas.microsoft.com/office/powerpoint/2010/main" val="4188726179"/>
       </p:ext>
     </p:extLst>
   </p:cSld>
@@ -529,7 +310,6 @@
               <a:rPr lang="en-US" dirty="0"/>
               <a:t>Guide W02-S01. Recap last class in one sentence, then tell the Friday story on the next slide.</a:t>
             </a:r>
-            <a:endParaRPr lang="en-US" dirty="0"/>
           </a:p>
         </p:txBody>
       </p:sp>
@@ -617,7 +397,6 @@
               <a:rPr lang="en-US" dirty="0"/>
               <a:t>Guide W02-S10. Predict the output. Move a statement out of the loop and ask what changes.</a:t>
             </a:r>
-            <a:endParaRPr lang="en-US" dirty="0"/>
           </a:p>
         </p:txBody>
       </p:sp>
@@ -705,7 +484,6 @@
               <a:rPr lang="en-US" dirty="0"/>
               <a:t>Guide W02-S11. Write it the repeated way first, feel the pain, then wrap it.</a:t>
             </a:r>
-            <a:endParaRPr lang="en-US" dirty="0"/>
           </a:p>
         </p:txBody>
       </p:sp>
@@ -793,7 +571,6 @@
               <a:rPr lang="en-US" dirty="0"/>
               <a:t>Guide W02-S12. Break the function on purpose and watch the assert fail. is_missing comes from the lab.</a:t>
             </a:r>
-            <a:endParaRPr lang="en-US" dirty="0"/>
           </a:p>
         </p:txBody>
       </p:sp>
@@ -881,7 +658,6 @@
               <a:rPr lang="en-US" dirty="0"/>
               <a:t>Guide W02-S13. Show each error live. Students say the cause before the fix.</a:t>
             </a:r>
-            <a:endParaRPr lang="en-US" dirty="0"/>
           </a:p>
         </p:txBody>
       </p:sp>
@@ -969,7 +745,6 @@
               <a:rPr lang="en-US" dirty="0"/>
               <a:t>Guide W02-S14. Real error from the lab data. Ask who can find the bad value.</a:t>
             </a:r>
-            <a:endParaRPr lang="en-US" dirty="0"/>
           </a:p>
         </p:txBody>
       </p:sp>
@@ -1057,7 +832,6 @@
               <a:rPr lang="en-US" dirty="0"/>
               <a:t>Guide W02-S15. Open the CSV as plain text first so they see commas and newlines.</a:t>
             </a:r>
-            <a:endParaRPr lang="en-US" dirty="0"/>
           </a:p>
         </p:txBody>
       </p:sp>
@@ -1145,7 +919,6 @@
               <a:rPr lang="en-US" dirty="0"/>
               <a:t>Guide W02-S16. Ask: stop, skip silently, or report? The report is the professional answer.</a:t>
             </a:r>
-            <a:endParaRPr lang="en-US" dirty="0"/>
           </a:p>
         </p:txBody>
       </p:sp>
@@ -1233,7 +1006,6 @@
               <a:rPr lang="en-US" dirty="0"/>
               <a:t>Guide W02-S17. Pairs, 15 minutes. Plain-English plan first.</a:t>
             </a:r>
-            <a:endParaRPr lang="en-US" dirty="0"/>
           </a:p>
         </p:txBody>
       </p:sp>
@@ -1321,7 +1093,6 @@
               <a:rPr lang="en-US" dirty="0"/>
               <a:t>Guide W02-S18. Ask who has the authority to decide KHI means Karachi.</a:t>
             </a:r>
-            <a:endParaRPr lang="en-US" dirty="0"/>
           </a:p>
         </p:txBody>
       </p:sp>
@@ -1409,7 +1180,6 @@
               <a:rPr lang="en-US" dirty="0"/>
               <a:t>Guide W02-S19. Say the plan in English before any code. 35 minutes.</a:t>
             </a:r>
-            <a:endParaRPr lang="en-US" dirty="0"/>
           </a:p>
         </p:txBody>
       </p:sp>
@@ -1497,7 +1267,6 @@
               <a:rPr lang="en-US" dirty="0"/>
               <a:t>Guide W02-S02. Tell the full story from the guide before advancing.</a:t>
             </a:r>
-            <a:endParaRPr lang="en-US" dirty="0"/>
           </a:p>
         </p:txBody>
       </p:sp>
@@ -1585,7 +1354,6 @@
               <a:rPr lang="en-US" dirty="0"/>
               <a:t>Guide W02-S20. Students sketch this before opening the code slides.</a:t>
             </a:r>
-            <a:endParaRPr lang="en-US" dirty="0"/>
           </a:p>
         </p:txBody>
       </p:sp>
@@ -1673,7 +1441,6 @@
               <a:rPr lang="en-US" dirty="0"/>
               <a:t>Guide W02-S21. Students compare their file against this, line by line. Line numbers shown.</a:t>
             </a:r>
-            <a:endParaRPr lang="en-US" dirty="0"/>
           </a:p>
         </p:txBody>
       </p:sp>
@@ -1761,7 +1528,6 @@
               <a:rPr lang="en-US" dirty="0"/>
               <a:t>Guide W02-S22. Remind: use this to check your work, not to copy before you try.</a:t>
             </a:r>
-            <a:endParaRPr lang="en-US" dirty="0"/>
           </a:p>
         </p:txBody>
       </p:sp>
@@ -1849,7 +1615,6 @@
               <a:rPr lang="en-US" dirty="0"/>
               <a:t>Guide W02-S23. Students run it and compare. Differences are the learning.</a:t>
             </a:r>
-            <a:endParaRPr lang="en-US" dirty="0"/>
           </a:p>
         </p:txBody>
       </p:sp>
@@ -1937,7 +1702,6 @@
               <a:rPr lang="en-US" dirty="0"/>
               <a:t>Guide W02-S24. Use as a debugging checklist.</a:t>
             </a:r>
-            <a:endParaRPr lang="en-US" dirty="0"/>
           </a:p>
         </p:txBody>
       </p:sp>
@@ -2025,7 +1789,6 @@
               <a:rPr lang="en-US" dirty="0"/>
               <a:t>Guide W02-S25. One volunteer live. Zip fallback if GitHub fails.</a:t>
             </a:r>
-            <a:endParaRPr lang="en-US" dirty="0"/>
           </a:p>
         </p:txBody>
       </p:sp>
@@ -2113,7 +1876,6 @@
               <a:rPr lang="en-US" dirty="0"/>
               <a:t>Guide W02-S26. Collect exit tickets. Check every repo has a commit.</a:t>
             </a:r>
-            <a:endParaRPr lang="en-US" dirty="0"/>
           </a:p>
         </p:txBody>
       </p:sp>
@@ -2201,7 +1963,6 @@
               <a:rPr lang="en-US" dirty="0"/>
               <a:t>Guide W02-S03. Read the five outcomes; say the profiler is the deliverable.</a:t>
             </a:r>
-            <a:endParaRPr lang="en-US" dirty="0"/>
           </a:p>
         </p:txBody>
       </p:sp>
@@ -2289,7 +2050,6 @@
               <a:rPr lang="en-US" dirty="0"/>
               <a:t>Guide W02-S04. Ask students to decompose a different task: making chai for 10 people.</a:t>
             </a:r>
-            <a:endParaRPr lang="en-US" dirty="0"/>
           </a:p>
         </p:txBody>
       </p:sp>
@@ -2377,7 +2137,6 @@
               <a:rPr lang="en-US" dirty="0"/>
               <a:t>Guide W02-S05. Demo the hidden-state bug live: define x, delete the cell, still use x.</a:t>
             </a:r>
-            <a:endParaRPr lang="en-US" dirty="0"/>
           </a:p>
         </p:txBody>
       </p:sp>
@@ -2465,7 +2224,6 @@
               <a:rPr lang="en-US" dirty="0"/>
               <a:t>Guide W02-S06. Predict each output before running. Show type() on each.</a:t>
             </a:r>
-            <a:endParaRPr lang="en-US" dirty="0"/>
           </a:p>
         </p:txBody>
       </p:sp>
@@ -2553,7 +2311,6 @@
               <a:rPr lang="en-US" dirty="0"/>
               <a:t>Guide W02-S07. Ask: how many ways could Karachi be written in a real file?</a:t>
             </a:r>
-            <a:endParaRPr lang="en-US" dirty="0"/>
           </a:p>
         </p:txBody>
       </p:sp>
@@ -2641,7 +2398,6 @@
               <a:rPr lang="en-US" dirty="0"/>
               <a:t>Guide W02-S08. Students predict, then run. Ask what amounts[-2] gives.</a:t>
             </a:r>
-            <a:endParaRPr lang="en-US" dirty="0"/>
           </a:p>
         </p:txBody>
       </p:sp>
@@ -2729,7 +2485,6 @@
               <a:rPr lang="en-US" dirty="0"/>
               <a:t>Guide W02-S09. Ask: is KHI the same city? Who decides? The data owner.</a:t>
             </a:r>
-            <a:endParaRPr lang="en-US" dirty="0"/>
           </a:p>
         </p:txBody>
       </p:sp>
@@ -2807,6 +2562,7 @@
         <a:solidFill>
           <a:srgbClr val="F7F5EF"/>
         </a:solidFill>
+        <a:effectLst/>
       </p:bgPr>
     </p:bg>
     <p:spTree>
@@ -2826,7 +2582,9 @@
       <p:sp>
         <p:nvSpPr>
           <p:cNvPr id="2" name="Title Placeholder 1"/>
-          <p:cNvSpPr/>
+          <p:cNvSpPr>
+            <a:spLocks noGrp="1"/>
+          </p:cNvSpPr>
           <p:nvPr>
             <p:ph type="title"/>
           </p:nvPr>
@@ -2845,7 +2603,7 @@
         <p:txBody>
           <a:bodyPr wrap="square" lIns="0" tIns="0" rIns="0" bIns="0" rtlCol="0" anchor="t"/>
           <a:lstStyle>
-            <a:lvl1pPr algn="l" indent="0" marL="0">
+            <a:lvl1pPr marL="0" indent="0" algn="l">
               <a:lnSpc>
                 <a:spcPct val="115000"/>
               </a:lnSpc>
@@ -2861,7 +2619,7 @@
             </a:lvl1pPr>
           </a:lstStyle>
           <a:p>
-            <a:pPr algn="l" indent="0" marL="0">
+            <a:pPr marL="0" indent="0" algn="l">
               <a:lnSpc>
                 <a:spcPct val="115000"/>
               </a:lnSpc>
@@ -2874,9 +2632,11 @@
       <p:sp>
         <p:nvSpPr>
           <p:cNvPr id="3" name="Text Placeholder 2"/>
-          <p:cNvSpPr/>
+          <p:cNvSpPr>
+            <a:spLocks noGrp="1"/>
+          </p:cNvSpPr>
           <p:nvPr>
-            <p:ph idx="101" type="body"/>
+            <p:ph type="body" idx="101"/>
           </p:nvPr>
         </p:nvSpPr>
         <p:spPr>
@@ -2893,7 +2653,7 @@
         <p:txBody>
           <a:bodyPr wrap="square" lIns="0" tIns="0" rIns="0" bIns="0" rtlCol="0" anchor="t"/>
           <a:lstStyle>
-            <a:lvl1pPr algn="l" indent="0" marL="0">
+            <a:lvl1pPr marL="0" indent="0" algn="l">
               <a:lnSpc>
                 <a:spcPct val="140000"/>
               </a:lnSpc>
@@ -2909,7 +2669,7 @@
             </a:lvl1pPr>
           </a:lstStyle>
           <a:p>
-            <a:pPr algn="l" indent="0" marL="0">
+            <a:pPr marL="0" indent="0" algn="l">
               <a:lnSpc>
                 <a:spcPct val="140000"/>
               </a:lnSpc>
@@ -2935,6 +2695,7 @@
         <a:solidFill>
           <a:srgbClr val="F7F5EF"/>
         </a:solidFill>
+        <a:effectLst/>
       </p:bgPr>
     </p:bg>
     <p:spTree>
@@ -2954,7 +2715,9 @@
       <p:sp>
         <p:nvSpPr>
           <p:cNvPr id="2" name="Title Placeholder 1"/>
-          <p:cNvSpPr/>
+          <p:cNvSpPr>
+            <a:spLocks noGrp="1"/>
+          </p:cNvSpPr>
           <p:nvPr>
             <p:ph type="title"/>
           </p:nvPr>
@@ -2973,7 +2736,7 @@
         <p:txBody>
           <a:bodyPr wrap="square" lIns="0" tIns="0" rIns="0" bIns="0" rtlCol="0" anchor="t"/>
           <a:lstStyle>
-            <a:lvl1pPr algn="l" indent="0" marL="0">
+            <a:lvl1pPr marL="0" indent="0" algn="l">
               <a:lnSpc>
                 <a:spcPct val="115000"/>
               </a:lnSpc>
@@ -2989,7 +2752,7 @@
             </a:lvl1pPr>
           </a:lstStyle>
           <a:p>
-            <a:pPr algn="l" indent="0" marL="0">
+            <a:pPr marL="0" indent="0" algn="l">
               <a:lnSpc>
                 <a:spcPct val="115000"/>
               </a:lnSpc>
@@ -3002,9 +2765,11 @@
       <p:sp>
         <p:nvSpPr>
           <p:cNvPr id="3" name="Text Placeholder 2"/>
-          <p:cNvSpPr/>
+          <p:cNvSpPr>
+            <a:spLocks noGrp="1"/>
+          </p:cNvSpPr>
           <p:nvPr>
-            <p:ph idx="101" type="body"/>
+            <p:ph type="body" idx="101"/>
           </p:nvPr>
         </p:nvSpPr>
         <p:spPr>
@@ -3021,7 +2786,7 @@
         <p:txBody>
           <a:bodyPr wrap="square" lIns="0" tIns="0" rIns="0" bIns="0" rtlCol="0" anchor="t"/>
           <a:lstStyle>
-            <a:lvl1pPr algn="l" indent="0" marL="0">
+            <a:lvl1pPr marL="0" indent="0" algn="l">
               <a:lnSpc>
                 <a:spcPct val="140000"/>
               </a:lnSpc>
@@ -3037,7 +2802,7 @@
             </a:lvl1pPr>
           </a:lstStyle>
           <a:p>
-            <a:pPr algn="l" indent="0" marL="0">
+            <a:pPr marL="0" indent="0" algn="l">
               <a:lnSpc>
                 <a:spcPct val="140000"/>
               </a:lnSpc>
@@ -3316,6 +3081,7 @@
         <a:solidFill>
           <a:srgbClr val="1B2A41"/>
         </a:solidFill>
+        <a:effectLst/>
       </p:bgPr>
     </p:bg>
     <p:spTree>
@@ -3355,7 +3121,7 @@
           </a:bodyPr>
           <a:lstStyle/>
           <a:p>
-            <a:pPr algn="l" indent="0" marL="0">
+            <a:pPr marL="0" indent="0" algn="l">
               <a:lnSpc>
                 <a:spcPts val="2240"/>
               </a:lnSpc>
@@ -3370,7 +3136,7 @@
                 <a:ea typeface="Helvetica" pitchFamily="34" charset="-122"/>
                 <a:cs typeface="Helvetica" pitchFamily="34" charset="-120"/>
               </a:rPr>
-              <a:t>BS DATA SCIENCE · SEMESTER 4</a:t>
+              <a:t>BS DATA SCIENCE</a:t>
             </a:r>
             <a:endParaRPr lang="en-US" sz="1600" dirty="0"/>
           </a:p>
@@ -3379,7 +3145,9 @@
       <p:sp>
         <p:nvSpPr>
           <p:cNvPr id="3" name="Text 1"/>
-          <p:cNvSpPr/>
+          <p:cNvSpPr>
+            <a:spLocks noGrp="1"/>
+          </p:cNvSpPr>
           <p:nvPr>
             <p:ph type="title"/>
           </p:nvPr>
@@ -3401,7 +3169,7 @@
           </a:bodyPr>
           <a:lstStyle/>
           <a:p>
-            <a:pPr algn="l" indent="0" marL="0">
+            <a:pPr marL="0" indent="0" algn="l">
               <a:lnSpc>
                 <a:spcPts val="5880"/>
               </a:lnSpc>
@@ -3445,7 +3213,7 @@
           </a:bodyPr>
           <a:lstStyle/>
           <a:p>
-            <a:pPr algn="l" indent="0" marL="0">
+            <a:pPr marL="0" indent="0" algn="l">
               <a:lnSpc>
                 <a:spcPts val="2760"/>
               </a:lnSpc>
@@ -3489,7 +3257,7 @@
           </a:bodyPr>
           <a:lstStyle/>
           <a:p>
-            <a:pPr algn="l" indent="0" marL="0">
+            <a:pPr marL="0" indent="0" algn="l">
               <a:lnSpc>
                 <a:spcPts val="1680"/>
               </a:lnSpc>
@@ -3526,6 +3294,7 @@
         <a:solidFill>
           <a:srgbClr val="F7F5EF"/>
         </a:solidFill>
+        <a:effectLst/>
       </p:bgPr>
     </p:bg>
     <p:spTree>
@@ -3545,7 +3314,9 @@
       <p:sp>
         <p:nvSpPr>
           <p:cNvPr id="2" name="Text 0"/>
-          <p:cNvSpPr/>
+          <p:cNvSpPr>
+            <a:spLocks noGrp="1"/>
+          </p:cNvSpPr>
           <p:nvPr>
             <p:ph type="title"/>
           </p:nvPr>
@@ -3567,7 +3338,7 @@
           </a:bodyPr>
           <a:lstStyle/>
           <a:p>
-            <a:pPr algn="l" indent="0" marL="0">
+            <a:pPr marL="0" indent="0" algn="l">
               <a:lnSpc>
                 <a:spcPts val="3300"/>
               </a:lnSpc>
@@ -3615,7 +3386,7 @@
           </a:bodyPr>
           <a:lstStyle/>
           <a:p>
-            <a:pPr algn="l" indent="0" marL="0">
+            <a:pPr marL="0" indent="0" algn="l">
               <a:lnSpc>
                 <a:spcPts val="2030"/>
               </a:lnSpc>
@@ -3635,7 +3406,7 @@
             <a:endParaRPr lang="en-US" sz="1400" dirty="0"/>
           </a:p>
           <a:p>
-            <a:pPr algn="l" indent="0" marL="0">
+            <a:pPr marL="0" indent="0" algn="l">
               <a:lnSpc>
                 <a:spcPts val="2030"/>
               </a:lnSpc>
@@ -3655,7 +3426,7 @@
             <a:endParaRPr lang="en-US" sz="1400" dirty="0"/>
           </a:p>
           <a:p>
-            <a:pPr algn="l" indent="0" marL="0">
+            <a:pPr marL="0" indent="0" algn="l">
               <a:lnSpc>
                 <a:spcPts val="2030"/>
               </a:lnSpc>
@@ -3675,7 +3446,7 @@
             <a:endParaRPr lang="en-US" sz="1400" dirty="0"/>
           </a:p>
           <a:p>
-            <a:pPr algn="l" indent="0" marL="0">
+            <a:pPr marL="0" indent="0" algn="l">
               <a:lnSpc>
                 <a:spcPts val="2030"/>
               </a:lnSpc>
@@ -3684,7 +3455,7 @@
             <a:endParaRPr lang="en-US" sz="1400" dirty="0"/>
           </a:p>
           <a:p>
-            <a:pPr algn="l" indent="0" marL="0">
+            <a:pPr marL="0" indent="0" algn="l">
               <a:lnSpc>
                 <a:spcPts val="2030"/>
               </a:lnSpc>
@@ -3704,7 +3475,7 @@
             <a:endParaRPr lang="en-US" sz="1400" dirty="0"/>
           </a:p>
           <a:p>
-            <a:pPr algn="l" indent="0" marL="0">
+            <a:pPr marL="0" indent="0" algn="l">
               <a:lnSpc>
                 <a:spcPts val="2030"/>
               </a:lnSpc>
@@ -3724,7 +3495,7 @@
             <a:endParaRPr lang="en-US" sz="1400" dirty="0"/>
           </a:p>
           <a:p>
-            <a:pPr algn="l" indent="0" marL="0">
+            <a:pPr marL="0" indent="0" algn="l">
               <a:lnSpc>
                 <a:spcPts val="2030"/>
               </a:lnSpc>
@@ -3768,7 +3539,7 @@
           </a:bodyPr>
           <a:lstStyle/>
           <a:p>
-            <a:pPr algn="l" indent="0" marL="0">
+            <a:pPr marL="0" indent="0" algn="l">
               <a:lnSpc>
                 <a:spcPts val="1960"/>
               </a:lnSpc>
@@ -3812,7 +3583,7 @@
           </a:bodyPr>
           <a:lstStyle/>
           <a:p>
-            <a:pPr algn="l" indent="0" marL="0">
+            <a:pPr marL="0" indent="0" algn="l">
               <a:lnSpc>
                 <a:spcPts val="1680"/>
               </a:lnSpc>
@@ -3849,6 +3620,7 @@
         <a:solidFill>
           <a:srgbClr val="F7F5EF"/>
         </a:solidFill>
+        <a:effectLst/>
       </p:bgPr>
     </p:bg>
     <p:spTree>
@@ -3868,7 +3640,9 @@
       <p:sp>
         <p:nvSpPr>
           <p:cNvPr id="2" name="Text 0"/>
-          <p:cNvSpPr/>
+          <p:cNvSpPr>
+            <a:spLocks noGrp="1"/>
+          </p:cNvSpPr>
           <p:nvPr>
             <p:ph type="title"/>
           </p:nvPr>
@@ -3890,7 +3664,7 @@
           </a:bodyPr>
           <a:lstStyle/>
           <a:p>
-            <a:pPr algn="l" indent="0" marL="0">
+            <a:pPr marL="0" indent="0" algn="l">
               <a:lnSpc>
                 <a:spcPts val="3300"/>
               </a:lnSpc>
@@ -3938,7 +3712,7 @@
           </a:bodyPr>
           <a:lstStyle/>
           <a:p>
-            <a:pPr algn="l" indent="0" marL="0">
+            <a:pPr marL="0" indent="0" algn="l">
               <a:lnSpc>
                 <a:spcPts val="2030"/>
               </a:lnSpc>
@@ -3958,7 +3732,7 @@
             <a:endParaRPr lang="en-US" sz="1400" dirty="0"/>
           </a:p>
           <a:p>
-            <a:pPr algn="l" indent="0" marL="0">
+            <a:pPr marL="0" indent="0" algn="l">
               <a:lnSpc>
                 <a:spcPts val="2030"/>
               </a:lnSpc>
@@ -3978,7 +3752,7 @@
             <a:endParaRPr lang="en-US" sz="1400" dirty="0"/>
           </a:p>
           <a:p>
-            <a:pPr algn="l" indent="0" marL="0">
+            <a:pPr marL="0" indent="0" algn="l">
               <a:lnSpc>
                 <a:spcPts val="2030"/>
               </a:lnSpc>
@@ -3998,7 +3772,7 @@
             <a:endParaRPr lang="en-US" sz="1400" dirty="0"/>
           </a:p>
           <a:p>
-            <a:pPr algn="l" indent="0" marL="0">
+            <a:pPr marL="0" indent="0" algn="l">
               <a:lnSpc>
                 <a:spcPts val="2030"/>
               </a:lnSpc>
@@ -4018,7 +3792,7 @@
             <a:endParaRPr lang="en-US" sz="1400" dirty="0"/>
           </a:p>
           <a:p>
-            <a:pPr algn="l" indent="0" marL="0">
+            <a:pPr marL="0" indent="0" algn="l">
               <a:lnSpc>
                 <a:spcPts val="2030"/>
               </a:lnSpc>
@@ -4065,6 +3839,13 @@
             <a:prstDash val="solid"/>
           </a:ln>
         </p:spPr>
+        <p:txBody>
+          <a:bodyPr/>
+          <a:lstStyle/>
+          <a:p>
+            <a:endParaRPr lang="en-US"/>
+          </a:p>
+        </p:txBody>
       </p:sp>
       <p:sp>
         <p:nvSpPr>
@@ -4089,7 +3870,7 @@
           </a:bodyPr>
           <a:lstStyle/>
           <a:p>
-            <a:pPr algn="l" indent="0" marL="0">
+            <a:pPr marL="0" indent="0" algn="l">
               <a:lnSpc>
                 <a:spcPts val="1680"/>
               </a:lnSpc>
@@ -4133,7 +3914,7 @@
           </a:bodyPr>
           <a:lstStyle/>
           <a:p>
-            <a:pPr algn="l" indent="0" marL="0">
+            <a:pPr marL="0" indent="0" algn="l">
               <a:lnSpc>
                 <a:spcPts val="1680"/>
               </a:lnSpc>
@@ -4180,6 +3961,13 @@
             <a:prstDash val="solid"/>
           </a:ln>
         </p:spPr>
+        <p:txBody>
+          <a:bodyPr/>
+          <a:lstStyle/>
+          <a:p>
+            <a:endParaRPr lang="en-US"/>
+          </a:p>
+        </p:txBody>
       </p:sp>
       <p:sp>
         <p:nvSpPr>
@@ -4204,7 +3992,7 @@
           </a:bodyPr>
           <a:lstStyle/>
           <a:p>
-            <a:pPr algn="l" indent="0" marL="0">
+            <a:pPr marL="0" indent="0" algn="l">
               <a:lnSpc>
                 <a:spcPts val="1680"/>
               </a:lnSpc>
@@ -4248,7 +4036,7 @@
           </a:bodyPr>
           <a:lstStyle/>
           <a:p>
-            <a:pPr algn="l" indent="0" marL="0">
+            <a:pPr marL="0" indent="0" algn="l">
               <a:lnSpc>
                 <a:spcPts val="1680"/>
               </a:lnSpc>
@@ -4295,6 +4083,13 @@
             <a:prstDash val="solid"/>
           </a:ln>
         </p:spPr>
+        <p:txBody>
+          <a:bodyPr/>
+          <a:lstStyle/>
+          <a:p>
+            <a:endParaRPr lang="en-US"/>
+          </a:p>
+        </p:txBody>
       </p:sp>
       <p:sp>
         <p:nvSpPr>
@@ -4319,7 +4114,7 @@
           </a:bodyPr>
           <a:lstStyle/>
           <a:p>
-            <a:pPr algn="l" indent="0" marL="0">
+            <a:pPr marL="0" indent="0" algn="l">
               <a:lnSpc>
                 <a:spcPts val="1680"/>
               </a:lnSpc>
@@ -4363,7 +4158,7 @@
           </a:bodyPr>
           <a:lstStyle/>
           <a:p>
-            <a:pPr algn="l" indent="0" marL="0">
+            <a:pPr marL="0" indent="0" algn="l">
               <a:lnSpc>
                 <a:spcPts val="1680"/>
               </a:lnSpc>
@@ -4410,6 +4205,13 @@
             <a:prstDash val="solid"/>
           </a:ln>
         </p:spPr>
+        <p:txBody>
+          <a:bodyPr/>
+          <a:lstStyle/>
+          <a:p>
+            <a:endParaRPr lang="en-US"/>
+          </a:p>
+        </p:txBody>
       </p:sp>
       <p:sp>
         <p:nvSpPr>
@@ -4434,7 +4236,7 @@
           </a:bodyPr>
           <a:lstStyle/>
           <a:p>
-            <a:pPr algn="l" indent="0" marL="0">
+            <a:pPr marL="0" indent="0" algn="l">
               <a:lnSpc>
                 <a:spcPts val="1680"/>
               </a:lnSpc>
@@ -4478,7 +4280,7 @@
           </a:bodyPr>
           <a:lstStyle/>
           <a:p>
-            <a:pPr algn="l" indent="0" marL="0">
+            <a:pPr marL="0" indent="0" algn="l">
               <a:lnSpc>
                 <a:spcPts val="1680"/>
               </a:lnSpc>
@@ -4522,7 +4324,7 @@
           </a:bodyPr>
           <a:lstStyle/>
           <a:p>
-            <a:pPr algn="l" indent="0" marL="0">
+            <a:pPr marL="0" indent="0" algn="l">
               <a:lnSpc>
                 <a:spcPts val="1680"/>
               </a:lnSpc>
@@ -4559,6 +4361,7 @@
         <a:solidFill>
           <a:srgbClr val="F7F5EF"/>
         </a:solidFill>
+        <a:effectLst/>
       </p:bgPr>
     </p:bg>
     <p:spTree>
@@ -4578,7 +4381,9 @@
       <p:sp>
         <p:nvSpPr>
           <p:cNvPr id="2" name="Text 0"/>
-          <p:cNvSpPr/>
+          <p:cNvSpPr>
+            <a:spLocks noGrp="1"/>
+          </p:cNvSpPr>
           <p:nvPr>
             <p:ph type="title"/>
           </p:nvPr>
@@ -4600,7 +4405,7 @@
           </a:bodyPr>
           <a:lstStyle/>
           <a:p>
-            <a:pPr algn="l" indent="0" marL="0">
+            <a:pPr marL="0" indent="0" algn="l">
               <a:lnSpc>
                 <a:spcPts val="3300"/>
               </a:lnSpc>
@@ -4648,7 +4453,7 @@
           </a:bodyPr>
           <a:lstStyle/>
           <a:p>
-            <a:pPr algn="l" indent="0" marL="0">
+            <a:pPr marL="0" indent="0" algn="l">
               <a:lnSpc>
                 <a:spcPts val="2030"/>
               </a:lnSpc>
@@ -4668,7 +4473,7 @@
             <a:endParaRPr lang="en-US" sz="1400" dirty="0"/>
           </a:p>
           <a:p>
-            <a:pPr algn="l" indent="0" marL="0">
+            <a:pPr marL="0" indent="0" algn="l">
               <a:lnSpc>
                 <a:spcPts val="2030"/>
               </a:lnSpc>
@@ -4688,7 +4493,7 @@
             <a:endParaRPr lang="en-US" sz="1400" dirty="0"/>
           </a:p>
           <a:p>
-            <a:pPr algn="l" indent="0" marL="0">
+            <a:pPr marL="0" indent="0" algn="l">
               <a:lnSpc>
                 <a:spcPts val="2030"/>
               </a:lnSpc>
@@ -4708,7 +4513,7 @@
             <a:endParaRPr lang="en-US" sz="1400" dirty="0"/>
           </a:p>
           <a:p>
-            <a:pPr algn="l" indent="0" marL="0">
+            <a:pPr marL="0" indent="0" algn="l">
               <a:lnSpc>
                 <a:spcPts val="2030"/>
               </a:lnSpc>
@@ -4752,7 +4557,7 @@
           </a:bodyPr>
           <a:lstStyle/>
           <a:p>
-            <a:pPr algn="l" indent="0" marL="0">
+            <a:pPr marL="0" indent="0" algn="l">
               <a:lnSpc>
                 <a:spcPts val="2100"/>
               </a:lnSpc>
@@ -4796,7 +4601,7 @@
           </a:bodyPr>
           <a:lstStyle/>
           <a:p>
-            <a:pPr algn="l" indent="0" marL="0">
+            <a:pPr marL="0" indent="0" algn="l">
               <a:lnSpc>
                 <a:spcPts val="1680"/>
               </a:lnSpc>
@@ -4833,6 +4638,7 @@
         <a:solidFill>
           <a:srgbClr val="F7F5EF"/>
         </a:solidFill>
+        <a:effectLst/>
       </p:bgPr>
     </p:bg>
     <p:spTree>
@@ -4852,7 +4658,9 @@
       <p:sp>
         <p:nvSpPr>
           <p:cNvPr id="2" name="Text 0"/>
-          <p:cNvSpPr/>
+          <p:cNvSpPr>
+            <a:spLocks noGrp="1"/>
+          </p:cNvSpPr>
           <p:nvPr>
             <p:ph type="title"/>
           </p:nvPr>
@@ -4874,7 +4682,7 @@
           </a:bodyPr>
           <a:lstStyle/>
           <a:p>
-            <a:pPr algn="l" indent="0" marL="0">
+            <a:pPr marL="0" indent="0" algn="l">
               <a:lnSpc>
                 <a:spcPts val="3300"/>
               </a:lnSpc>
@@ -4918,9 +4726,27 @@
             <a:tbl>
               <a:tblPr/>
               <a:tblGrid>
-                <a:gridCol w="3517900"/>
-                <a:gridCol w="3517900"/>
-                <a:gridCol w="3517900"/>
+                <a:gridCol w="3517900">
+                  <a:extLst>
+                    <a:ext uri="{9D8B030D-6E8A-4147-A177-3AD203B41FA5}">
+                      <a16:colId xmlns:a16="http://schemas.microsoft.com/office/drawing/2014/main" val="20000"/>
+                    </a:ext>
+                  </a:extLst>
+                </a:gridCol>
+                <a:gridCol w="3517900">
+                  <a:extLst>
+                    <a:ext uri="{9D8B030D-6E8A-4147-A177-3AD203B41FA5}">
+                      <a16:colId xmlns:a16="http://schemas.microsoft.com/office/drawing/2014/main" val="20001"/>
+                    </a:ext>
+                  </a:extLst>
+                </a:gridCol>
+                <a:gridCol w="3517900">
+                  <a:extLst>
+                    <a:ext uri="{9D8B030D-6E8A-4147-A177-3AD203B41FA5}">
+                      <a16:colId xmlns:a16="http://schemas.microsoft.com/office/drawing/2014/main" val="20002"/>
+                    </a:ext>
+                  </a:extLst>
+                </a:gridCol>
               </a:tblGrid>
               <a:tr h="372666">
                 <a:tc>
@@ -4928,7 +4754,7 @@
                     <a:bodyPr/>
                     <a:lstStyle/>
                     <a:p>
-                      <a:pPr indent="0" marL="0">
+                      <a:pPr marL="0" indent="0">
                         <a:lnSpc>
                           <a:spcPts val="1890"/>
                         </a:lnSpc>
@@ -4952,7 +4778,7 @@
                       </a:endParaRPr>
                     </a:p>
                   </a:txBody>
-                  <a:tcPr marL="60007" marR="60007" marT="60007" marB="60007" anchor="t">
+                  <a:tcPr marL="60007" marR="60007" marT="60007" marB="60007">
                     <a:lnL w="12700" cap="flat" cmpd="sng" algn="ctr">
                       <a:solidFill>
                         <a:srgbClr val="C5C4BF"/>
@@ -4999,7 +4825,7 @@
                     <a:bodyPr/>
                     <a:lstStyle/>
                     <a:p>
-                      <a:pPr indent="0" marL="0">
+                      <a:pPr marL="0" indent="0">
                         <a:lnSpc>
                           <a:spcPts val="1890"/>
                         </a:lnSpc>
@@ -5023,7 +4849,7 @@
                       </a:endParaRPr>
                     </a:p>
                   </a:txBody>
-                  <a:tcPr marL="60007" marR="60007" marT="60007" marB="60007" anchor="t">
+                  <a:tcPr marL="60007" marR="60007" marT="60007" marB="60007">
                     <a:lnL w="12700" cap="flat" cmpd="sng" algn="ctr">
                       <a:solidFill>
                         <a:srgbClr val="B7B5B1"/>
@@ -5070,7 +4896,7 @@
                     <a:bodyPr/>
                     <a:lstStyle/>
                     <a:p>
-                      <a:pPr indent="0" marL="0">
+                      <a:pPr marL="0" indent="0">
                         <a:lnSpc>
                           <a:spcPts val="1890"/>
                         </a:lnSpc>
@@ -5094,7 +4920,7 @@
                       </a:endParaRPr>
                     </a:p>
                   </a:txBody>
-                  <a:tcPr marL="60007" marR="60007" marT="60007" marB="60007" anchor="t">
+                  <a:tcPr marL="60007" marR="60007" marT="60007" marB="60007">
                     <a:lnL w="12700" cap="flat" cmpd="sng" algn="ctr">
                       <a:solidFill>
                         <a:srgbClr val="B7B5B1"/>
@@ -5136,6 +4962,11 @@
                     </a:solidFill>
                   </a:tcPr>
                 </a:tc>
+                <a:extLst>
+                  <a:ext uri="{0D108BD9-81ED-4DB2-BD59-A6C34878D82A}">
+                    <a16:rowId xmlns:a16="http://schemas.microsoft.com/office/drawing/2014/main" val="10000"/>
+                  </a:ext>
+                </a:extLst>
               </a:tr>
               <a:tr h="372666">
                 <a:tc>
@@ -5143,7 +4974,7 @@
                     <a:bodyPr/>
                     <a:lstStyle/>
                     <a:p>
-                      <a:pPr indent="0" marL="0">
+                      <a:pPr marL="0" indent="0">
                         <a:lnSpc>
                           <a:spcPts val="1890"/>
                         </a:lnSpc>
@@ -5167,7 +4998,7 @@
                       </a:endParaRPr>
                     </a:p>
                   </a:txBody>
-                  <a:tcPr marL="60007" marR="60007" marT="60007" marB="60007" anchor="t">
+                  <a:tcPr marL="60007" marR="60007" marT="60007" marB="60007">
                     <a:lnL w="12700" cap="flat" cmpd="sng" algn="ctr">
                       <a:solidFill>
                         <a:srgbClr val="C5C4BF"/>
@@ -5211,7 +5042,7 @@
                     <a:bodyPr/>
                     <a:lstStyle/>
                     <a:p>
-                      <a:pPr indent="0" marL="0">
+                      <a:pPr marL="0" indent="0">
                         <a:lnSpc>
                           <a:spcPts val="1890"/>
                         </a:lnSpc>
@@ -5235,7 +5066,7 @@
                       </a:endParaRPr>
                     </a:p>
                   </a:txBody>
-                  <a:tcPr marL="60007" marR="60007" marT="60007" marB="60007" anchor="t">
+                  <a:tcPr marL="60007" marR="60007" marT="60007" marB="60007">
                     <a:lnL w="12700" cap="flat" cmpd="sng" algn="ctr">
                       <a:solidFill>
                         <a:srgbClr val="C5C4BF"/>
@@ -5279,7 +5110,7 @@
                     <a:bodyPr/>
                     <a:lstStyle/>
                     <a:p>
-                      <a:pPr indent="0" marL="0">
+                      <a:pPr marL="0" indent="0">
                         <a:lnSpc>
                           <a:spcPts val="1890"/>
                         </a:lnSpc>
@@ -5303,7 +5134,7 @@
                       </a:endParaRPr>
                     </a:p>
                   </a:txBody>
-                  <a:tcPr marL="60007" marR="60007" marT="60007" marB="60007" anchor="t">
+                  <a:tcPr marL="60007" marR="60007" marT="60007" marB="60007">
                     <a:lnL w="12700" cap="flat" cmpd="sng" algn="ctr">
                       <a:solidFill>
                         <a:srgbClr val="C5C4BF"/>
@@ -5342,6 +5173,11 @@
                     </a:lnB>
                   </a:tcPr>
                 </a:tc>
+                <a:extLst>
+                  <a:ext uri="{0D108BD9-81ED-4DB2-BD59-A6C34878D82A}">
+                    <a16:rowId xmlns:a16="http://schemas.microsoft.com/office/drawing/2014/main" val="10001"/>
+                  </a:ext>
+                </a:extLst>
               </a:tr>
               <a:tr h="372666">
                 <a:tc>
@@ -5349,7 +5185,7 @@
                     <a:bodyPr/>
                     <a:lstStyle/>
                     <a:p>
-                      <a:pPr indent="0" marL="0">
+                      <a:pPr marL="0" indent="0">
                         <a:lnSpc>
                           <a:spcPts val="1890"/>
                         </a:lnSpc>
@@ -5373,7 +5209,7 @@
                       </a:endParaRPr>
                     </a:p>
                   </a:txBody>
-                  <a:tcPr marL="60007" marR="60007" marT="60007" marB="60007" anchor="t">
+                  <a:tcPr marL="60007" marR="60007" marT="60007" marB="60007">
                     <a:lnL w="12700" cap="flat" cmpd="sng" algn="ctr">
                       <a:solidFill>
                         <a:srgbClr val="C5C4BF"/>
@@ -5417,7 +5253,7 @@
                     <a:bodyPr/>
                     <a:lstStyle/>
                     <a:p>
-                      <a:pPr indent="0" marL="0">
+                      <a:pPr marL="0" indent="0">
                         <a:lnSpc>
                           <a:spcPts val="1890"/>
                         </a:lnSpc>
@@ -5441,7 +5277,7 @@
                       </a:endParaRPr>
                     </a:p>
                   </a:txBody>
-                  <a:tcPr marL="60007" marR="60007" marT="60007" marB="60007" anchor="t">
+                  <a:tcPr marL="60007" marR="60007" marT="60007" marB="60007">
                     <a:lnL w="12700" cap="flat" cmpd="sng" algn="ctr">
                       <a:solidFill>
                         <a:srgbClr val="C5C4BF"/>
@@ -5485,7 +5321,7 @@
                     <a:bodyPr/>
                     <a:lstStyle/>
                     <a:p>
-                      <a:pPr indent="0" marL="0">
+                      <a:pPr marL="0" indent="0">
                         <a:lnSpc>
                           <a:spcPts val="1890"/>
                         </a:lnSpc>
@@ -5509,7 +5345,7 @@
                       </a:endParaRPr>
                     </a:p>
                   </a:txBody>
-                  <a:tcPr marL="60007" marR="60007" marT="60007" marB="60007" anchor="t">
+                  <a:tcPr marL="60007" marR="60007" marT="60007" marB="60007">
                     <a:lnL w="12700" cap="flat" cmpd="sng" algn="ctr">
                       <a:solidFill>
                         <a:srgbClr val="C5C4BF"/>
@@ -5548,6 +5384,11 @@
                     </a:lnB>
                   </a:tcPr>
                 </a:tc>
+                <a:extLst>
+                  <a:ext uri="{0D108BD9-81ED-4DB2-BD59-A6C34878D82A}">
+                    <a16:rowId xmlns:a16="http://schemas.microsoft.com/office/drawing/2014/main" val="10002"/>
+                  </a:ext>
+                </a:extLst>
               </a:tr>
               <a:tr h="372666">
                 <a:tc>
@@ -5555,7 +5396,7 @@
                     <a:bodyPr/>
                     <a:lstStyle/>
                     <a:p>
-                      <a:pPr indent="0" marL="0">
+                      <a:pPr marL="0" indent="0">
                         <a:lnSpc>
                           <a:spcPts val="1890"/>
                         </a:lnSpc>
@@ -5579,7 +5420,7 @@
                       </a:endParaRPr>
                     </a:p>
                   </a:txBody>
-                  <a:tcPr marL="60007" marR="60007" marT="60007" marB="60007" anchor="t">
+                  <a:tcPr marL="60007" marR="60007" marT="60007" marB="60007">
                     <a:lnL w="12700" cap="flat" cmpd="sng" algn="ctr">
                       <a:solidFill>
                         <a:srgbClr val="C5C4BF"/>
@@ -5623,7 +5464,7 @@
                     <a:bodyPr/>
                     <a:lstStyle/>
                     <a:p>
-                      <a:pPr indent="0" marL="0">
+                      <a:pPr marL="0" indent="0">
                         <a:lnSpc>
                           <a:spcPts val="1890"/>
                         </a:lnSpc>
@@ -5647,7 +5488,7 @@
                       </a:endParaRPr>
                     </a:p>
                   </a:txBody>
-                  <a:tcPr marL="60007" marR="60007" marT="60007" marB="60007" anchor="t">
+                  <a:tcPr marL="60007" marR="60007" marT="60007" marB="60007">
                     <a:lnL w="12700" cap="flat" cmpd="sng" algn="ctr">
                       <a:solidFill>
                         <a:srgbClr val="C5C4BF"/>
@@ -5691,7 +5532,7 @@
                     <a:bodyPr/>
                     <a:lstStyle/>
                     <a:p>
-                      <a:pPr indent="0" marL="0">
+                      <a:pPr marL="0" indent="0">
                         <a:lnSpc>
                           <a:spcPts val="1890"/>
                         </a:lnSpc>
@@ -5715,7 +5556,7 @@
                       </a:endParaRPr>
                     </a:p>
                   </a:txBody>
-                  <a:tcPr marL="60007" marR="60007" marT="60007" marB="60007" anchor="t">
+                  <a:tcPr marL="60007" marR="60007" marT="60007" marB="60007">
                     <a:lnL w="12700" cap="flat" cmpd="sng" algn="ctr">
                       <a:solidFill>
                         <a:srgbClr val="C5C4BF"/>
@@ -5754,6 +5595,11 @@
                     </a:lnB>
                   </a:tcPr>
                 </a:tc>
+                <a:extLst>
+                  <a:ext uri="{0D108BD9-81ED-4DB2-BD59-A6C34878D82A}">
+                    <a16:rowId xmlns:a16="http://schemas.microsoft.com/office/drawing/2014/main" val="10003"/>
+                  </a:ext>
+                </a:extLst>
               </a:tr>
               <a:tr h="372666">
                 <a:tc>
@@ -5761,7 +5607,7 @@
                     <a:bodyPr/>
                     <a:lstStyle/>
                     <a:p>
-                      <a:pPr indent="0" marL="0">
+                      <a:pPr marL="0" indent="0">
                         <a:lnSpc>
                           <a:spcPts val="1890"/>
                         </a:lnSpc>
@@ -5785,7 +5631,7 @@
                       </a:endParaRPr>
                     </a:p>
                   </a:txBody>
-                  <a:tcPr marL="60007" marR="60007" marT="60007" marB="60007" anchor="t">
+                  <a:tcPr marL="60007" marR="60007" marT="60007" marB="60007">
                     <a:lnL w="12700" cap="flat" cmpd="sng" algn="ctr">
                       <a:solidFill>
                         <a:srgbClr val="C5C4BF"/>
@@ -5829,7 +5675,7 @@
                     <a:bodyPr/>
                     <a:lstStyle/>
                     <a:p>
-                      <a:pPr indent="0" marL="0">
+                      <a:pPr marL="0" indent="0">
                         <a:lnSpc>
                           <a:spcPts val="1890"/>
                         </a:lnSpc>
@@ -5853,7 +5699,7 @@
                       </a:endParaRPr>
                     </a:p>
                   </a:txBody>
-                  <a:tcPr marL="60007" marR="60007" marT="60007" marB="60007" anchor="t">
+                  <a:tcPr marL="60007" marR="60007" marT="60007" marB="60007">
                     <a:lnL w="12700" cap="flat" cmpd="sng" algn="ctr">
                       <a:solidFill>
                         <a:srgbClr val="C5C4BF"/>
@@ -5897,7 +5743,7 @@
                     <a:bodyPr/>
                     <a:lstStyle/>
                     <a:p>
-                      <a:pPr indent="0" marL="0">
+                      <a:pPr marL="0" indent="0">
                         <a:lnSpc>
                           <a:spcPts val="1890"/>
                         </a:lnSpc>
@@ -5921,7 +5767,7 @@
                       </a:endParaRPr>
                     </a:p>
                   </a:txBody>
-                  <a:tcPr marL="60007" marR="60007" marT="60007" marB="60007" anchor="t">
+                  <a:tcPr marL="60007" marR="60007" marT="60007" marB="60007">
                     <a:lnL w="12700" cap="flat" cmpd="sng" algn="ctr">
                       <a:solidFill>
                         <a:srgbClr val="C5C4BF"/>
@@ -5960,6 +5806,11 @@
                     </a:lnB>
                   </a:tcPr>
                 </a:tc>
+                <a:extLst>
+                  <a:ext uri="{0D108BD9-81ED-4DB2-BD59-A6C34878D82A}">
+                    <a16:rowId xmlns:a16="http://schemas.microsoft.com/office/drawing/2014/main" val="10004"/>
+                  </a:ext>
+                </a:extLst>
               </a:tr>
               <a:tr h="372666">
                 <a:tc>
@@ -5967,7 +5818,7 @@
                     <a:bodyPr/>
                     <a:lstStyle/>
                     <a:p>
-                      <a:pPr indent="0" marL="0">
+                      <a:pPr marL="0" indent="0">
                         <a:lnSpc>
                           <a:spcPts val="1890"/>
                         </a:lnSpc>
@@ -5991,7 +5842,7 @@
                       </a:endParaRPr>
                     </a:p>
                   </a:txBody>
-                  <a:tcPr marL="60007" marR="60007" marT="60007" marB="60007" anchor="t">
+                  <a:tcPr marL="60007" marR="60007" marT="60007" marB="60007">
                     <a:lnL w="12700" cap="flat" cmpd="sng" algn="ctr">
                       <a:solidFill>
                         <a:srgbClr val="C5C4BF"/>
@@ -6035,7 +5886,7 @@
                     <a:bodyPr/>
                     <a:lstStyle/>
                     <a:p>
-                      <a:pPr indent="0" marL="0">
+                      <a:pPr marL="0" indent="0">
                         <a:lnSpc>
                           <a:spcPts val="1890"/>
                         </a:lnSpc>
@@ -6059,7 +5910,7 @@
                       </a:endParaRPr>
                     </a:p>
                   </a:txBody>
-                  <a:tcPr marL="60007" marR="60007" marT="60007" marB="60007" anchor="t">
+                  <a:tcPr marL="60007" marR="60007" marT="60007" marB="60007">
                     <a:lnL w="12700" cap="flat" cmpd="sng" algn="ctr">
                       <a:solidFill>
                         <a:srgbClr val="C5C4BF"/>
@@ -6103,7 +5954,7 @@
                     <a:bodyPr/>
                     <a:lstStyle/>
                     <a:p>
-                      <a:pPr indent="0" marL="0">
+                      <a:pPr marL="0" indent="0">
                         <a:lnSpc>
                           <a:spcPts val="1890"/>
                         </a:lnSpc>
@@ -6127,7 +5978,7 @@
                       </a:endParaRPr>
                     </a:p>
                   </a:txBody>
-                  <a:tcPr marL="60007" marR="60007" marT="60007" marB="60007" anchor="t">
+                  <a:tcPr marL="60007" marR="60007" marT="60007" marB="60007">
                     <a:lnL w="12700" cap="flat" cmpd="sng" algn="ctr">
                       <a:solidFill>
                         <a:srgbClr val="C5C4BF"/>
@@ -6166,6 +6017,11 @@
                     </a:lnB>
                   </a:tcPr>
                 </a:tc>
+                <a:extLst>
+                  <a:ext uri="{0D108BD9-81ED-4DB2-BD59-A6C34878D82A}">
+                    <a16:rowId xmlns:a16="http://schemas.microsoft.com/office/drawing/2014/main" val="10005"/>
+                  </a:ext>
+                </a:extLst>
               </a:tr>
               <a:tr h="372666">
                 <a:tc>
@@ -6173,7 +6029,7 @@
                     <a:bodyPr/>
                     <a:lstStyle/>
                     <a:p>
-                      <a:pPr indent="0" marL="0">
+                      <a:pPr marL="0" indent="0">
                         <a:lnSpc>
                           <a:spcPts val="1890"/>
                         </a:lnSpc>
@@ -6197,7 +6053,7 @@
                       </a:endParaRPr>
                     </a:p>
                   </a:txBody>
-                  <a:tcPr marL="60007" marR="60007" marT="60007" marB="60007" anchor="t">
+                  <a:tcPr marL="60007" marR="60007" marT="60007" marB="60007">
                     <a:lnL w="12700" cap="flat" cmpd="sng" algn="ctr">
                       <a:solidFill>
                         <a:srgbClr val="C5C4BF"/>
@@ -6241,7 +6097,7 @@
                     <a:bodyPr/>
                     <a:lstStyle/>
                     <a:p>
-                      <a:pPr indent="0" marL="0">
+                      <a:pPr marL="0" indent="0">
                         <a:lnSpc>
                           <a:spcPts val="1890"/>
                         </a:lnSpc>
@@ -6265,7 +6121,7 @@
                       </a:endParaRPr>
                     </a:p>
                   </a:txBody>
-                  <a:tcPr marL="60007" marR="60007" marT="60007" marB="60007" anchor="t">
+                  <a:tcPr marL="60007" marR="60007" marT="60007" marB="60007">
                     <a:lnL w="12700" cap="flat" cmpd="sng" algn="ctr">
                       <a:solidFill>
                         <a:srgbClr val="C5C4BF"/>
@@ -6309,7 +6165,7 @@
                     <a:bodyPr/>
                     <a:lstStyle/>
                     <a:p>
-                      <a:pPr indent="0" marL="0">
+                      <a:pPr marL="0" indent="0">
                         <a:lnSpc>
                           <a:spcPts val="1890"/>
                         </a:lnSpc>
@@ -6333,7 +6189,7 @@
                       </a:endParaRPr>
                     </a:p>
                   </a:txBody>
-                  <a:tcPr marL="60007" marR="60007" marT="60007" marB="60007" anchor="t">
+                  <a:tcPr marL="60007" marR="60007" marT="60007" marB="60007">
                     <a:lnL w="12700" cap="flat" cmpd="sng" algn="ctr">
                       <a:solidFill>
                         <a:srgbClr val="C5C4BF"/>
@@ -6372,6 +6228,11 @@
                     </a:lnB>
                   </a:tcPr>
                 </a:tc>
+                <a:extLst>
+                  <a:ext uri="{0D108BD9-81ED-4DB2-BD59-A6C34878D82A}">
+                    <a16:rowId xmlns:a16="http://schemas.microsoft.com/office/drawing/2014/main" val="10006"/>
+                  </a:ext>
+                </a:extLst>
               </a:tr>
             </a:tbl>
           </a:graphicData>
@@ -6400,7 +6261,7 @@
           </a:bodyPr>
           <a:lstStyle/>
           <a:p>
-            <a:pPr algn="l" indent="0" marL="0">
+            <a:pPr marL="0" indent="0" algn="l">
               <a:lnSpc>
                 <a:spcPts val="1680"/>
               </a:lnSpc>
@@ -6437,6 +6298,7 @@
         <a:solidFill>
           <a:srgbClr val="F7F5EF"/>
         </a:solidFill>
+        <a:effectLst/>
       </p:bgPr>
     </p:bg>
     <p:spTree>
@@ -6456,7 +6318,9 @@
       <p:sp>
         <p:nvSpPr>
           <p:cNvPr id="2" name="Text 0"/>
-          <p:cNvSpPr/>
+          <p:cNvSpPr>
+            <a:spLocks noGrp="1"/>
+          </p:cNvSpPr>
           <p:nvPr>
             <p:ph type="title"/>
           </p:nvPr>
@@ -6478,7 +6342,7 @@
           </a:bodyPr>
           <a:lstStyle/>
           <a:p>
-            <a:pPr algn="l" indent="0" marL="0">
+            <a:pPr marL="0" indent="0" algn="l">
               <a:lnSpc>
                 <a:spcPts val="3300"/>
               </a:lnSpc>
@@ -6531,7 +6395,7 @@
           </a:bodyPr>
           <a:lstStyle/>
           <a:p>
-            <a:pPr algn="l" indent="0" marL="0">
+            <a:pPr marL="0" indent="0" algn="l">
               <a:lnSpc>
                 <a:spcPts val="1960"/>
               </a:lnSpc>
@@ -6551,7 +6415,7 @@
             <a:endParaRPr lang="en-US" sz="1400" dirty="0"/>
           </a:p>
           <a:p>
-            <a:pPr algn="l" indent="0" marL="0">
+            <a:pPr marL="0" indent="0" algn="l">
               <a:lnSpc>
                 <a:spcPts val="1960"/>
               </a:lnSpc>
@@ -6571,7 +6435,7 @@
             <a:endParaRPr lang="en-US" sz="1400" dirty="0"/>
           </a:p>
           <a:p>
-            <a:pPr algn="l" indent="0" marL="0">
+            <a:pPr marL="0" indent="0" algn="l">
               <a:lnSpc>
                 <a:spcPts val="1960"/>
               </a:lnSpc>
@@ -6591,7 +6455,7 @@
             <a:endParaRPr lang="en-US" sz="1400" dirty="0"/>
           </a:p>
           <a:p>
-            <a:pPr algn="l" indent="0" marL="0">
+            <a:pPr marL="0" indent="0" algn="l">
               <a:lnSpc>
                 <a:spcPts val="1960"/>
               </a:lnSpc>
@@ -6638,6 +6502,13 @@
             <a:prstDash val="solid"/>
           </a:ln>
         </p:spPr>
+        <p:txBody>
+          <a:bodyPr/>
+          <a:lstStyle/>
+          <a:p>
+            <a:endParaRPr lang="en-US"/>
+          </a:p>
+        </p:txBody>
       </p:sp>
       <p:sp>
         <p:nvSpPr>
@@ -6662,7 +6533,7 @@
           </a:bodyPr>
           <a:lstStyle/>
           <a:p>
-            <a:pPr algn="l" indent="0" marL="0">
+            <a:pPr marL="0" indent="0" algn="l">
               <a:lnSpc>
                 <a:spcPts val="1800"/>
               </a:lnSpc>
@@ -6706,7 +6577,7 @@
           </a:bodyPr>
           <a:lstStyle/>
           <a:p>
-            <a:pPr algn="l" indent="0" marL="0">
+            <a:pPr marL="0" indent="0" algn="l">
               <a:lnSpc>
                 <a:spcPts val="1820"/>
               </a:lnSpc>
@@ -6753,6 +6624,13 @@
             <a:prstDash val="solid"/>
           </a:ln>
         </p:spPr>
+        <p:txBody>
+          <a:bodyPr/>
+          <a:lstStyle/>
+          <a:p>
+            <a:endParaRPr lang="en-US"/>
+          </a:p>
+        </p:txBody>
       </p:sp>
       <p:sp>
         <p:nvSpPr>
@@ -6777,7 +6655,7 @@
           </a:bodyPr>
           <a:lstStyle/>
           <a:p>
-            <a:pPr algn="l" indent="0" marL="0">
+            <a:pPr marL="0" indent="0" algn="l">
               <a:lnSpc>
                 <a:spcPts val="1800"/>
               </a:lnSpc>
@@ -6821,7 +6699,7 @@
           </a:bodyPr>
           <a:lstStyle/>
           <a:p>
-            <a:pPr algn="l" indent="0" marL="0">
+            <a:pPr marL="0" indent="0" algn="l">
               <a:lnSpc>
                 <a:spcPts val="1820"/>
               </a:lnSpc>
@@ -6868,6 +6746,13 @@
             <a:prstDash val="solid"/>
           </a:ln>
         </p:spPr>
+        <p:txBody>
+          <a:bodyPr/>
+          <a:lstStyle/>
+          <a:p>
+            <a:endParaRPr lang="en-US"/>
+          </a:p>
+        </p:txBody>
       </p:sp>
       <p:sp>
         <p:nvSpPr>
@@ -6892,7 +6777,7 @@
           </a:bodyPr>
           <a:lstStyle/>
           <a:p>
-            <a:pPr algn="l" indent="0" marL="0">
+            <a:pPr marL="0" indent="0" algn="l">
               <a:lnSpc>
                 <a:spcPts val="1800"/>
               </a:lnSpc>
@@ -6936,7 +6821,7 @@
           </a:bodyPr>
           <a:lstStyle/>
           <a:p>
-            <a:pPr algn="l" indent="0" marL="0">
+            <a:pPr marL="0" indent="0" algn="l">
               <a:lnSpc>
                 <a:spcPts val="1820"/>
               </a:lnSpc>
@@ -6980,7 +6865,7 @@
           </a:bodyPr>
           <a:lstStyle/>
           <a:p>
-            <a:pPr algn="l" indent="0" marL="0">
+            <a:pPr marL="0" indent="0" algn="l">
               <a:lnSpc>
                 <a:spcPts val="2100"/>
               </a:lnSpc>
@@ -7024,7 +6909,7 @@
           </a:bodyPr>
           <a:lstStyle/>
           <a:p>
-            <a:pPr algn="l" indent="0" marL="0">
+            <a:pPr marL="0" indent="0" algn="l">
               <a:lnSpc>
                 <a:spcPts val="1680"/>
               </a:lnSpc>
@@ -7061,6 +6946,7 @@
         <a:solidFill>
           <a:srgbClr val="F7F5EF"/>
         </a:solidFill>
+        <a:effectLst/>
       </p:bgPr>
     </p:bg>
     <p:spTree>
@@ -7080,7 +6966,9 @@
       <p:sp>
         <p:nvSpPr>
           <p:cNvPr id="2" name="Text 0"/>
-          <p:cNvSpPr/>
+          <p:cNvSpPr>
+            <a:spLocks noGrp="1"/>
+          </p:cNvSpPr>
           <p:nvPr>
             <p:ph type="title"/>
           </p:nvPr>
@@ -7102,7 +6990,7 @@
           </a:bodyPr>
           <a:lstStyle/>
           <a:p>
-            <a:pPr algn="l" indent="0" marL="0">
+            <a:pPr marL="0" indent="0" algn="l">
               <a:lnSpc>
                 <a:spcPts val="3300"/>
               </a:lnSpc>
@@ -7150,7 +7038,7 @@
           </a:bodyPr>
           <a:lstStyle/>
           <a:p>
-            <a:pPr algn="l" indent="0" marL="0">
+            <a:pPr marL="0" indent="0" algn="l">
               <a:lnSpc>
                 <a:spcPts val="1958"/>
               </a:lnSpc>
@@ -7170,7 +7058,7 @@
             <a:endParaRPr lang="en-US" sz="1350" dirty="0"/>
           </a:p>
           <a:p>
-            <a:pPr algn="l" indent="0" marL="0">
+            <a:pPr marL="0" indent="0" algn="l">
               <a:lnSpc>
                 <a:spcPts val="1958"/>
               </a:lnSpc>
@@ -7190,7 +7078,7 @@
             <a:endParaRPr lang="en-US" sz="1350" dirty="0"/>
           </a:p>
           <a:p>
-            <a:pPr algn="l" indent="0" marL="0">
+            <a:pPr marL="0" indent="0" algn="l">
               <a:lnSpc>
                 <a:spcPts val="1958"/>
               </a:lnSpc>
@@ -7199,7 +7087,7 @@
             <a:endParaRPr lang="en-US" sz="1350" dirty="0"/>
           </a:p>
           <a:p>
-            <a:pPr algn="l" indent="0" marL="0">
+            <a:pPr marL="0" indent="0" algn="l">
               <a:lnSpc>
                 <a:spcPts val="1958"/>
               </a:lnSpc>
@@ -7219,7 +7107,7 @@
             <a:endParaRPr lang="en-US" sz="1350" dirty="0"/>
           </a:p>
           <a:p>
-            <a:pPr algn="l" indent="0" marL="0">
+            <a:pPr marL="0" indent="0" algn="l">
               <a:lnSpc>
                 <a:spcPts val="1958"/>
               </a:lnSpc>
@@ -7239,7 +7127,7 @@
             <a:endParaRPr lang="en-US" sz="1350" dirty="0"/>
           </a:p>
           <a:p>
-            <a:pPr algn="l" indent="0" marL="0">
+            <a:pPr marL="0" indent="0" algn="l">
               <a:lnSpc>
                 <a:spcPts val="1958"/>
               </a:lnSpc>
@@ -7259,7 +7147,7 @@
             <a:endParaRPr lang="en-US" sz="1350" dirty="0"/>
           </a:p>
           <a:p>
-            <a:pPr algn="l" indent="0" marL="0">
+            <a:pPr marL="0" indent="0" algn="l">
               <a:lnSpc>
                 <a:spcPts val="1958"/>
               </a:lnSpc>
@@ -7279,7 +7167,7 @@
             <a:endParaRPr lang="en-US" sz="1350" dirty="0"/>
           </a:p>
           <a:p>
-            <a:pPr algn="l" indent="0" marL="0">
+            <a:pPr marL="0" indent="0" algn="l">
               <a:lnSpc>
                 <a:spcPts val="1958"/>
               </a:lnSpc>
@@ -7323,7 +7211,7 @@
           </a:bodyPr>
           <a:lstStyle/>
           <a:p>
-            <a:pPr algn="l" indent="0" marL="0">
+            <a:pPr marL="0" indent="0" algn="l">
               <a:lnSpc>
                 <a:spcPts val="1960"/>
               </a:lnSpc>
@@ -7367,7 +7255,7 @@
           </a:bodyPr>
           <a:lstStyle/>
           <a:p>
-            <a:pPr algn="l" indent="0" marL="0">
+            <a:pPr marL="0" indent="0" algn="l">
               <a:lnSpc>
                 <a:spcPts val="1680"/>
               </a:lnSpc>
@@ -7404,6 +7292,7 @@
         <a:solidFill>
           <a:srgbClr val="F7F5EF"/>
         </a:solidFill>
+        <a:effectLst/>
       </p:bgPr>
     </p:bg>
     <p:spTree>
@@ -7423,7 +7312,9 @@
       <p:sp>
         <p:nvSpPr>
           <p:cNvPr id="2" name="Text 0"/>
-          <p:cNvSpPr/>
+          <p:cNvSpPr>
+            <a:spLocks noGrp="1"/>
+          </p:cNvSpPr>
           <p:nvPr>
             <p:ph type="title"/>
           </p:nvPr>
@@ -7445,7 +7336,7 @@
           </a:bodyPr>
           <a:lstStyle/>
           <a:p>
-            <a:pPr algn="l" indent="0" marL="0">
+            <a:pPr marL="0" indent="0" algn="l">
               <a:lnSpc>
                 <a:spcPts val="3300"/>
               </a:lnSpc>
@@ -7493,7 +7384,7 @@
           </a:bodyPr>
           <a:lstStyle/>
           <a:p>
-            <a:pPr algn="l" indent="0" marL="0">
+            <a:pPr marL="0" indent="0" algn="l">
               <a:lnSpc>
                 <a:spcPts val="2030"/>
               </a:lnSpc>
@@ -7513,7 +7404,7 @@
             <a:endParaRPr lang="en-US" sz="1400" dirty="0"/>
           </a:p>
           <a:p>
-            <a:pPr algn="l" indent="0" marL="0">
+            <a:pPr marL="0" indent="0" algn="l">
               <a:lnSpc>
                 <a:spcPts val="2030"/>
               </a:lnSpc>
@@ -7533,7 +7424,7 @@
             <a:endParaRPr lang="en-US" sz="1400" dirty="0"/>
           </a:p>
           <a:p>
-            <a:pPr algn="l" indent="0" marL="0">
+            <a:pPr marL="0" indent="0" algn="l">
               <a:lnSpc>
                 <a:spcPts val="2030"/>
               </a:lnSpc>
@@ -7553,7 +7444,7 @@
             <a:endParaRPr lang="en-US" sz="1400" dirty="0"/>
           </a:p>
           <a:p>
-            <a:pPr algn="l" indent="0" marL="0">
+            <a:pPr marL="0" indent="0" algn="l">
               <a:lnSpc>
                 <a:spcPts val="2030"/>
               </a:lnSpc>
@@ -7573,7 +7464,7 @@
             <a:endParaRPr lang="en-US" sz="1400" dirty="0"/>
           </a:p>
           <a:p>
-            <a:pPr algn="l" indent="0" marL="0">
+            <a:pPr marL="0" indent="0" algn="l">
               <a:lnSpc>
                 <a:spcPts val="2030"/>
               </a:lnSpc>
@@ -7593,7 +7484,7 @@
             <a:endParaRPr lang="en-US" sz="1400" dirty="0"/>
           </a:p>
           <a:p>
-            <a:pPr algn="l" indent="0" marL="0">
+            <a:pPr marL="0" indent="0" algn="l">
               <a:lnSpc>
                 <a:spcPts val="2030"/>
               </a:lnSpc>
@@ -7613,7 +7504,7 @@
             <a:endParaRPr lang="en-US" sz="1400" dirty="0"/>
           </a:p>
           <a:p>
-            <a:pPr algn="l" indent="0" marL="0">
+            <a:pPr marL="0" indent="0" algn="l">
               <a:lnSpc>
                 <a:spcPts val="2030"/>
               </a:lnSpc>
@@ -7657,7 +7548,7 @@
           </a:bodyPr>
           <a:lstStyle/>
           <a:p>
-            <a:pPr algn="l" indent="0" marL="0">
+            <a:pPr marL="0" indent="0" algn="l">
               <a:lnSpc>
                 <a:spcPts val="2100"/>
               </a:lnSpc>
@@ -7701,7 +7592,7 @@
           </a:bodyPr>
           <a:lstStyle/>
           <a:p>
-            <a:pPr algn="l" indent="0" marL="0">
+            <a:pPr marL="0" indent="0" algn="l">
               <a:lnSpc>
                 <a:spcPts val="1680"/>
               </a:lnSpc>
@@ -7738,6 +7629,7 @@
         <a:solidFill>
           <a:srgbClr val="F7F5EF"/>
         </a:solidFill>
+        <a:effectLst/>
       </p:bgPr>
     </p:bg>
     <p:spTree>
@@ -7757,7 +7649,9 @@
       <p:sp>
         <p:nvSpPr>
           <p:cNvPr id="2" name="Text 0"/>
-          <p:cNvSpPr/>
+          <p:cNvSpPr>
+            <a:spLocks noGrp="1"/>
+          </p:cNvSpPr>
           <p:nvPr>
             <p:ph type="title"/>
           </p:nvPr>
@@ -7779,7 +7673,7 @@
           </a:bodyPr>
           <a:lstStyle/>
           <a:p>
-            <a:pPr algn="l" indent="0" marL="0">
+            <a:pPr marL="0" indent="0" algn="l">
               <a:lnSpc>
                 <a:spcPts val="3300"/>
               </a:lnSpc>
@@ -7827,7 +7721,7 @@
           </a:bodyPr>
           <a:lstStyle/>
           <a:p>
-            <a:pPr algn="l" indent="0" marL="0">
+            <a:pPr marL="0" indent="0" algn="l">
               <a:lnSpc>
                 <a:spcPts val="2175"/>
               </a:lnSpc>
@@ -7871,7 +7765,7 @@
           </a:bodyPr>
           <a:lstStyle/>
           <a:p>
-            <a:pPr algn="l" marL="183642" indent="-183642">
+            <a:pPr marL="183642" indent="-183642" algn="l">
               <a:lnSpc>
                 <a:spcPts val="2400"/>
               </a:lnSpc>
@@ -7892,7 +7786,7 @@
             <a:endParaRPr lang="en-US" sz="1600" dirty="0"/>
           </a:p>
           <a:p>
-            <a:pPr algn="l" marL="183642" indent="-183642">
+            <a:pPr marL="183642" indent="-183642" algn="l">
               <a:lnSpc>
                 <a:spcPts val="2400"/>
               </a:lnSpc>
@@ -7913,7 +7807,7 @@
             <a:endParaRPr lang="en-US" sz="1600" dirty="0"/>
           </a:p>
           <a:p>
-            <a:pPr algn="l" marL="183642" indent="-183642">
+            <a:pPr marL="183642" indent="-183642" algn="l">
               <a:lnSpc>
                 <a:spcPts val="2400"/>
               </a:lnSpc>
@@ -7934,7 +7828,7 @@
             <a:endParaRPr lang="en-US" sz="1600" dirty="0"/>
           </a:p>
           <a:p>
-            <a:pPr algn="l" marL="183642" indent="-183642">
+            <a:pPr marL="183642" indent="-183642" algn="l">
               <a:lnSpc>
                 <a:spcPts val="2400"/>
               </a:lnSpc>
@@ -7979,7 +7873,7 @@
           </a:bodyPr>
           <a:lstStyle/>
           <a:p>
-            <a:pPr algn="l" indent="0" marL="0">
+            <a:pPr marL="0" indent="0" algn="l">
               <a:lnSpc>
                 <a:spcPts val="1960"/>
               </a:lnSpc>
@@ -8023,7 +7917,7 @@
           </a:bodyPr>
           <a:lstStyle/>
           <a:p>
-            <a:pPr algn="l" indent="0" marL="0">
+            <a:pPr marL="0" indent="0" algn="l">
               <a:lnSpc>
                 <a:spcPts val="1960"/>
               </a:lnSpc>
@@ -8067,7 +7961,7 @@
           </a:bodyPr>
           <a:lstStyle/>
           <a:p>
-            <a:pPr algn="l" indent="0" marL="0">
+            <a:pPr marL="0" indent="0" algn="l">
               <a:lnSpc>
                 <a:spcPts val="1680"/>
               </a:lnSpc>
@@ -8104,6 +7998,7 @@
         <a:solidFill>
           <a:srgbClr val="F7F5EF"/>
         </a:solidFill>
+        <a:effectLst/>
       </p:bgPr>
     </p:bg>
     <p:spTree>
@@ -8123,7 +8018,9 @@
       <p:sp>
         <p:nvSpPr>
           <p:cNvPr id="2" name="Text 0"/>
-          <p:cNvSpPr/>
+          <p:cNvSpPr>
+            <a:spLocks noGrp="1"/>
+          </p:cNvSpPr>
           <p:nvPr>
             <p:ph type="title"/>
           </p:nvPr>
@@ -8145,7 +8042,7 @@
           </a:bodyPr>
           <a:lstStyle/>
           <a:p>
-            <a:pPr algn="l" indent="0" marL="0">
+            <a:pPr marL="0" indent="0" algn="l">
               <a:lnSpc>
                 <a:spcPts val="3300"/>
               </a:lnSpc>
@@ -8189,7 +8086,7 @@
           </a:bodyPr>
           <a:lstStyle/>
           <a:p>
-            <a:pPr algn="l" marL="170180" indent="-170180">
+            <a:pPr marL="170180" indent="-170180" algn="l">
               <a:lnSpc>
                 <a:spcPts val="2250"/>
               </a:lnSpc>
@@ -8210,7 +8107,7 @@
             <a:endParaRPr lang="en-US" sz="1500" dirty="0"/>
           </a:p>
           <a:p>
-            <a:pPr algn="l" marL="170180" indent="-170180">
+            <a:pPr marL="170180" indent="-170180" algn="l">
               <a:lnSpc>
                 <a:spcPts val="2250"/>
               </a:lnSpc>
@@ -8231,7 +8128,7 @@
             <a:endParaRPr lang="en-US" sz="1500" dirty="0"/>
           </a:p>
           <a:p>
-            <a:pPr algn="l" marL="170180" indent="-170180">
+            <a:pPr marL="170180" indent="-170180" algn="l">
               <a:lnSpc>
                 <a:spcPts val="2250"/>
               </a:lnSpc>
@@ -8252,7 +8149,7 @@
             <a:endParaRPr lang="en-US" sz="1500" dirty="0"/>
           </a:p>
           <a:p>
-            <a:pPr algn="l" marL="170180" indent="-170180">
+            <a:pPr marL="170180" indent="-170180" algn="l">
               <a:lnSpc>
                 <a:spcPts val="2250"/>
               </a:lnSpc>
@@ -8297,7 +8194,7 @@
           </a:bodyPr>
           <a:lstStyle/>
           <a:p>
-            <a:pPr algn="l" indent="0" marL="0">
+            <a:pPr marL="0" indent="0" algn="l">
               <a:lnSpc>
                 <a:spcPts val="1960"/>
               </a:lnSpc>
@@ -8341,7 +8238,7 @@
           </a:bodyPr>
           <a:lstStyle/>
           <a:p>
-            <a:pPr algn="l" indent="0" marL="0">
+            <a:pPr marL="0" indent="0" algn="l">
               <a:lnSpc>
                 <a:spcPts val="1960"/>
               </a:lnSpc>
@@ -8385,7 +8282,7 @@
           </a:bodyPr>
           <a:lstStyle/>
           <a:p>
-            <a:pPr algn="l" indent="0" marL="0">
+            <a:pPr marL="0" indent="0" algn="l">
               <a:lnSpc>
                 <a:spcPts val="1680"/>
               </a:lnSpc>
@@ -8422,6 +8319,7 @@
         <a:solidFill>
           <a:srgbClr val="F7F5EF"/>
         </a:solidFill>
+        <a:effectLst/>
       </p:bgPr>
     </p:bg>
     <p:spTree>
@@ -8441,7 +8339,9 @@
       <p:sp>
         <p:nvSpPr>
           <p:cNvPr id="2" name="Text 0"/>
-          <p:cNvSpPr/>
+          <p:cNvSpPr>
+            <a:spLocks noGrp="1"/>
+          </p:cNvSpPr>
           <p:nvPr>
             <p:ph type="title"/>
           </p:nvPr>
@@ -8463,7 +8363,7 @@
           </a:bodyPr>
           <a:lstStyle/>
           <a:p>
-            <a:pPr algn="l" indent="0" marL="0">
+            <a:pPr marL="0" indent="0" algn="l">
               <a:lnSpc>
                 <a:spcPts val="3300"/>
               </a:lnSpc>
@@ -8510,6 +8410,13 @@
             <a:prstDash val="solid"/>
           </a:ln>
         </p:spPr>
+        <p:txBody>
+          <a:bodyPr/>
+          <a:lstStyle/>
+          <a:p>
+            <a:endParaRPr lang="en-US"/>
+          </a:p>
+        </p:txBody>
       </p:sp>
       <p:sp>
         <p:nvSpPr>
@@ -8534,7 +8441,7 @@
           </a:bodyPr>
           <a:lstStyle/>
           <a:p>
-            <a:pPr algn="l" indent="0" marL="0">
+            <a:pPr marL="0" indent="0" algn="l">
               <a:lnSpc>
                 <a:spcPts val="1920"/>
               </a:lnSpc>
@@ -8578,7 +8485,7 @@
           </a:bodyPr>
           <a:lstStyle/>
           <a:p>
-            <a:pPr algn="l" indent="0" marL="0">
+            <a:pPr marL="0" indent="0" algn="l">
               <a:lnSpc>
                 <a:spcPts val="1820"/>
               </a:lnSpc>
@@ -8625,6 +8532,13 @@
             <a:prstDash val="solid"/>
           </a:ln>
         </p:spPr>
+        <p:txBody>
+          <a:bodyPr/>
+          <a:lstStyle/>
+          <a:p>
+            <a:endParaRPr lang="en-US"/>
+          </a:p>
+        </p:txBody>
       </p:sp>
       <p:sp>
         <p:nvSpPr>
@@ -8649,7 +8563,7 @@
           </a:bodyPr>
           <a:lstStyle/>
           <a:p>
-            <a:pPr algn="l" indent="0" marL="0">
+            <a:pPr marL="0" indent="0" algn="l">
               <a:lnSpc>
                 <a:spcPts val="1920"/>
               </a:lnSpc>
@@ -8693,7 +8607,7 @@
           </a:bodyPr>
           <a:lstStyle/>
           <a:p>
-            <a:pPr algn="l" indent="0" marL="0">
+            <a:pPr marL="0" indent="0" algn="l">
               <a:lnSpc>
                 <a:spcPts val="1820"/>
               </a:lnSpc>
@@ -8740,6 +8654,13 @@
             <a:prstDash val="solid"/>
           </a:ln>
         </p:spPr>
+        <p:txBody>
+          <a:bodyPr/>
+          <a:lstStyle/>
+          <a:p>
+            <a:endParaRPr lang="en-US"/>
+          </a:p>
+        </p:txBody>
       </p:sp>
       <p:sp>
         <p:nvSpPr>
@@ -8764,7 +8685,7 @@
           </a:bodyPr>
           <a:lstStyle/>
           <a:p>
-            <a:pPr algn="l" indent="0" marL="0">
+            <a:pPr marL="0" indent="0" algn="l">
               <a:lnSpc>
                 <a:spcPts val="1920"/>
               </a:lnSpc>
@@ -8808,7 +8729,7 @@
           </a:bodyPr>
           <a:lstStyle/>
           <a:p>
-            <a:pPr algn="l" indent="0" marL="0">
+            <a:pPr marL="0" indent="0" algn="l">
               <a:lnSpc>
                 <a:spcPts val="1820"/>
               </a:lnSpc>
@@ -8852,7 +8773,7 @@
           </a:bodyPr>
           <a:lstStyle/>
           <a:p>
-            <a:pPr algn="l" indent="0" marL="0">
+            <a:pPr marL="0" indent="0" algn="l">
               <a:lnSpc>
                 <a:spcPts val="1960"/>
               </a:lnSpc>
@@ -8896,7 +8817,7 @@
           </a:bodyPr>
           <a:lstStyle/>
           <a:p>
-            <a:pPr algn="l" indent="0" marL="0">
+            <a:pPr marL="0" indent="0" algn="l">
               <a:lnSpc>
                 <a:spcPts val="1680"/>
               </a:lnSpc>
@@ -8933,6 +8854,7 @@
         <a:solidFill>
           <a:srgbClr val="D9661F"/>
         </a:solidFill>
+        <a:effectLst/>
       </p:bgPr>
     </p:bg>
     <p:spTree>
@@ -8952,7 +8874,9 @@
       <p:sp>
         <p:nvSpPr>
           <p:cNvPr id="2" name="Text 0"/>
-          <p:cNvSpPr/>
+          <p:cNvSpPr>
+            <a:spLocks noGrp="1"/>
+          </p:cNvSpPr>
           <p:nvPr>
             <p:ph type="title"/>
           </p:nvPr>
@@ -8974,7 +8898,7 @@
           </a:bodyPr>
           <a:lstStyle/>
           <a:p>
-            <a:pPr algn="l" indent="0" marL="0">
+            <a:pPr marL="0" indent="0" algn="l">
               <a:lnSpc>
                 <a:spcPts val="3960"/>
               </a:lnSpc>
@@ -9018,7 +8942,7 @@
           </a:bodyPr>
           <a:lstStyle/>
           <a:p>
-            <a:pPr algn="l" indent="0" marL="0">
+            <a:pPr marL="0" indent="0" algn="l">
               <a:lnSpc>
                 <a:spcPts val="2800"/>
               </a:lnSpc>
@@ -9062,7 +8986,7 @@
           </a:bodyPr>
           <a:lstStyle/>
           <a:p>
-            <a:pPr algn="l" indent="0" marL="0">
+            <a:pPr marL="0" indent="0" algn="l">
               <a:lnSpc>
                 <a:spcPts val="2380"/>
               </a:lnSpc>
@@ -9106,7 +9030,7 @@
           </a:bodyPr>
           <a:lstStyle/>
           <a:p>
-            <a:pPr algn="l" indent="0" marL="0">
+            <a:pPr marL="0" indent="0" algn="l">
               <a:lnSpc>
                 <a:spcPts val="1680"/>
               </a:lnSpc>
@@ -9143,6 +9067,7 @@
         <a:solidFill>
           <a:srgbClr val="F7F5EF"/>
         </a:solidFill>
+        <a:effectLst/>
       </p:bgPr>
     </p:bg>
     <p:spTree>
@@ -9162,7 +9087,9 @@
       <p:sp>
         <p:nvSpPr>
           <p:cNvPr id="2" name="Text 0"/>
-          <p:cNvSpPr/>
+          <p:cNvSpPr>
+            <a:spLocks noGrp="1"/>
+          </p:cNvSpPr>
           <p:nvPr>
             <p:ph type="title"/>
           </p:nvPr>
@@ -9184,7 +9111,7 @@
           </a:bodyPr>
           <a:lstStyle/>
           <a:p>
-            <a:pPr algn="l" indent="0" marL="0">
+            <a:pPr marL="0" indent="0" algn="l">
               <a:lnSpc>
                 <a:spcPts val="3300"/>
               </a:lnSpc>
@@ -9228,8 +9155,20 @@
             <a:tbl>
               <a:tblPr/>
               <a:tblGrid>
-                <a:gridCol w="5276850"/>
-                <a:gridCol w="5276850"/>
+                <a:gridCol w="5276850">
+                  <a:extLst>
+                    <a:ext uri="{9D8B030D-6E8A-4147-A177-3AD203B41FA5}">
+                      <a16:colId xmlns:a16="http://schemas.microsoft.com/office/drawing/2014/main" val="20000"/>
+                    </a:ext>
+                  </a:extLst>
+                </a:gridCol>
+                <a:gridCol w="5276850">
+                  <a:extLst>
+                    <a:ext uri="{9D8B030D-6E8A-4147-A177-3AD203B41FA5}">
+                      <a16:colId xmlns:a16="http://schemas.microsoft.com/office/drawing/2014/main" val="20001"/>
+                    </a:ext>
+                  </a:extLst>
+                </a:gridCol>
               </a:tblGrid>
               <a:tr h="386011">
                 <a:tc>
@@ -9237,7 +9176,7 @@
                     <a:bodyPr/>
                     <a:lstStyle/>
                     <a:p>
-                      <a:pPr indent="0" marL="0">
+                      <a:pPr marL="0" indent="0">
                         <a:lnSpc>
                           <a:spcPts val="1960"/>
                         </a:lnSpc>
@@ -9261,7 +9200,7 @@
                       </a:endParaRPr>
                     </a:p>
                   </a:txBody>
-                  <a:tcPr marL="62230" marR="62230" marT="62230" marB="62230" anchor="t">
+                  <a:tcPr marL="62230" marR="62230" marT="62230" marB="62230">
                     <a:lnL w="12700" cap="flat" cmpd="sng" algn="ctr">
                       <a:solidFill>
                         <a:srgbClr val="C5C4BF"/>
@@ -9308,7 +9247,7 @@
                     <a:bodyPr/>
                     <a:lstStyle/>
                     <a:p>
-                      <a:pPr indent="0" marL="0">
+                      <a:pPr marL="0" indent="0">
                         <a:lnSpc>
                           <a:spcPts val="1960"/>
                         </a:lnSpc>
@@ -9332,7 +9271,7 @@
                       </a:endParaRPr>
                     </a:p>
                   </a:txBody>
-                  <a:tcPr marL="62230" marR="62230" marT="62230" marB="62230" anchor="t">
+                  <a:tcPr marL="62230" marR="62230" marT="62230" marB="62230">
                     <a:lnL w="12700" cap="flat" cmpd="sng" algn="ctr">
                       <a:solidFill>
                         <a:srgbClr val="B7B5B1"/>
@@ -9374,6 +9313,11 @@
                     </a:solidFill>
                   </a:tcPr>
                 </a:tc>
+                <a:extLst>
+                  <a:ext uri="{0D108BD9-81ED-4DB2-BD59-A6C34878D82A}">
+                    <a16:rowId xmlns:a16="http://schemas.microsoft.com/office/drawing/2014/main" val="10000"/>
+                  </a:ext>
+                </a:extLst>
               </a:tr>
               <a:tr h="386011">
                 <a:tc>
@@ -9381,7 +9325,7 @@
                     <a:bodyPr/>
                     <a:lstStyle/>
                     <a:p>
-                      <a:pPr indent="0" marL="0">
+                      <a:pPr marL="0" indent="0">
                         <a:lnSpc>
                           <a:spcPts val="1960"/>
                         </a:lnSpc>
@@ -9405,7 +9349,7 @@
                       </a:endParaRPr>
                     </a:p>
                   </a:txBody>
-                  <a:tcPr marL="62230" marR="62230" marT="62230" marB="62230" anchor="t">
+                  <a:tcPr marL="62230" marR="62230" marT="62230" marB="62230">
                     <a:lnL w="12700" cap="flat" cmpd="sng" algn="ctr">
                       <a:solidFill>
                         <a:srgbClr val="C5C4BF"/>
@@ -9449,7 +9393,7 @@
                     <a:bodyPr/>
                     <a:lstStyle/>
                     <a:p>
-                      <a:pPr indent="0" marL="0">
+                      <a:pPr marL="0" indent="0">
                         <a:lnSpc>
                           <a:spcPts val="1960"/>
                         </a:lnSpc>
@@ -9473,7 +9417,7 @@
                       </a:endParaRPr>
                     </a:p>
                   </a:txBody>
-                  <a:tcPr marL="62230" marR="62230" marT="62230" marB="62230" anchor="t">
+                  <a:tcPr marL="62230" marR="62230" marT="62230" marB="62230">
                     <a:lnL w="12700" cap="flat" cmpd="sng" algn="ctr">
                       <a:solidFill>
                         <a:srgbClr val="C5C4BF"/>
@@ -9512,6 +9456,11 @@
                     </a:lnB>
                   </a:tcPr>
                 </a:tc>
+                <a:extLst>
+                  <a:ext uri="{0D108BD9-81ED-4DB2-BD59-A6C34878D82A}">
+                    <a16:rowId xmlns:a16="http://schemas.microsoft.com/office/drawing/2014/main" val="10001"/>
+                  </a:ext>
+                </a:extLst>
               </a:tr>
               <a:tr h="386011">
                 <a:tc>
@@ -9519,7 +9468,7 @@
                     <a:bodyPr/>
                     <a:lstStyle/>
                     <a:p>
-                      <a:pPr indent="0" marL="0">
+                      <a:pPr marL="0" indent="0">
                         <a:lnSpc>
                           <a:spcPts val="1960"/>
                         </a:lnSpc>
@@ -9543,7 +9492,7 @@
                       </a:endParaRPr>
                     </a:p>
                   </a:txBody>
-                  <a:tcPr marL="62230" marR="62230" marT="62230" marB="62230" anchor="t">
+                  <a:tcPr marL="62230" marR="62230" marT="62230" marB="62230">
                     <a:lnL w="12700" cap="flat" cmpd="sng" algn="ctr">
                       <a:solidFill>
                         <a:srgbClr val="C5C4BF"/>
@@ -9587,7 +9536,7 @@
                     <a:bodyPr/>
                     <a:lstStyle/>
                     <a:p>
-                      <a:pPr indent="0" marL="0">
+                      <a:pPr marL="0" indent="0">
                         <a:lnSpc>
                           <a:spcPts val="1960"/>
                         </a:lnSpc>
@@ -9611,7 +9560,7 @@
                       </a:endParaRPr>
                     </a:p>
                   </a:txBody>
-                  <a:tcPr marL="62230" marR="62230" marT="62230" marB="62230" anchor="t">
+                  <a:tcPr marL="62230" marR="62230" marT="62230" marB="62230">
                     <a:lnL w="12700" cap="flat" cmpd="sng" algn="ctr">
                       <a:solidFill>
                         <a:srgbClr val="C5C4BF"/>
@@ -9650,6 +9599,11 @@
                     </a:lnB>
                   </a:tcPr>
                 </a:tc>
+                <a:extLst>
+                  <a:ext uri="{0D108BD9-81ED-4DB2-BD59-A6C34878D82A}">
+                    <a16:rowId xmlns:a16="http://schemas.microsoft.com/office/drawing/2014/main" val="10002"/>
+                  </a:ext>
+                </a:extLst>
               </a:tr>
               <a:tr h="386011">
                 <a:tc>
@@ -9657,7 +9611,7 @@
                     <a:bodyPr/>
                     <a:lstStyle/>
                     <a:p>
-                      <a:pPr indent="0" marL="0">
+                      <a:pPr marL="0" indent="0">
                         <a:lnSpc>
                           <a:spcPts val="1960"/>
                         </a:lnSpc>
@@ -9681,7 +9635,7 @@
                       </a:endParaRPr>
                     </a:p>
                   </a:txBody>
-                  <a:tcPr marL="62230" marR="62230" marT="62230" marB="62230" anchor="t">
+                  <a:tcPr marL="62230" marR="62230" marT="62230" marB="62230">
                     <a:lnL w="12700" cap="flat" cmpd="sng" algn="ctr">
                       <a:solidFill>
                         <a:srgbClr val="C5C4BF"/>
@@ -9725,7 +9679,7 @@
                     <a:bodyPr/>
                     <a:lstStyle/>
                     <a:p>
-                      <a:pPr indent="0" marL="0">
+                      <a:pPr marL="0" indent="0">
                         <a:lnSpc>
                           <a:spcPts val="1960"/>
                         </a:lnSpc>
@@ -9749,7 +9703,7 @@
                       </a:endParaRPr>
                     </a:p>
                   </a:txBody>
-                  <a:tcPr marL="62230" marR="62230" marT="62230" marB="62230" anchor="t">
+                  <a:tcPr marL="62230" marR="62230" marT="62230" marB="62230">
                     <a:lnL w="12700" cap="flat" cmpd="sng" algn="ctr">
                       <a:solidFill>
                         <a:srgbClr val="C5C4BF"/>
@@ -9788,6 +9742,11 @@
                     </a:lnB>
                   </a:tcPr>
                 </a:tc>
+                <a:extLst>
+                  <a:ext uri="{0D108BD9-81ED-4DB2-BD59-A6C34878D82A}">
+                    <a16:rowId xmlns:a16="http://schemas.microsoft.com/office/drawing/2014/main" val="10003"/>
+                  </a:ext>
+                </a:extLst>
               </a:tr>
               <a:tr h="386011">
                 <a:tc>
@@ -9795,7 +9754,7 @@
                     <a:bodyPr/>
                     <a:lstStyle/>
                     <a:p>
-                      <a:pPr indent="0" marL="0">
+                      <a:pPr marL="0" indent="0">
                         <a:lnSpc>
                           <a:spcPts val="1960"/>
                         </a:lnSpc>
@@ -9819,7 +9778,7 @@
                       </a:endParaRPr>
                     </a:p>
                   </a:txBody>
-                  <a:tcPr marL="62230" marR="62230" marT="62230" marB="62230" anchor="t">
+                  <a:tcPr marL="62230" marR="62230" marT="62230" marB="62230">
                     <a:lnL w="12700" cap="flat" cmpd="sng" algn="ctr">
                       <a:solidFill>
                         <a:srgbClr val="C5C4BF"/>
@@ -9863,7 +9822,7 @@
                     <a:bodyPr/>
                     <a:lstStyle/>
                     <a:p>
-                      <a:pPr indent="0" marL="0">
+                      <a:pPr marL="0" indent="0">
                         <a:lnSpc>
                           <a:spcPts val="1960"/>
                         </a:lnSpc>
@@ -9887,7 +9846,7 @@
                       </a:endParaRPr>
                     </a:p>
                   </a:txBody>
-                  <a:tcPr marL="62230" marR="62230" marT="62230" marB="62230" anchor="t">
+                  <a:tcPr marL="62230" marR="62230" marT="62230" marB="62230">
                     <a:lnL w="12700" cap="flat" cmpd="sng" algn="ctr">
                       <a:solidFill>
                         <a:srgbClr val="C5C4BF"/>
@@ -9926,6 +9885,11 @@
                     </a:lnB>
                   </a:tcPr>
                 </a:tc>
+                <a:extLst>
+                  <a:ext uri="{0D108BD9-81ED-4DB2-BD59-A6C34878D82A}">
+                    <a16:rowId xmlns:a16="http://schemas.microsoft.com/office/drawing/2014/main" val="10004"/>
+                  </a:ext>
+                </a:extLst>
               </a:tr>
               <a:tr h="386011">
                 <a:tc>
@@ -9933,7 +9897,7 @@
                     <a:bodyPr/>
                     <a:lstStyle/>
                     <a:p>
-                      <a:pPr indent="0" marL="0">
+                      <a:pPr marL="0" indent="0">
                         <a:lnSpc>
                           <a:spcPts val="1960"/>
                         </a:lnSpc>
@@ -9957,7 +9921,7 @@
                       </a:endParaRPr>
                     </a:p>
                   </a:txBody>
-                  <a:tcPr marL="62230" marR="62230" marT="62230" marB="62230" anchor="t">
+                  <a:tcPr marL="62230" marR="62230" marT="62230" marB="62230">
                     <a:lnL w="12700" cap="flat" cmpd="sng" algn="ctr">
                       <a:solidFill>
                         <a:srgbClr val="C5C4BF"/>
@@ -10001,7 +9965,7 @@
                     <a:bodyPr/>
                     <a:lstStyle/>
                     <a:p>
-                      <a:pPr indent="0" marL="0">
+                      <a:pPr marL="0" indent="0">
                         <a:lnSpc>
                           <a:spcPts val="1960"/>
                         </a:lnSpc>
@@ -10025,7 +9989,7 @@
                       </a:endParaRPr>
                     </a:p>
                   </a:txBody>
-                  <a:tcPr marL="62230" marR="62230" marT="62230" marB="62230" anchor="t">
+                  <a:tcPr marL="62230" marR="62230" marT="62230" marB="62230">
                     <a:lnL w="12700" cap="flat" cmpd="sng" algn="ctr">
                       <a:solidFill>
                         <a:srgbClr val="C5C4BF"/>
@@ -10064,6 +10028,11 @@
                     </a:lnB>
                   </a:tcPr>
                 </a:tc>
+                <a:extLst>
+                  <a:ext uri="{0D108BD9-81ED-4DB2-BD59-A6C34878D82A}">
+                    <a16:rowId xmlns:a16="http://schemas.microsoft.com/office/drawing/2014/main" val="10005"/>
+                  </a:ext>
+                </a:extLst>
               </a:tr>
               <a:tr h="386011">
                 <a:tc>
@@ -10071,7 +10040,7 @@
                     <a:bodyPr/>
                     <a:lstStyle/>
                     <a:p>
-                      <a:pPr indent="0" marL="0">
+                      <a:pPr marL="0" indent="0">
                         <a:lnSpc>
                           <a:spcPts val="1960"/>
                         </a:lnSpc>
@@ -10095,7 +10064,7 @@
                       </a:endParaRPr>
                     </a:p>
                   </a:txBody>
-                  <a:tcPr marL="62230" marR="62230" marT="62230" marB="62230" anchor="t">
+                  <a:tcPr marL="62230" marR="62230" marT="62230" marB="62230">
                     <a:lnL w="12700" cap="flat" cmpd="sng" algn="ctr">
                       <a:solidFill>
                         <a:srgbClr val="C5C4BF"/>
@@ -10139,7 +10108,7 @@
                     <a:bodyPr/>
                     <a:lstStyle/>
                     <a:p>
-                      <a:pPr indent="0" marL="0">
+                      <a:pPr marL="0" indent="0">
                         <a:lnSpc>
                           <a:spcPts val="1960"/>
                         </a:lnSpc>
@@ -10163,7 +10132,7 @@
                       </a:endParaRPr>
                     </a:p>
                   </a:txBody>
-                  <a:tcPr marL="62230" marR="62230" marT="62230" marB="62230" anchor="t">
+                  <a:tcPr marL="62230" marR="62230" marT="62230" marB="62230">
                     <a:lnL w="12700" cap="flat" cmpd="sng" algn="ctr">
                       <a:solidFill>
                         <a:srgbClr val="C5C4BF"/>
@@ -10202,6 +10171,11 @@
                     </a:lnB>
                   </a:tcPr>
                 </a:tc>
+                <a:extLst>
+                  <a:ext uri="{0D108BD9-81ED-4DB2-BD59-A6C34878D82A}">
+                    <a16:rowId xmlns:a16="http://schemas.microsoft.com/office/drawing/2014/main" val="10006"/>
+                  </a:ext>
+                </a:extLst>
               </a:tr>
               <a:tr h="386011">
                 <a:tc>
@@ -10209,7 +10183,7 @@
                     <a:bodyPr/>
                     <a:lstStyle/>
                     <a:p>
-                      <a:pPr indent="0" marL="0">
+                      <a:pPr marL="0" indent="0">
                         <a:lnSpc>
                           <a:spcPts val="1960"/>
                         </a:lnSpc>
@@ -10233,7 +10207,7 @@
                       </a:endParaRPr>
                     </a:p>
                   </a:txBody>
-                  <a:tcPr marL="62230" marR="62230" marT="62230" marB="62230" anchor="t">
+                  <a:tcPr marL="62230" marR="62230" marT="62230" marB="62230">
                     <a:lnL w="12700" cap="flat" cmpd="sng" algn="ctr">
                       <a:solidFill>
                         <a:srgbClr val="C5C4BF"/>
@@ -10277,7 +10251,7 @@
                     <a:bodyPr/>
                     <a:lstStyle/>
                     <a:p>
-                      <a:pPr indent="0" marL="0">
+                      <a:pPr marL="0" indent="0">
                         <a:lnSpc>
                           <a:spcPts val="1960"/>
                         </a:lnSpc>
@@ -10301,7 +10275,7 @@
                       </a:endParaRPr>
                     </a:p>
                   </a:txBody>
-                  <a:tcPr marL="62230" marR="62230" marT="62230" marB="62230" anchor="t">
+                  <a:tcPr marL="62230" marR="62230" marT="62230" marB="62230">
                     <a:lnL w="12700" cap="flat" cmpd="sng" algn="ctr">
                       <a:solidFill>
                         <a:srgbClr val="C5C4BF"/>
@@ -10340,6 +10314,11 @@
                     </a:lnB>
                   </a:tcPr>
                 </a:tc>
+                <a:extLst>
+                  <a:ext uri="{0D108BD9-81ED-4DB2-BD59-A6C34878D82A}">
+                    <a16:rowId xmlns:a16="http://schemas.microsoft.com/office/drawing/2014/main" val="10007"/>
+                  </a:ext>
+                </a:extLst>
               </a:tr>
             </a:tbl>
           </a:graphicData>
@@ -10368,7 +10347,7 @@
           </a:bodyPr>
           <a:lstStyle/>
           <a:p>
-            <a:pPr algn="l" indent="0" marL="0">
+            <a:pPr marL="0" indent="0" algn="l">
               <a:lnSpc>
                 <a:spcPts val="1960"/>
               </a:lnSpc>
@@ -10412,7 +10391,7 @@
           </a:bodyPr>
           <a:lstStyle/>
           <a:p>
-            <a:pPr algn="l" indent="0" marL="0">
+            <a:pPr marL="0" indent="0" algn="l">
               <a:lnSpc>
                 <a:spcPts val="1680"/>
               </a:lnSpc>
@@ -10449,6 +10428,7 @@
         <a:solidFill>
           <a:srgbClr val="F7F5EF"/>
         </a:solidFill>
+        <a:effectLst/>
       </p:bgPr>
     </p:bg>
     <p:spTree>
@@ -10468,7 +10448,9 @@
       <p:sp>
         <p:nvSpPr>
           <p:cNvPr id="2" name="Text 0"/>
-          <p:cNvSpPr/>
+          <p:cNvSpPr>
+            <a:spLocks noGrp="1"/>
+          </p:cNvSpPr>
           <p:nvPr>
             <p:ph type="title"/>
           </p:nvPr>
@@ -10490,7 +10472,7 @@
           </a:bodyPr>
           <a:lstStyle/>
           <a:p>
-            <a:pPr algn="l" indent="0" marL="0">
+            <a:pPr marL="0" indent="0" algn="l">
               <a:lnSpc>
                 <a:spcPts val="2200"/>
               </a:lnSpc>
@@ -10538,7 +10520,7 @@
           </a:bodyPr>
           <a:lstStyle/>
           <a:p>
-            <a:pPr algn="l" indent="0" marL="0">
+            <a:pPr marL="0" indent="0" algn="l">
               <a:lnSpc>
                 <a:spcPts val="1311"/>
               </a:lnSpc>
@@ -10569,7 +10551,7 @@
             <a:endParaRPr lang="en-US" sz="950" dirty="0"/>
           </a:p>
           <a:p>
-            <a:pPr algn="l" indent="0" marL="0">
+            <a:pPr marL="0" indent="0" algn="l">
               <a:lnSpc>
                 <a:spcPts val="1311"/>
               </a:lnSpc>
@@ -10600,7 +10582,7 @@
             <a:endParaRPr lang="en-US" sz="950" dirty="0"/>
           </a:p>
           <a:p>
-            <a:pPr algn="l" indent="0" marL="0">
+            <a:pPr marL="0" indent="0" algn="l">
               <a:lnSpc>
                 <a:spcPts val="1311"/>
               </a:lnSpc>
@@ -10631,7 +10613,7 @@
             <a:endParaRPr lang="en-US" sz="950" dirty="0"/>
           </a:p>
           <a:p>
-            <a:pPr algn="l" indent="0" marL="0">
+            <a:pPr marL="0" indent="0" algn="l">
               <a:lnSpc>
                 <a:spcPts val="1311"/>
               </a:lnSpc>
@@ -10662,7 +10644,7 @@
             <a:endParaRPr lang="en-US" sz="950" dirty="0"/>
           </a:p>
           <a:p>
-            <a:pPr algn="l" indent="0" marL="0">
+            <a:pPr marL="0" indent="0" algn="l">
               <a:lnSpc>
                 <a:spcPts val="1311"/>
               </a:lnSpc>
@@ -10693,7 +10675,7 @@
             <a:endParaRPr lang="en-US" sz="950" dirty="0"/>
           </a:p>
           <a:p>
-            <a:pPr algn="l" indent="0" marL="0">
+            <a:pPr marL="0" indent="0" algn="l">
               <a:lnSpc>
                 <a:spcPts val="1311"/>
               </a:lnSpc>
@@ -10724,7 +10706,7 @@
             <a:endParaRPr lang="en-US" sz="950" dirty="0"/>
           </a:p>
           <a:p>
-            <a:pPr algn="l" indent="0" marL="0">
+            <a:pPr marL="0" indent="0" algn="l">
               <a:lnSpc>
                 <a:spcPts val="1311"/>
               </a:lnSpc>
@@ -10755,7 +10737,7 @@
             <a:endParaRPr lang="en-US" sz="950" dirty="0"/>
           </a:p>
           <a:p>
-            <a:pPr algn="l" indent="0" marL="0">
+            <a:pPr marL="0" indent="0" algn="l">
               <a:lnSpc>
                 <a:spcPts val="1311"/>
               </a:lnSpc>
@@ -10786,7 +10768,7 @@
             <a:endParaRPr lang="en-US" sz="950" dirty="0"/>
           </a:p>
           <a:p>
-            <a:pPr algn="l" indent="0" marL="0">
+            <a:pPr marL="0" indent="0" algn="l">
               <a:lnSpc>
                 <a:spcPts val="1311"/>
               </a:lnSpc>
@@ -10817,7 +10799,7 @@
             <a:endParaRPr lang="en-US" sz="950" dirty="0"/>
           </a:p>
           <a:p>
-            <a:pPr algn="l" indent="0" marL="0">
+            <a:pPr marL="0" indent="0" algn="l">
               <a:lnSpc>
                 <a:spcPts val="1311"/>
               </a:lnSpc>
@@ -10848,7 +10830,7 @@
             <a:endParaRPr lang="en-US" sz="950" dirty="0"/>
           </a:p>
           <a:p>
-            <a:pPr algn="l" indent="0" marL="0">
+            <a:pPr marL="0" indent="0" algn="l">
               <a:lnSpc>
                 <a:spcPts val="1311"/>
               </a:lnSpc>
@@ -10879,7 +10861,7 @@
             <a:endParaRPr lang="en-US" sz="950" dirty="0"/>
           </a:p>
           <a:p>
-            <a:pPr algn="l" indent="0" marL="0">
+            <a:pPr marL="0" indent="0" algn="l">
               <a:lnSpc>
                 <a:spcPts val="1311"/>
               </a:lnSpc>
@@ -10910,7 +10892,7 @@
             <a:endParaRPr lang="en-US" sz="950" dirty="0"/>
           </a:p>
           <a:p>
-            <a:pPr algn="l" indent="0" marL="0">
+            <a:pPr marL="0" indent="0" algn="l">
               <a:lnSpc>
                 <a:spcPts val="1311"/>
               </a:lnSpc>
@@ -10941,7 +10923,7 @@
             <a:endParaRPr lang="en-US" sz="950" dirty="0"/>
           </a:p>
           <a:p>
-            <a:pPr algn="l" indent="0" marL="0">
+            <a:pPr marL="0" indent="0" algn="l">
               <a:lnSpc>
                 <a:spcPts val="1311"/>
               </a:lnSpc>
@@ -10972,7 +10954,7 @@
             <a:endParaRPr lang="en-US" sz="950" dirty="0"/>
           </a:p>
           <a:p>
-            <a:pPr algn="l" indent="0" marL="0">
+            <a:pPr marL="0" indent="0" algn="l">
               <a:lnSpc>
                 <a:spcPts val="1311"/>
               </a:lnSpc>
@@ -11003,7 +10985,7 @@
             <a:endParaRPr lang="en-US" sz="950" dirty="0"/>
           </a:p>
           <a:p>
-            <a:pPr algn="l" indent="0" marL="0">
+            <a:pPr marL="0" indent="0" algn="l">
               <a:lnSpc>
                 <a:spcPts val="1311"/>
               </a:lnSpc>
@@ -11034,7 +11016,7 @@
             <a:endParaRPr lang="en-US" sz="950" dirty="0"/>
           </a:p>
           <a:p>
-            <a:pPr algn="l" indent="0" marL="0">
+            <a:pPr marL="0" indent="0" algn="l">
               <a:lnSpc>
                 <a:spcPts val="1311"/>
               </a:lnSpc>
@@ -11065,7 +11047,7 @@
             <a:endParaRPr lang="en-US" sz="950" dirty="0"/>
           </a:p>
           <a:p>
-            <a:pPr algn="l" indent="0" marL="0">
+            <a:pPr marL="0" indent="0" algn="l">
               <a:lnSpc>
                 <a:spcPts val="1311"/>
               </a:lnSpc>
@@ -11096,7 +11078,7 @@
             <a:endParaRPr lang="en-US" sz="950" dirty="0"/>
           </a:p>
           <a:p>
-            <a:pPr algn="l" indent="0" marL="0">
+            <a:pPr marL="0" indent="0" algn="l">
               <a:lnSpc>
                 <a:spcPts val="1311"/>
               </a:lnSpc>
@@ -11127,7 +11109,7 @@
             <a:endParaRPr lang="en-US" sz="950" dirty="0"/>
           </a:p>
           <a:p>
-            <a:pPr algn="l" indent="0" marL="0">
+            <a:pPr marL="0" indent="0" algn="l">
               <a:lnSpc>
                 <a:spcPts val="1311"/>
               </a:lnSpc>
@@ -11158,7 +11140,7 @@
             <a:endParaRPr lang="en-US" sz="950" dirty="0"/>
           </a:p>
           <a:p>
-            <a:pPr algn="l" indent="0" marL="0">
+            <a:pPr marL="0" indent="0" algn="l">
               <a:lnSpc>
                 <a:spcPts val="1311"/>
               </a:lnSpc>
@@ -11189,7 +11171,7 @@
             <a:endParaRPr lang="en-US" sz="950" dirty="0"/>
           </a:p>
           <a:p>
-            <a:pPr algn="l" indent="0" marL="0">
+            <a:pPr marL="0" indent="0" algn="l">
               <a:lnSpc>
                 <a:spcPts val="1311"/>
               </a:lnSpc>
@@ -11220,7 +11202,7 @@
             <a:endParaRPr lang="en-US" sz="950" dirty="0"/>
           </a:p>
           <a:p>
-            <a:pPr algn="l" indent="0" marL="0">
+            <a:pPr marL="0" indent="0" algn="l">
               <a:lnSpc>
                 <a:spcPts val="1311"/>
               </a:lnSpc>
@@ -11251,7 +11233,7 @@
             <a:endParaRPr lang="en-US" sz="950" dirty="0"/>
           </a:p>
           <a:p>
-            <a:pPr algn="l" indent="0" marL="0">
+            <a:pPr marL="0" indent="0" algn="l">
               <a:lnSpc>
                 <a:spcPts val="1311"/>
               </a:lnSpc>
@@ -11282,7 +11264,7 @@
             <a:endParaRPr lang="en-US" sz="950" dirty="0"/>
           </a:p>
           <a:p>
-            <a:pPr algn="l" indent="0" marL="0">
+            <a:pPr marL="0" indent="0" algn="l">
               <a:lnSpc>
                 <a:spcPts val="1311"/>
               </a:lnSpc>
@@ -11313,7 +11295,7 @@
             <a:endParaRPr lang="en-US" sz="950" dirty="0"/>
           </a:p>
           <a:p>
-            <a:pPr algn="l" indent="0" marL="0">
+            <a:pPr marL="0" indent="0" algn="l">
               <a:lnSpc>
                 <a:spcPts val="1311"/>
               </a:lnSpc>
@@ -11344,7 +11326,7 @@
             <a:endParaRPr lang="en-US" sz="950" dirty="0"/>
           </a:p>
           <a:p>
-            <a:pPr algn="l" indent="0" marL="0">
+            <a:pPr marL="0" indent="0" algn="l">
               <a:lnSpc>
                 <a:spcPts val="1311"/>
               </a:lnSpc>
@@ -11375,7 +11357,7 @@
             <a:endParaRPr lang="en-US" sz="950" dirty="0"/>
           </a:p>
           <a:p>
-            <a:pPr algn="l" indent="0" marL="0">
+            <a:pPr marL="0" indent="0" algn="l">
               <a:lnSpc>
                 <a:spcPts val="1311"/>
               </a:lnSpc>
@@ -11434,7 +11416,7 @@
           </a:bodyPr>
           <a:lstStyle/>
           <a:p>
-            <a:pPr algn="l" indent="0" marL="0">
+            <a:pPr marL="0" indent="0" algn="l">
               <a:lnSpc>
                 <a:spcPts val="1311"/>
               </a:lnSpc>
@@ -11465,7 +11447,7 @@
             <a:endParaRPr lang="en-US" sz="950" dirty="0"/>
           </a:p>
           <a:p>
-            <a:pPr algn="l" indent="0" marL="0">
+            <a:pPr marL="0" indent="0" algn="l">
               <a:lnSpc>
                 <a:spcPts val="1311"/>
               </a:lnSpc>
@@ -11496,7 +11478,7 @@
             <a:endParaRPr lang="en-US" sz="950" dirty="0"/>
           </a:p>
           <a:p>
-            <a:pPr algn="l" indent="0" marL="0">
+            <a:pPr marL="0" indent="0" algn="l">
               <a:lnSpc>
                 <a:spcPts val="1311"/>
               </a:lnSpc>
@@ -11527,7 +11509,7 @@
             <a:endParaRPr lang="en-US" sz="950" dirty="0"/>
           </a:p>
           <a:p>
-            <a:pPr algn="l" indent="0" marL="0">
+            <a:pPr marL="0" indent="0" algn="l">
               <a:lnSpc>
                 <a:spcPts val="1311"/>
               </a:lnSpc>
@@ -11558,7 +11540,7 @@
             <a:endParaRPr lang="en-US" sz="950" dirty="0"/>
           </a:p>
           <a:p>
-            <a:pPr algn="l" indent="0" marL="0">
+            <a:pPr marL="0" indent="0" algn="l">
               <a:lnSpc>
                 <a:spcPts val="1311"/>
               </a:lnSpc>
@@ -11589,7 +11571,7 @@
             <a:endParaRPr lang="en-US" sz="950" dirty="0"/>
           </a:p>
           <a:p>
-            <a:pPr algn="l" indent="0" marL="0">
+            <a:pPr marL="0" indent="0" algn="l">
               <a:lnSpc>
                 <a:spcPts val="1311"/>
               </a:lnSpc>
@@ -11620,7 +11602,7 @@
             <a:endParaRPr lang="en-US" sz="950" dirty="0"/>
           </a:p>
           <a:p>
-            <a:pPr algn="l" indent="0" marL="0">
+            <a:pPr marL="0" indent="0" algn="l">
               <a:lnSpc>
                 <a:spcPts val="1311"/>
               </a:lnSpc>
@@ -11651,7 +11633,7 @@
             <a:endParaRPr lang="en-US" sz="950" dirty="0"/>
           </a:p>
           <a:p>
-            <a:pPr algn="l" indent="0" marL="0">
+            <a:pPr marL="0" indent="0" algn="l">
               <a:lnSpc>
                 <a:spcPts val="1311"/>
               </a:lnSpc>
@@ -11682,7 +11664,7 @@
             <a:endParaRPr lang="en-US" sz="950" dirty="0"/>
           </a:p>
           <a:p>
-            <a:pPr algn="l" indent="0" marL="0">
+            <a:pPr marL="0" indent="0" algn="l">
               <a:lnSpc>
                 <a:spcPts val="1311"/>
               </a:lnSpc>
@@ -11713,7 +11695,7 @@
             <a:endParaRPr lang="en-US" sz="950" dirty="0"/>
           </a:p>
           <a:p>
-            <a:pPr algn="l" indent="0" marL="0">
+            <a:pPr marL="0" indent="0" algn="l">
               <a:lnSpc>
                 <a:spcPts val="1311"/>
               </a:lnSpc>
@@ -11744,7 +11726,7 @@
             <a:endParaRPr lang="en-US" sz="950" dirty="0"/>
           </a:p>
           <a:p>
-            <a:pPr algn="l" indent="0" marL="0">
+            <a:pPr marL="0" indent="0" algn="l">
               <a:lnSpc>
                 <a:spcPts val="1311"/>
               </a:lnSpc>
@@ -11775,7 +11757,7 @@
             <a:endParaRPr lang="en-US" sz="950" dirty="0"/>
           </a:p>
           <a:p>
-            <a:pPr algn="l" indent="0" marL="0">
+            <a:pPr marL="0" indent="0" algn="l">
               <a:lnSpc>
                 <a:spcPts val="1311"/>
               </a:lnSpc>
@@ -11806,7 +11788,7 @@
             <a:endParaRPr lang="en-US" sz="950" dirty="0"/>
           </a:p>
           <a:p>
-            <a:pPr algn="l" indent="0" marL="0">
+            <a:pPr marL="0" indent="0" algn="l">
               <a:lnSpc>
                 <a:spcPts val="1311"/>
               </a:lnSpc>
@@ -11837,7 +11819,7 @@
             <a:endParaRPr lang="en-US" sz="950" dirty="0"/>
           </a:p>
           <a:p>
-            <a:pPr algn="l" indent="0" marL="0">
+            <a:pPr marL="0" indent="0" algn="l">
               <a:lnSpc>
                 <a:spcPts val="1311"/>
               </a:lnSpc>
@@ -11868,7 +11850,7 @@
             <a:endParaRPr lang="en-US" sz="950" dirty="0"/>
           </a:p>
           <a:p>
-            <a:pPr algn="l" indent="0" marL="0">
+            <a:pPr marL="0" indent="0" algn="l">
               <a:lnSpc>
                 <a:spcPts val="1311"/>
               </a:lnSpc>
@@ -11899,7 +11881,7 @@
             <a:endParaRPr lang="en-US" sz="950" dirty="0"/>
           </a:p>
           <a:p>
-            <a:pPr algn="l" indent="0" marL="0">
+            <a:pPr marL="0" indent="0" algn="l">
               <a:lnSpc>
                 <a:spcPts val="1311"/>
               </a:lnSpc>
@@ -11930,7 +11912,7 @@
             <a:endParaRPr lang="en-US" sz="950" dirty="0"/>
           </a:p>
           <a:p>
-            <a:pPr algn="l" indent="0" marL="0">
+            <a:pPr marL="0" indent="0" algn="l">
               <a:lnSpc>
                 <a:spcPts val="1311"/>
               </a:lnSpc>
@@ -11961,7 +11943,7 @@
             <a:endParaRPr lang="en-US" sz="950" dirty="0"/>
           </a:p>
           <a:p>
-            <a:pPr algn="l" indent="0" marL="0">
+            <a:pPr marL="0" indent="0" algn="l">
               <a:lnSpc>
                 <a:spcPts val="1311"/>
               </a:lnSpc>
@@ -11992,7 +11974,7 @@
             <a:endParaRPr lang="en-US" sz="950" dirty="0"/>
           </a:p>
           <a:p>
-            <a:pPr algn="l" indent="0" marL="0">
+            <a:pPr marL="0" indent="0" algn="l">
               <a:lnSpc>
                 <a:spcPts val="1311"/>
               </a:lnSpc>
@@ -12023,7 +12005,7 @@
             <a:endParaRPr lang="en-US" sz="950" dirty="0"/>
           </a:p>
           <a:p>
-            <a:pPr algn="l" indent="0" marL="0">
+            <a:pPr marL="0" indent="0" algn="l">
               <a:lnSpc>
                 <a:spcPts val="1311"/>
               </a:lnSpc>
@@ -12054,7 +12036,7 @@
             <a:endParaRPr lang="en-US" sz="950" dirty="0"/>
           </a:p>
           <a:p>
-            <a:pPr algn="l" indent="0" marL="0">
+            <a:pPr marL="0" indent="0" algn="l">
               <a:lnSpc>
                 <a:spcPts val="1311"/>
               </a:lnSpc>
@@ -12085,7 +12067,7 @@
             <a:endParaRPr lang="en-US" sz="950" dirty="0"/>
           </a:p>
           <a:p>
-            <a:pPr algn="l" indent="0" marL="0">
+            <a:pPr marL="0" indent="0" algn="l">
               <a:lnSpc>
                 <a:spcPts val="1311"/>
               </a:lnSpc>
@@ -12116,7 +12098,7 @@
             <a:endParaRPr lang="en-US" sz="950" dirty="0"/>
           </a:p>
           <a:p>
-            <a:pPr algn="l" indent="0" marL="0">
+            <a:pPr marL="0" indent="0" algn="l">
               <a:lnSpc>
                 <a:spcPts val="1311"/>
               </a:lnSpc>
@@ -12147,7 +12129,7 @@
             <a:endParaRPr lang="en-US" sz="950" dirty="0"/>
           </a:p>
           <a:p>
-            <a:pPr algn="l" indent="0" marL="0">
+            <a:pPr marL="0" indent="0" algn="l">
               <a:lnSpc>
                 <a:spcPts val="1311"/>
               </a:lnSpc>
@@ -12178,7 +12160,7 @@
             <a:endParaRPr lang="en-US" sz="950" dirty="0"/>
           </a:p>
           <a:p>
-            <a:pPr algn="l" indent="0" marL="0">
+            <a:pPr marL="0" indent="0" algn="l">
               <a:lnSpc>
                 <a:spcPts val="1311"/>
               </a:lnSpc>
@@ -12209,7 +12191,7 @@
             <a:endParaRPr lang="en-US" sz="950" dirty="0"/>
           </a:p>
           <a:p>
-            <a:pPr algn="l" indent="0" marL="0">
+            <a:pPr marL="0" indent="0" algn="l">
               <a:lnSpc>
                 <a:spcPts val="1311"/>
               </a:lnSpc>
@@ -12240,7 +12222,7 @@
             <a:endParaRPr lang="en-US" sz="950" dirty="0"/>
           </a:p>
           <a:p>
-            <a:pPr algn="l" indent="0" marL="0">
+            <a:pPr marL="0" indent="0" algn="l">
               <a:lnSpc>
                 <a:spcPts val="1311"/>
               </a:lnSpc>
@@ -12271,7 +12253,7 @@
             <a:endParaRPr lang="en-US" sz="950" dirty="0"/>
           </a:p>
           <a:p>
-            <a:pPr algn="l" indent="0" marL="0">
+            <a:pPr marL="0" indent="0" algn="l">
               <a:lnSpc>
                 <a:spcPts val="1311"/>
               </a:lnSpc>
@@ -12326,7 +12308,7 @@
           </a:bodyPr>
           <a:lstStyle/>
           <a:p>
-            <a:pPr algn="l" indent="0" marL="0">
+            <a:pPr marL="0" indent="0" algn="l">
               <a:lnSpc>
                 <a:spcPts val="1680"/>
               </a:lnSpc>
@@ -12363,6 +12345,7 @@
         <a:solidFill>
           <a:srgbClr val="F7F5EF"/>
         </a:solidFill>
+        <a:effectLst/>
       </p:bgPr>
     </p:bg>
     <p:spTree>
@@ -12382,7 +12365,9 @@
       <p:sp>
         <p:nvSpPr>
           <p:cNvPr id="2" name="Text 0"/>
-          <p:cNvSpPr/>
+          <p:cNvSpPr>
+            <a:spLocks noGrp="1"/>
+          </p:cNvSpPr>
           <p:nvPr>
             <p:ph type="title"/>
           </p:nvPr>
@@ -12404,7 +12389,7 @@
           </a:bodyPr>
           <a:lstStyle/>
           <a:p>
-            <a:pPr algn="l" indent="0" marL="0">
+            <a:pPr marL="0" indent="0" algn="l">
               <a:lnSpc>
                 <a:spcPts val="2200"/>
               </a:lnSpc>
@@ -12452,7 +12437,7 @@
           </a:bodyPr>
           <a:lstStyle/>
           <a:p>
-            <a:pPr algn="l" indent="0" marL="0">
+            <a:pPr marL="0" indent="0" algn="l">
               <a:lnSpc>
                 <a:spcPts val="1311"/>
               </a:lnSpc>
@@ -12483,7 +12468,7 @@
             <a:endParaRPr lang="en-US" sz="950" dirty="0"/>
           </a:p>
           <a:p>
-            <a:pPr algn="l" indent="0" marL="0">
+            <a:pPr marL="0" indent="0" algn="l">
               <a:lnSpc>
                 <a:spcPts val="1311"/>
               </a:lnSpc>
@@ -12514,7 +12499,7 @@
             <a:endParaRPr lang="en-US" sz="950" dirty="0"/>
           </a:p>
           <a:p>
-            <a:pPr algn="l" indent="0" marL="0">
+            <a:pPr marL="0" indent="0" algn="l">
               <a:lnSpc>
                 <a:spcPts val="1311"/>
               </a:lnSpc>
@@ -12545,7 +12530,7 @@
             <a:endParaRPr lang="en-US" sz="950" dirty="0"/>
           </a:p>
           <a:p>
-            <a:pPr algn="l" indent="0" marL="0">
+            <a:pPr marL="0" indent="0" algn="l">
               <a:lnSpc>
                 <a:spcPts val="1311"/>
               </a:lnSpc>
@@ -12576,7 +12561,7 @@
             <a:endParaRPr lang="en-US" sz="950" dirty="0"/>
           </a:p>
           <a:p>
-            <a:pPr algn="l" indent="0" marL="0">
+            <a:pPr marL="0" indent="0" algn="l">
               <a:lnSpc>
                 <a:spcPts val="1311"/>
               </a:lnSpc>
@@ -12607,7 +12592,7 @@
             <a:endParaRPr lang="en-US" sz="950" dirty="0"/>
           </a:p>
           <a:p>
-            <a:pPr algn="l" indent="0" marL="0">
+            <a:pPr marL="0" indent="0" algn="l">
               <a:lnSpc>
                 <a:spcPts val="1311"/>
               </a:lnSpc>
@@ -12638,7 +12623,7 @@
             <a:endParaRPr lang="en-US" sz="950" dirty="0"/>
           </a:p>
           <a:p>
-            <a:pPr algn="l" indent="0" marL="0">
+            <a:pPr marL="0" indent="0" algn="l">
               <a:lnSpc>
                 <a:spcPts val="1311"/>
               </a:lnSpc>
@@ -12669,7 +12654,7 @@
             <a:endParaRPr lang="en-US" sz="950" dirty="0"/>
           </a:p>
           <a:p>
-            <a:pPr algn="l" indent="0" marL="0">
+            <a:pPr marL="0" indent="0" algn="l">
               <a:lnSpc>
                 <a:spcPts val="1311"/>
               </a:lnSpc>
@@ -12700,7 +12685,7 @@
             <a:endParaRPr lang="en-US" sz="950" dirty="0"/>
           </a:p>
           <a:p>
-            <a:pPr algn="l" indent="0" marL="0">
+            <a:pPr marL="0" indent="0" algn="l">
               <a:lnSpc>
                 <a:spcPts val="1311"/>
               </a:lnSpc>
@@ -12731,7 +12716,7 @@
             <a:endParaRPr lang="en-US" sz="950" dirty="0"/>
           </a:p>
           <a:p>
-            <a:pPr algn="l" indent="0" marL="0">
+            <a:pPr marL="0" indent="0" algn="l">
               <a:lnSpc>
                 <a:spcPts val="1311"/>
               </a:lnSpc>
@@ -12762,7 +12747,7 @@
             <a:endParaRPr lang="en-US" sz="950" dirty="0"/>
           </a:p>
           <a:p>
-            <a:pPr algn="l" indent="0" marL="0">
+            <a:pPr marL="0" indent="0" algn="l">
               <a:lnSpc>
                 <a:spcPts val="1311"/>
               </a:lnSpc>
@@ -12793,7 +12778,7 @@
             <a:endParaRPr lang="en-US" sz="950" dirty="0"/>
           </a:p>
           <a:p>
-            <a:pPr algn="l" indent="0" marL="0">
+            <a:pPr marL="0" indent="0" algn="l">
               <a:lnSpc>
                 <a:spcPts val="1311"/>
               </a:lnSpc>
@@ -12824,7 +12809,7 @@
             <a:endParaRPr lang="en-US" sz="950" dirty="0"/>
           </a:p>
           <a:p>
-            <a:pPr algn="l" indent="0" marL="0">
+            <a:pPr marL="0" indent="0" algn="l">
               <a:lnSpc>
                 <a:spcPts val="1311"/>
               </a:lnSpc>
@@ -12855,7 +12840,7 @@
             <a:endParaRPr lang="en-US" sz="950" dirty="0"/>
           </a:p>
           <a:p>
-            <a:pPr algn="l" indent="0" marL="0">
+            <a:pPr marL="0" indent="0" algn="l">
               <a:lnSpc>
                 <a:spcPts val="1311"/>
               </a:lnSpc>
@@ -12886,7 +12871,7 @@
             <a:endParaRPr lang="en-US" sz="950" dirty="0"/>
           </a:p>
           <a:p>
-            <a:pPr algn="l" indent="0" marL="0">
+            <a:pPr marL="0" indent="0" algn="l">
               <a:lnSpc>
                 <a:spcPts val="1311"/>
               </a:lnSpc>
@@ -12917,7 +12902,7 @@
             <a:endParaRPr lang="en-US" sz="950" dirty="0"/>
           </a:p>
           <a:p>
-            <a:pPr algn="l" indent="0" marL="0">
+            <a:pPr marL="0" indent="0" algn="l">
               <a:lnSpc>
                 <a:spcPts val="1311"/>
               </a:lnSpc>
@@ -12948,7 +12933,7 @@
             <a:endParaRPr lang="en-US" sz="950" dirty="0"/>
           </a:p>
           <a:p>
-            <a:pPr algn="l" indent="0" marL="0">
+            <a:pPr marL="0" indent="0" algn="l">
               <a:lnSpc>
                 <a:spcPts val="1311"/>
               </a:lnSpc>
@@ -12979,7 +12964,7 @@
             <a:endParaRPr lang="en-US" sz="950" dirty="0"/>
           </a:p>
           <a:p>
-            <a:pPr algn="l" indent="0" marL="0">
+            <a:pPr marL="0" indent="0" algn="l">
               <a:lnSpc>
                 <a:spcPts val="1311"/>
               </a:lnSpc>
@@ -13010,7 +12995,7 @@
             <a:endParaRPr lang="en-US" sz="950" dirty="0"/>
           </a:p>
           <a:p>
-            <a:pPr algn="l" indent="0" marL="0">
+            <a:pPr marL="0" indent="0" algn="l">
               <a:lnSpc>
                 <a:spcPts val="1311"/>
               </a:lnSpc>
@@ -13041,7 +13026,7 @@
             <a:endParaRPr lang="en-US" sz="950" dirty="0"/>
           </a:p>
           <a:p>
-            <a:pPr algn="l" indent="0" marL="0">
+            <a:pPr marL="0" indent="0" algn="l">
               <a:lnSpc>
                 <a:spcPts val="1311"/>
               </a:lnSpc>
@@ -13072,7 +13057,7 @@
             <a:endParaRPr lang="en-US" sz="950" dirty="0"/>
           </a:p>
           <a:p>
-            <a:pPr algn="l" indent="0" marL="0">
+            <a:pPr marL="0" indent="0" algn="l">
               <a:lnSpc>
                 <a:spcPts val="1311"/>
               </a:lnSpc>
@@ -13103,7 +13088,7 @@
             <a:endParaRPr lang="en-US" sz="950" dirty="0"/>
           </a:p>
           <a:p>
-            <a:pPr algn="l" indent="0" marL="0">
+            <a:pPr marL="0" indent="0" algn="l">
               <a:lnSpc>
                 <a:spcPts val="1311"/>
               </a:lnSpc>
@@ -13134,7 +13119,7 @@
             <a:endParaRPr lang="en-US" sz="950" dirty="0"/>
           </a:p>
           <a:p>
-            <a:pPr algn="l" indent="0" marL="0">
+            <a:pPr marL="0" indent="0" algn="l">
               <a:lnSpc>
                 <a:spcPts val="1311"/>
               </a:lnSpc>
@@ -13165,7 +13150,7 @@
             <a:endParaRPr lang="en-US" sz="950" dirty="0"/>
           </a:p>
           <a:p>
-            <a:pPr algn="l" indent="0" marL="0">
+            <a:pPr marL="0" indent="0" algn="l">
               <a:lnSpc>
                 <a:spcPts val="1311"/>
               </a:lnSpc>
@@ -13196,7 +13181,7 @@
             <a:endParaRPr lang="en-US" sz="950" dirty="0"/>
           </a:p>
           <a:p>
-            <a:pPr algn="l" indent="0" marL="0">
+            <a:pPr marL="0" indent="0" algn="l">
               <a:lnSpc>
                 <a:spcPts val="1311"/>
               </a:lnSpc>
@@ -13227,7 +13212,7 @@
             <a:endParaRPr lang="en-US" sz="950" dirty="0"/>
           </a:p>
           <a:p>
-            <a:pPr algn="l" indent="0" marL="0">
+            <a:pPr marL="0" indent="0" algn="l">
               <a:lnSpc>
                 <a:spcPts val="1311"/>
               </a:lnSpc>
@@ -13258,7 +13243,7 @@
             <a:endParaRPr lang="en-US" sz="950" dirty="0"/>
           </a:p>
           <a:p>
-            <a:pPr algn="l" indent="0" marL="0">
+            <a:pPr marL="0" indent="0" algn="l">
               <a:lnSpc>
                 <a:spcPts val="1311"/>
               </a:lnSpc>
@@ -13289,7 +13274,7 @@
             <a:endParaRPr lang="en-US" sz="950" dirty="0"/>
           </a:p>
           <a:p>
-            <a:pPr algn="l" indent="0" marL="0">
+            <a:pPr marL="0" indent="0" algn="l">
               <a:lnSpc>
                 <a:spcPts val="1311"/>
               </a:lnSpc>
@@ -13348,7 +13333,7 @@
           </a:bodyPr>
           <a:lstStyle/>
           <a:p>
-            <a:pPr algn="l" indent="0" marL="0">
+            <a:pPr marL="0" indent="0" algn="l">
               <a:lnSpc>
                 <a:spcPts val="1311"/>
               </a:lnSpc>
@@ -13379,7 +13364,7 @@
             <a:endParaRPr lang="en-US" sz="950" dirty="0"/>
           </a:p>
           <a:p>
-            <a:pPr algn="l" indent="0" marL="0">
+            <a:pPr marL="0" indent="0" algn="l">
               <a:lnSpc>
                 <a:spcPts val="1311"/>
               </a:lnSpc>
@@ -13410,7 +13395,7 @@
             <a:endParaRPr lang="en-US" sz="950" dirty="0"/>
           </a:p>
           <a:p>
-            <a:pPr algn="l" indent="0" marL="0">
+            <a:pPr marL="0" indent="0" algn="l">
               <a:lnSpc>
                 <a:spcPts val="1311"/>
               </a:lnSpc>
@@ -13441,7 +13426,7 @@
             <a:endParaRPr lang="en-US" sz="950" dirty="0"/>
           </a:p>
           <a:p>
-            <a:pPr algn="l" indent="0" marL="0">
+            <a:pPr marL="0" indent="0" algn="l">
               <a:lnSpc>
                 <a:spcPts val="1311"/>
               </a:lnSpc>
@@ -13472,7 +13457,7 @@
             <a:endParaRPr lang="en-US" sz="950" dirty="0"/>
           </a:p>
           <a:p>
-            <a:pPr algn="l" indent="0" marL="0">
+            <a:pPr marL="0" indent="0" algn="l">
               <a:lnSpc>
                 <a:spcPts val="1311"/>
               </a:lnSpc>
@@ -13503,7 +13488,7 @@
             <a:endParaRPr lang="en-US" sz="950" dirty="0"/>
           </a:p>
           <a:p>
-            <a:pPr algn="l" indent="0" marL="0">
+            <a:pPr marL="0" indent="0" algn="l">
               <a:lnSpc>
                 <a:spcPts val="1311"/>
               </a:lnSpc>
@@ -13534,7 +13519,7 @@
             <a:endParaRPr lang="en-US" sz="950" dirty="0"/>
           </a:p>
           <a:p>
-            <a:pPr algn="l" indent="0" marL="0">
+            <a:pPr marL="0" indent="0" algn="l">
               <a:lnSpc>
                 <a:spcPts val="1311"/>
               </a:lnSpc>
@@ -13565,7 +13550,7 @@
             <a:endParaRPr lang="en-US" sz="950" dirty="0"/>
           </a:p>
           <a:p>
-            <a:pPr algn="l" indent="0" marL="0">
+            <a:pPr marL="0" indent="0" algn="l">
               <a:lnSpc>
                 <a:spcPts val="1311"/>
               </a:lnSpc>
@@ -13596,7 +13581,7 @@
             <a:endParaRPr lang="en-US" sz="950" dirty="0"/>
           </a:p>
           <a:p>
-            <a:pPr algn="l" indent="0" marL="0">
+            <a:pPr marL="0" indent="0" algn="l">
               <a:lnSpc>
                 <a:spcPts val="1311"/>
               </a:lnSpc>
@@ -13627,7 +13612,7 @@
             <a:endParaRPr lang="en-US" sz="950" dirty="0"/>
           </a:p>
           <a:p>
-            <a:pPr algn="l" indent="0" marL="0">
+            <a:pPr marL="0" indent="0" algn="l">
               <a:lnSpc>
                 <a:spcPts val="1311"/>
               </a:lnSpc>
@@ -13658,7 +13643,7 @@
             <a:endParaRPr lang="en-US" sz="950" dirty="0"/>
           </a:p>
           <a:p>
-            <a:pPr algn="l" indent="0" marL="0">
+            <a:pPr marL="0" indent="0" algn="l">
               <a:lnSpc>
                 <a:spcPts val="1311"/>
               </a:lnSpc>
@@ -13689,7 +13674,7 @@
             <a:endParaRPr lang="en-US" sz="950" dirty="0"/>
           </a:p>
           <a:p>
-            <a:pPr algn="l" indent="0" marL="0">
+            <a:pPr marL="0" indent="0" algn="l">
               <a:lnSpc>
                 <a:spcPts val="1311"/>
               </a:lnSpc>
@@ -13720,7 +13705,7 @@
             <a:endParaRPr lang="en-US" sz="950" dirty="0"/>
           </a:p>
           <a:p>
-            <a:pPr algn="l" indent="0" marL="0">
+            <a:pPr marL="0" indent="0" algn="l">
               <a:lnSpc>
                 <a:spcPts val="1311"/>
               </a:lnSpc>
@@ -13751,7 +13736,7 @@
             <a:endParaRPr lang="en-US" sz="950" dirty="0"/>
           </a:p>
           <a:p>
-            <a:pPr algn="l" indent="0" marL="0">
+            <a:pPr marL="0" indent="0" algn="l">
               <a:lnSpc>
                 <a:spcPts val="1311"/>
               </a:lnSpc>
@@ -13782,7 +13767,7 @@
             <a:endParaRPr lang="en-US" sz="950" dirty="0"/>
           </a:p>
           <a:p>
-            <a:pPr algn="l" indent="0" marL="0">
+            <a:pPr marL="0" indent="0" algn="l">
               <a:lnSpc>
                 <a:spcPts val="1311"/>
               </a:lnSpc>
@@ -13813,7 +13798,7 @@
             <a:endParaRPr lang="en-US" sz="950" dirty="0"/>
           </a:p>
           <a:p>
-            <a:pPr algn="l" indent="0" marL="0">
+            <a:pPr marL="0" indent="0" algn="l">
               <a:lnSpc>
                 <a:spcPts val="1311"/>
               </a:lnSpc>
@@ -13844,7 +13829,7 @@
             <a:endParaRPr lang="en-US" sz="950" dirty="0"/>
           </a:p>
           <a:p>
-            <a:pPr algn="l" indent="0" marL="0">
+            <a:pPr marL="0" indent="0" algn="l">
               <a:lnSpc>
                 <a:spcPts val="1311"/>
               </a:lnSpc>
@@ -13875,7 +13860,7 @@
             <a:endParaRPr lang="en-US" sz="950" dirty="0"/>
           </a:p>
           <a:p>
-            <a:pPr algn="l" indent="0" marL="0">
+            <a:pPr marL="0" indent="0" algn="l">
               <a:lnSpc>
                 <a:spcPts val="1311"/>
               </a:lnSpc>
@@ -13906,7 +13891,7 @@
             <a:endParaRPr lang="en-US" sz="950" dirty="0"/>
           </a:p>
           <a:p>
-            <a:pPr algn="l" indent="0" marL="0">
+            <a:pPr marL="0" indent="0" algn="l">
               <a:lnSpc>
                 <a:spcPts val="1311"/>
               </a:lnSpc>
@@ -13937,7 +13922,7 @@
             <a:endParaRPr lang="en-US" sz="950" dirty="0"/>
           </a:p>
           <a:p>
-            <a:pPr algn="l" indent="0" marL="0">
+            <a:pPr marL="0" indent="0" algn="l">
               <a:lnSpc>
                 <a:spcPts val="1311"/>
               </a:lnSpc>
@@ -13968,7 +13953,7 @@
             <a:endParaRPr lang="en-US" sz="950" dirty="0"/>
           </a:p>
           <a:p>
-            <a:pPr algn="l" indent="0" marL="0">
+            <a:pPr marL="0" indent="0" algn="l">
               <a:lnSpc>
                 <a:spcPts val="1311"/>
               </a:lnSpc>
@@ -13999,7 +13984,7 @@
             <a:endParaRPr lang="en-US" sz="950" dirty="0"/>
           </a:p>
           <a:p>
-            <a:pPr algn="l" indent="0" marL="0">
+            <a:pPr marL="0" indent="0" algn="l">
               <a:lnSpc>
                 <a:spcPts val="1311"/>
               </a:lnSpc>
@@ -14030,7 +14015,7 @@
             <a:endParaRPr lang="en-US" sz="950" dirty="0"/>
           </a:p>
           <a:p>
-            <a:pPr algn="l" indent="0" marL="0">
+            <a:pPr marL="0" indent="0" algn="l">
               <a:lnSpc>
                 <a:spcPts val="1311"/>
               </a:lnSpc>
@@ -14061,7 +14046,7 @@
             <a:endParaRPr lang="en-US" sz="950" dirty="0"/>
           </a:p>
           <a:p>
-            <a:pPr algn="l" indent="0" marL="0">
+            <a:pPr marL="0" indent="0" algn="l">
               <a:lnSpc>
                 <a:spcPts val="1311"/>
               </a:lnSpc>
@@ -14092,7 +14077,7 @@
             <a:endParaRPr lang="en-US" sz="950" dirty="0"/>
           </a:p>
           <a:p>
-            <a:pPr algn="l" indent="0" marL="0">
+            <a:pPr marL="0" indent="0" algn="l">
               <a:lnSpc>
                 <a:spcPts val="1311"/>
               </a:lnSpc>
@@ -14147,7 +14132,7 @@
           </a:bodyPr>
           <a:lstStyle/>
           <a:p>
-            <a:pPr algn="l" indent="0" marL="0">
+            <a:pPr marL="0" indent="0" algn="l">
               <a:lnSpc>
                 <a:spcPts val="1680"/>
               </a:lnSpc>
@@ -14184,6 +14169,7 @@
         <a:solidFill>
           <a:srgbClr val="F7F5EF"/>
         </a:solidFill>
+        <a:effectLst/>
       </p:bgPr>
     </p:bg>
     <p:spTree>
@@ -14203,7 +14189,9 @@
       <p:sp>
         <p:nvSpPr>
           <p:cNvPr id="2" name="Text 0"/>
-          <p:cNvSpPr/>
+          <p:cNvSpPr>
+            <a:spLocks noGrp="1"/>
+          </p:cNvSpPr>
           <p:nvPr>
             <p:ph type="title"/>
           </p:nvPr>
@@ -14225,7 +14213,7 @@
           </a:bodyPr>
           <a:lstStyle/>
           <a:p>
-            <a:pPr algn="l" indent="0" marL="0">
+            <a:pPr marL="0" indent="0" algn="l">
               <a:lnSpc>
                 <a:spcPts val="2420"/>
               </a:lnSpc>
@@ -14278,7 +14266,7 @@
           </a:bodyPr>
           <a:lstStyle/>
           <a:p>
-            <a:pPr algn="l" indent="0" marL="0">
+            <a:pPr marL="0" indent="0" algn="l">
               <a:lnSpc>
                 <a:spcPts val="1190"/>
               </a:lnSpc>
@@ -14298,7 +14286,7 @@
             <a:endParaRPr lang="en-US" sz="850" dirty="0"/>
           </a:p>
           <a:p>
-            <a:pPr algn="l" indent="0" marL="0">
+            <a:pPr marL="0" indent="0" algn="l">
               <a:lnSpc>
                 <a:spcPts val="1190"/>
               </a:lnSpc>
@@ -14318,7 +14306,7 @@
             <a:endParaRPr lang="en-US" sz="850" dirty="0"/>
           </a:p>
           <a:p>
-            <a:pPr algn="l" indent="0" marL="0">
+            <a:pPr marL="0" indent="0" algn="l">
               <a:lnSpc>
                 <a:spcPts val="1190"/>
               </a:lnSpc>
@@ -14338,7 +14326,7 @@
             <a:endParaRPr lang="en-US" sz="850" dirty="0"/>
           </a:p>
           <a:p>
-            <a:pPr algn="l" indent="0" marL="0">
+            <a:pPr marL="0" indent="0" algn="l">
               <a:lnSpc>
                 <a:spcPts val="1190"/>
               </a:lnSpc>
@@ -14358,7 +14346,7 @@
             <a:endParaRPr lang="en-US" sz="850" dirty="0"/>
           </a:p>
           <a:p>
-            <a:pPr algn="l" indent="0" marL="0">
+            <a:pPr marL="0" indent="0" algn="l">
               <a:lnSpc>
                 <a:spcPts val="1190"/>
               </a:lnSpc>
@@ -14378,7 +14366,7 @@
             <a:endParaRPr lang="en-US" sz="850" dirty="0"/>
           </a:p>
           <a:p>
-            <a:pPr algn="l" indent="0" marL="0">
+            <a:pPr marL="0" indent="0" algn="l">
               <a:lnSpc>
                 <a:spcPts val="1190"/>
               </a:lnSpc>
@@ -14398,7 +14386,7 @@
             <a:endParaRPr lang="en-US" sz="850" dirty="0"/>
           </a:p>
           <a:p>
-            <a:pPr algn="l" indent="0" marL="0">
+            <a:pPr marL="0" indent="0" algn="l">
               <a:lnSpc>
                 <a:spcPts val="1190"/>
               </a:lnSpc>
@@ -14418,7 +14406,7 @@
             <a:endParaRPr lang="en-US" sz="850" dirty="0"/>
           </a:p>
           <a:p>
-            <a:pPr algn="l" indent="0" marL="0">
+            <a:pPr marL="0" indent="0" algn="l">
               <a:lnSpc>
                 <a:spcPts val="1190"/>
               </a:lnSpc>
@@ -14438,7 +14426,7 @@
             <a:endParaRPr lang="en-US" sz="850" dirty="0"/>
           </a:p>
           <a:p>
-            <a:pPr algn="l" indent="0" marL="0">
+            <a:pPr marL="0" indent="0" algn="l">
               <a:lnSpc>
                 <a:spcPts val="1190"/>
               </a:lnSpc>
@@ -14458,7 +14446,7 @@
             <a:endParaRPr lang="en-US" sz="850" dirty="0"/>
           </a:p>
           <a:p>
-            <a:pPr algn="l" indent="0" marL="0">
+            <a:pPr marL="0" indent="0" algn="l">
               <a:lnSpc>
                 <a:spcPts val="1190"/>
               </a:lnSpc>
@@ -14478,7 +14466,7 @@
             <a:endParaRPr lang="en-US" sz="850" dirty="0"/>
           </a:p>
           <a:p>
-            <a:pPr algn="l" indent="0" marL="0">
+            <a:pPr marL="0" indent="0" algn="l">
               <a:lnSpc>
                 <a:spcPts val="1190"/>
               </a:lnSpc>
@@ -14498,7 +14486,7 @@
             <a:endParaRPr lang="en-US" sz="850" dirty="0"/>
           </a:p>
           <a:p>
-            <a:pPr algn="l" indent="0" marL="0">
+            <a:pPr marL="0" indent="0" algn="l">
               <a:lnSpc>
                 <a:spcPts val="1190"/>
               </a:lnSpc>
@@ -14518,7 +14506,7 @@
             <a:endParaRPr lang="en-US" sz="850" dirty="0"/>
           </a:p>
           <a:p>
-            <a:pPr algn="l" indent="0" marL="0">
+            <a:pPr marL="0" indent="0" algn="l">
               <a:lnSpc>
                 <a:spcPts val="1190"/>
               </a:lnSpc>
@@ -14538,7 +14526,7 @@
             <a:endParaRPr lang="en-US" sz="850" dirty="0"/>
           </a:p>
           <a:p>
-            <a:pPr algn="l" indent="0" marL="0">
+            <a:pPr marL="0" indent="0" algn="l">
               <a:lnSpc>
                 <a:spcPts val="1190"/>
               </a:lnSpc>
@@ -14582,7 +14570,7 @@
           </a:bodyPr>
           <a:lstStyle/>
           <a:p>
-            <a:pPr algn="l" marL="142494" indent="-142494">
+            <a:pPr marL="142494" indent="-142494" algn="l">
               <a:lnSpc>
                 <a:spcPts val="1800"/>
               </a:lnSpc>
@@ -14603,7 +14591,7 @@
             <a:endParaRPr lang="en-US" sz="1200" dirty="0"/>
           </a:p>
           <a:p>
-            <a:pPr algn="l" marL="142494" indent="-142494">
+            <a:pPr marL="142494" indent="-142494" algn="l">
               <a:lnSpc>
                 <a:spcPts val="1800"/>
               </a:lnSpc>
@@ -14624,7 +14612,7 @@
             <a:endParaRPr lang="en-US" sz="1200" dirty="0"/>
           </a:p>
           <a:p>
-            <a:pPr algn="l" marL="142494" indent="-142494">
+            <a:pPr marL="142494" indent="-142494" algn="l">
               <a:lnSpc>
                 <a:spcPts val="1800"/>
               </a:lnSpc>
@@ -14669,7 +14657,7 @@
           </a:bodyPr>
           <a:lstStyle/>
           <a:p>
-            <a:pPr algn="l" indent="0" marL="0">
+            <a:pPr marL="0" indent="0" algn="l">
               <a:lnSpc>
                 <a:spcPts val="1680"/>
               </a:lnSpc>
@@ -14706,6 +14694,7 @@
         <a:solidFill>
           <a:srgbClr val="F7F5EF"/>
         </a:solidFill>
+        <a:effectLst/>
       </p:bgPr>
     </p:bg>
     <p:spTree>
@@ -14725,7 +14714,9 @@
       <p:sp>
         <p:nvSpPr>
           <p:cNvPr id="2" name="Text 0"/>
-          <p:cNvSpPr/>
+          <p:cNvSpPr>
+            <a:spLocks noGrp="1"/>
+          </p:cNvSpPr>
           <p:nvPr>
             <p:ph type="title"/>
           </p:nvPr>
@@ -14747,7 +14738,7 @@
           </a:bodyPr>
           <a:lstStyle/>
           <a:p>
-            <a:pPr algn="l" indent="0" marL="0">
+            <a:pPr marL="0" indent="0" algn="l">
               <a:lnSpc>
                 <a:spcPts val="3300"/>
               </a:lnSpc>
@@ -14791,8 +14782,20 @@
             <a:tbl>
               <a:tblPr/>
               <a:tblGrid>
-                <a:gridCol w="5276850"/>
-                <a:gridCol w="5276850"/>
+                <a:gridCol w="5276850">
+                  <a:extLst>
+                    <a:ext uri="{9D8B030D-6E8A-4147-A177-3AD203B41FA5}">
+                      <a16:colId xmlns:a16="http://schemas.microsoft.com/office/drawing/2014/main" val="20000"/>
+                    </a:ext>
+                  </a:extLst>
+                </a:gridCol>
+                <a:gridCol w="5276850">
+                  <a:extLst>
+                    <a:ext uri="{9D8B030D-6E8A-4147-A177-3AD203B41FA5}">
+                      <a16:colId xmlns:a16="http://schemas.microsoft.com/office/drawing/2014/main" val="20001"/>
+                    </a:ext>
+                  </a:extLst>
+                </a:gridCol>
               </a:tblGrid>
               <a:tr h="386011">
                 <a:tc>
@@ -14800,7 +14803,7 @@
                     <a:bodyPr/>
                     <a:lstStyle/>
                     <a:p>
-                      <a:pPr indent="0" marL="0">
+                      <a:pPr marL="0" indent="0">
                         <a:lnSpc>
                           <a:spcPts val="1960"/>
                         </a:lnSpc>
@@ -14824,7 +14827,7 @@
                       </a:endParaRPr>
                     </a:p>
                   </a:txBody>
-                  <a:tcPr marL="62230" marR="62230" marT="62230" marB="62230" anchor="t">
+                  <a:tcPr marL="62230" marR="62230" marT="62230" marB="62230">
                     <a:lnL w="12700" cap="flat" cmpd="sng" algn="ctr">
                       <a:solidFill>
                         <a:srgbClr val="C5C4BF"/>
@@ -14871,7 +14874,7 @@
                     <a:bodyPr/>
                     <a:lstStyle/>
                     <a:p>
-                      <a:pPr indent="0" marL="0">
+                      <a:pPr marL="0" indent="0">
                         <a:lnSpc>
                           <a:spcPts val="1960"/>
                         </a:lnSpc>
@@ -14895,7 +14898,7 @@
                       </a:endParaRPr>
                     </a:p>
                   </a:txBody>
-                  <a:tcPr marL="62230" marR="62230" marT="62230" marB="62230" anchor="t">
+                  <a:tcPr marL="62230" marR="62230" marT="62230" marB="62230">
                     <a:lnL w="12700" cap="flat" cmpd="sng" algn="ctr">
                       <a:solidFill>
                         <a:srgbClr val="B7B5B1"/>
@@ -14937,6 +14940,11 @@
                     </a:solidFill>
                   </a:tcPr>
                 </a:tc>
+                <a:extLst>
+                  <a:ext uri="{0D108BD9-81ED-4DB2-BD59-A6C34878D82A}">
+                    <a16:rowId xmlns:a16="http://schemas.microsoft.com/office/drawing/2014/main" val="10000"/>
+                  </a:ext>
+                </a:extLst>
               </a:tr>
               <a:tr h="386011">
                 <a:tc>
@@ -14944,7 +14952,7 @@
                     <a:bodyPr/>
                     <a:lstStyle/>
                     <a:p>
-                      <a:pPr indent="0" marL="0">
+                      <a:pPr marL="0" indent="0">
                         <a:lnSpc>
                           <a:spcPts val="1960"/>
                         </a:lnSpc>
@@ -14968,7 +14976,7 @@
                       </a:endParaRPr>
                     </a:p>
                   </a:txBody>
-                  <a:tcPr marL="62230" marR="62230" marT="62230" marB="62230" anchor="t">
+                  <a:tcPr marL="62230" marR="62230" marT="62230" marB="62230">
                     <a:lnL w="12700" cap="flat" cmpd="sng" algn="ctr">
                       <a:solidFill>
                         <a:srgbClr val="C5C4BF"/>
@@ -15012,7 +15020,7 @@
                     <a:bodyPr/>
                     <a:lstStyle/>
                     <a:p>
-                      <a:pPr indent="0" marL="0">
+                      <a:pPr marL="0" indent="0">
                         <a:lnSpc>
                           <a:spcPts val="1960"/>
                         </a:lnSpc>
@@ -15036,7 +15044,7 @@
                       </a:endParaRPr>
                     </a:p>
                   </a:txBody>
-                  <a:tcPr marL="62230" marR="62230" marT="62230" marB="62230" anchor="t">
+                  <a:tcPr marL="62230" marR="62230" marT="62230" marB="62230">
                     <a:lnL w="12700" cap="flat" cmpd="sng" algn="ctr">
                       <a:solidFill>
                         <a:srgbClr val="C5C4BF"/>
@@ -15075,6 +15083,11 @@
                     </a:lnB>
                   </a:tcPr>
                 </a:tc>
+                <a:extLst>
+                  <a:ext uri="{0D108BD9-81ED-4DB2-BD59-A6C34878D82A}">
+                    <a16:rowId xmlns:a16="http://schemas.microsoft.com/office/drawing/2014/main" val="10001"/>
+                  </a:ext>
+                </a:extLst>
               </a:tr>
               <a:tr h="386011">
                 <a:tc>
@@ -15082,7 +15095,7 @@
                     <a:bodyPr/>
                     <a:lstStyle/>
                     <a:p>
-                      <a:pPr indent="0" marL="0">
+                      <a:pPr marL="0" indent="0">
                         <a:lnSpc>
                           <a:spcPts val="1960"/>
                         </a:lnSpc>
@@ -15106,7 +15119,7 @@
                       </a:endParaRPr>
                     </a:p>
                   </a:txBody>
-                  <a:tcPr marL="62230" marR="62230" marT="62230" marB="62230" anchor="t">
+                  <a:tcPr marL="62230" marR="62230" marT="62230" marB="62230">
                     <a:lnL w="12700" cap="flat" cmpd="sng" algn="ctr">
                       <a:solidFill>
                         <a:srgbClr val="C5C4BF"/>
@@ -15150,7 +15163,7 @@
                     <a:bodyPr/>
                     <a:lstStyle/>
                     <a:p>
-                      <a:pPr indent="0" marL="0">
+                      <a:pPr marL="0" indent="0">
                         <a:lnSpc>
                           <a:spcPts val="1960"/>
                         </a:lnSpc>
@@ -15174,7 +15187,7 @@
                       </a:endParaRPr>
                     </a:p>
                   </a:txBody>
-                  <a:tcPr marL="62230" marR="62230" marT="62230" marB="62230" anchor="t">
+                  <a:tcPr marL="62230" marR="62230" marT="62230" marB="62230">
                     <a:lnL w="12700" cap="flat" cmpd="sng" algn="ctr">
                       <a:solidFill>
                         <a:srgbClr val="C5C4BF"/>
@@ -15213,6 +15226,11 @@
                     </a:lnB>
                   </a:tcPr>
                 </a:tc>
+                <a:extLst>
+                  <a:ext uri="{0D108BD9-81ED-4DB2-BD59-A6C34878D82A}">
+                    <a16:rowId xmlns:a16="http://schemas.microsoft.com/office/drawing/2014/main" val="10002"/>
+                  </a:ext>
+                </a:extLst>
               </a:tr>
               <a:tr h="386011">
                 <a:tc>
@@ -15220,7 +15238,7 @@
                     <a:bodyPr/>
                     <a:lstStyle/>
                     <a:p>
-                      <a:pPr indent="0" marL="0">
+                      <a:pPr marL="0" indent="0">
                         <a:lnSpc>
                           <a:spcPts val="1960"/>
                         </a:lnSpc>
@@ -15244,7 +15262,7 @@
                       </a:endParaRPr>
                     </a:p>
                   </a:txBody>
-                  <a:tcPr marL="62230" marR="62230" marT="62230" marB="62230" anchor="t">
+                  <a:tcPr marL="62230" marR="62230" marT="62230" marB="62230">
                     <a:lnL w="12700" cap="flat" cmpd="sng" algn="ctr">
                       <a:solidFill>
                         <a:srgbClr val="C5C4BF"/>
@@ -15288,7 +15306,7 @@
                     <a:bodyPr/>
                     <a:lstStyle/>
                     <a:p>
-                      <a:pPr indent="0" marL="0">
+                      <a:pPr marL="0" indent="0">
                         <a:lnSpc>
                           <a:spcPts val="1960"/>
                         </a:lnSpc>
@@ -15312,7 +15330,7 @@
                       </a:endParaRPr>
                     </a:p>
                   </a:txBody>
-                  <a:tcPr marL="62230" marR="62230" marT="62230" marB="62230" anchor="t">
+                  <a:tcPr marL="62230" marR="62230" marT="62230" marB="62230">
                     <a:lnL w="12700" cap="flat" cmpd="sng" algn="ctr">
                       <a:solidFill>
                         <a:srgbClr val="C5C4BF"/>
@@ -15351,6 +15369,11 @@
                     </a:lnB>
                   </a:tcPr>
                 </a:tc>
+                <a:extLst>
+                  <a:ext uri="{0D108BD9-81ED-4DB2-BD59-A6C34878D82A}">
+                    <a16:rowId xmlns:a16="http://schemas.microsoft.com/office/drawing/2014/main" val="10003"/>
+                  </a:ext>
+                </a:extLst>
               </a:tr>
               <a:tr h="386011">
                 <a:tc>
@@ -15358,7 +15381,7 @@
                     <a:bodyPr/>
                     <a:lstStyle/>
                     <a:p>
-                      <a:pPr indent="0" marL="0">
+                      <a:pPr marL="0" indent="0">
                         <a:lnSpc>
                           <a:spcPts val="1960"/>
                         </a:lnSpc>
@@ -15382,7 +15405,7 @@
                       </a:endParaRPr>
                     </a:p>
                   </a:txBody>
-                  <a:tcPr marL="62230" marR="62230" marT="62230" marB="62230" anchor="t">
+                  <a:tcPr marL="62230" marR="62230" marT="62230" marB="62230">
                     <a:lnL w="12700" cap="flat" cmpd="sng" algn="ctr">
                       <a:solidFill>
                         <a:srgbClr val="C5C4BF"/>
@@ -15426,7 +15449,7 @@
                     <a:bodyPr/>
                     <a:lstStyle/>
                     <a:p>
-                      <a:pPr indent="0" marL="0">
+                      <a:pPr marL="0" indent="0">
                         <a:lnSpc>
                           <a:spcPts val="1960"/>
                         </a:lnSpc>
@@ -15450,7 +15473,7 @@
                       </a:endParaRPr>
                     </a:p>
                   </a:txBody>
-                  <a:tcPr marL="62230" marR="62230" marT="62230" marB="62230" anchor="t">
+                  <a:tcPr marL="62230" marR="62230" marT="62230" marB="62230">
                     <a:lnL w="12700" cap="flat" cmpd="sng" algn="ctr">
                       <a:solidFill>
                         <a:srgbClr val="C5C4BF"/>
@@ -15489,6 +15512,11 @@
                     </a:lnB>
                   </a:tcPr>
                 </a:tc>
+                <a:extLst>
+                  <a:ext uri="{0D108BD9-81ED-4DB2-BD59-A6C34878D82A}">
+                    <a16:rowId xmlns:a16="http://schemas.microsoft.com/office/drawing/2014/main" val="10004"/>
+                  </a:ext>
+                </a:extLst>
               </a:tr>
               <a:tr h="386011">
                 <a:tc>
@@ -15496,7 +15524,7 @@
                     <a:bodyPr/>
                     <a:lstStyle/>
                     <a:p>
-                      <a:pPr indent="0" marL="0">
+                      <a:pPr marL="0" indent="0">
                         <a:lnSpc>
                           <a:spcPts val="1960"/>
                         </a:lnSpc>
@@ -15520,7 +15548,7 @@
                       </a:endParaRPr>
                     </a:p>
                   </a:txBody>
-                  <a:tcPr marL="62230" marR="62230" marT="62230" marB="62230" anchor="t">
+                  <a:tcPr marL="62230" marR="62230" marT="62230" marB="62230">
                     <a:lnL w="12700" cap="flat" cmpd="sng" algn="ctr">
                       <a:solidFill>
                         <a:srgbClr val="C5C4BF"/>
@@ -15564,7 +15592,7 @@
                     <a:bodyPr/>
                     <a:lstStyle/>
                     <a:p>
-                      <a:pPr indent="0" marL="0">
+                      <a:pPr marL="0" indent="0">
                         <a:lnSpc>
                           <a:spcPts val="1960"/>
                         </a:lnSpc>
@@ -15588,7 +15616,7 @@
                       </a:endParaRPr>
                     </a:p>
                   </a:txBody>
-                  <a:tcPr marL="62230" marR="62230" marT="62230" marB="62230" anchor="t">
+                  <a:tcPr marL="62230" marR="62230" marT="62230" marB="62230">
                     <a:lnL w="12700" cap="flat" cmpd="sng" algn="ctr">
                       <a:solidFill>
                         <a:srgbClr val="C5C4BF"/>
@@ -15627,6 +15655,11 @@
                     </a:lnB>
                   </a:tcPr>
                 </a:tc>
+                <a:extLst>
+                  <a:ext uri="{0D108BD9-81ED-4DB2-BD59-A6C34878D82A}">
+                    <a16:rowId xmlns:a16="http://schemas.microsoft.com/office/drawing/2014/main" val="10005"/>
+                  </a:ext>
+                </a:extLst>
               </a:tr>
               <a:tr h="386011">
                 <a:tc>
@@ -15634,7 +15667,7 @@
                     <a:bodyPr/>
                     <a:lstStyle/>
                     <a:p>
-                      <a:pPr indent="0" marL="0">
+                      <a:pPr marL="0" indent="0">
                         <a:lnSpc>
                           <a:spcPts val="1960"/>
                         </a:lnSpc>
@@ -15658,7 +15691,7 @@
                       </a:endParaRPr>
                     </a:p>
                   </a:txBody>
-                  <a:tcPr marL="62230" marR="62230" marT="62230" marB="62230" anchor="t">
+                  <a:tcPr marL="62230" marR="62230" marT="62230" marB="62230">
                     <a:lnL w="12700" cap="flat" cmpd="sng" algn="ctr">
                       <a:solidFill>
                         <a:srgbClr val="C5C4BF"/>
@@ -15702,7 +15735,7 @@
                     <a:bodyPr/>
                     <a:lstStyle/>
                     <a:p>
-                      <a:pPr indent="0" marL="0">
+                      <a:pPr marL="0" indent="0">
                         <a:lnSpc>
                           <a:spcPts val="1960"/>
                         </a:lnSpc>
@@ -15726,7 +15759,7 @@
                       </a:endParaRPr>
                     </a:p>
                   </a:txBody>
-                  <a:tcPr marL="62230" marR="62230" marT="62230" marB="62230" anchor="t">
+                  <a:tcPr marL="62230" marR="62230" marT="62230" marB="62230">
                     <a:lnL w="12700" cap="flat" cmpd="sng" algn="ctr">
                       <a:solidFill>
                         <a:srgbClr val="C5C4BF"/>
@@ -15765,6 +15798,11 @@
                     </a:lnB>
                   </a:tcPr>
                 </a:tc>
+                <a:extLst>
+                  <a:ext uri="{0D108BD9-81ED-4DB2-BD59-A6C34878D82A}">
+                    <a16:rowId xmlns:a16="http://schemas.microsoft.com/office/drawing/2014/main" val="10006"/>
+                  </a:ext>
+                </a:extLst>
               </a:tr>
             </a:tbl>
           </a:graphicData>
@@ -15793,7 +15831,7 @@
           </a:bodyPr>
           <a:lstStyle/>
           <a:p>
-            <a:pPr algn="l" indent="0" marL="0">
+            <a:pPr marL="0" indent="0" algn="l">
               <a:lnSpc>
                 <a:spcPts val="1680"/>
               </a:lnSpc>
@@ -15830,6 +15868,7 @@
         <a:solidFill>
           <a:srgbClr val="F7F5EF"/>
         </a:solidFill>
+        <a:effectLst/>
       </p:bgPr>
     </p:bg>
     <p:spTree>
@@ -15849,7 +15888,9 @@
       <p:sp>
         <p:nvSpPr>
           <p:cNvPr id="2" name="Text 0"/>
-          <p:cNvSpPr/>
+          <p:cNvSpPr>
+            <a:spLocks noGrp="1"/>
+          </p:cNvSpPr>
           <p:nvPr>
             <p:ph type="title"/>
           </p:nvPr>
@@ -15871,7 +15912,7 @@
           </a:bodyPr>
           <a:lstStyle/>
           <a:p>
-            <a:pPr algn="l" indent="0" marL="0">
+            <a:pPr marL="0" indent="0" algn="l">
               <a:lnSpc>
                 <a:spcPts val="3300"/>
               </a:lnSpc>
@@ -15919,7 +15960,7 @@
           </a:bodyPr>
           <a:lstStyle/>
           <a:p>
-            <a:pPr algn="l" indent="0" marL="0">
+            <a:pPr marL="0" indent="0" algn="l">
               <a:lnSpc>
                 <a:spcPts val="2030"/>
               </a:lnSpc>
@@ -15939,7 +15980,7 @@
             <a:endParaRPr lang="en-US" sz="1400" dirty="0"/>
           </a:p>
           <a:p>
-            <a:pPr algn="l" indent="0" marL="0">
+            <a:pPr marL="0" indent="0" algn="l">
               <a:lnSpc>
                 <a:spcPts val="2030"/>
               </a:lnSpc>
@@ -15959,7 +16000,7 @@
             <a:endParaRPr lang="en-US" sz="1400" dirty="0"/>
           </a:p>
           <a:p>
-            <a:pPr algn="l" indent="0" marL="0">
+            <a:pPr marL="0" indent="0" algn="l">
               <a:lnSpc>
                 <a:spcPts val="2030"/>
               </a:lnSpc>
@@ -15979,7 +16020,7 @@
             <a:endParaRPr lang="en-US" sz="1400" dirty="0"/>
           </a:p>
           <a:p>
-            <a:pPr algn="l" indent="0" marL="0">
+            <a:pPr marL="0" indent="0" algn="l">
               <a:lnSpc>
                 <a:spcPts val="2030"/>
               </a:lnSpc>
@@ -15999,7 +16040,7 @@
             <a:endParaRPr lang="en-US" sz="1400" dirty="0"/>
           </a:p>
           <a:p>
-            <a:pPr algn="l" indent="0" marL="0">
+            <a:pPr marL="0" indent="0" algn="l">
               <a:lnSpc>
                 <a:spcPts val="2030"/>
               </a:lnSpc>
@@ -16043,8 +16084,20 @@
             <a:tbl>
               <a:tblPr/>
               <a:tblGrid>
-                <a:gridCol w="5276850"/>
-                <a:gridCol w="5276850"/>
+                <a:gridCol w="5276850">
+                  <a:extLst>
+                    <a:ext uri="{9D8B030D-6E8A-4147-A177-3AD203B41FA5}">
+                      <a16:colId xmlns:a16="http://schemas.microsoft.com/office/drawing/2014/main" val="20000"/>
+                    </a:ext>
+                  </a:extLst>
+                </a:gridCol>
+                <a:gridCol w="5276850">
+                  <a:extLst>
+                    <a:ext uri="{9D8B030D-6E8A-4147-A177-3AD203B41FA5}">
+                      <a16:colId xmlns:a16="http://schemas.microsoft.com/office/drawing/2014/main" val="20001"/>
+                    </a:ext>
+                  </a:extLst>
+                </a:gridCol>
               </a:tblGrid>
               <a:tr h="359321">
                 <a:tc>
@@ -16052,7 +16105,7 @@
                     <a:bodyPr/>
                     <a:lstStyle/>
                     <a:p>
-                      <a:pPr indent="0" marL="0">
+                      <a:pPr marL="0" indent="0">
                         <a:lnSpc>
                           <a:spcPts val="1820"/>
                         </a:lnSpc>
@@ -16076,7 +16129,7 @@
                       </a:endParaRPr>
                     </a:p>
                   </a:txBody>
-                  <a:tcPr marL="57785" marR="57785" marT="57785" marB="57785" anchor="t">
+                  <a:tcPr marL="57785" marR="57785" marT="57785" marB="57785">
                     <a:lnL w="12700" cap="flat" cmpd="sng" algn="ctr">
                       <a:solidFill>
                         <a:srgbClr val="C5C4BF"/>
@@ -16123,7 +16176,7 @@
                     <a:bodyPr/>
                     <a:lstStyle/>
                     <a:p>
-                      <a:pPr indent="0" marL="0">
+                      <a:pPr marL="0" indent="0">
                         <a:lnSpc>
                           <a:spcPts val="1820"/>
                         </a:lnSpc>
@@ -16147,7 +16200,7 @@
                       </a:endParaRPr>
                     </a:p>
                   </a:txBody>
-                  <a:tcPr marL="57785" marR="57785" marT="57785" marB="57785" anchor="t">
+                  <a:tcPr marL="57785" marR="57785" marT="57785" marB="57785">
                     <a:lnL w="12700" cap="flat" cmpd="sng" algn="ctr">
                       <a:solidFill>
                         <a:srgbClr val="B7B5B1"/>
@@ -16189,6 +16242,11 @@
                     </a:solidFill>
                   </a:tcPr>
                 </a:tc>
+                <a:extLst>
+                  <a:ext uri="{0D108BD9-81ED-4DB2-BD59-A6C34878D82A}">
+                    <a16:rowId xmlns:a16="http://schemas.microsoft.com/office/drawing/2014/main" val="10000"/>
+                  </a:ext>
+                </a:extLst>
               </a:tr>
               <a:tr h="359321">
                 <a:tc>
@@ -16196,7 +16254,7 @@
                     <a:bodyPr/>
                     <a:lstStyle/>
                     <a:p>
-                      <a:pPr indent="0" marL="0">
+                      <a:pPr marL="0" indent="0">
                         <a:lnSpc>
                           <a:spcPts val="1820"/>
                         </a:lnSpc>
@@ -16220,7 +16278,7 @@
                       </a:endParaRPr>
                     </a:p>
                   </a:txBody>
-                  <a:tcPr marL="57785" marR="57785" marT="57785" marB="57785" anchor="t">
+                  <a:tcPr marL="57785" marR="57785" marT="57785" marB="57785">
                     <a:lnL w="12700" cap="flat" cmpd="sng" algn="ctr">
                       <a:solidFill>
                         <a:srgbClr val="C5C4BF"/>
@@ -16264,7 +16322,7 @@
                     <a:bodyPr/>
                     <a:lstStyle/>
                     <a:p>
-                      <a:pPr indent="0" marL="0">
+                      <a:pPr marL="0" indent="0">
                         <a:lnSpc>
                           <a:spcPts val="1820"/>
                         </a:lnSpc>
@@ -16288,7 +16346,7 @@
                       </a:endParaRPr>
                     </a:p>
                   </a:txBody>
-                  <a:tcPr marL="57785" marR="57785" marT="57785" marB="57785" anchor="t">
+                  <a:tcPr marL="57785" marR="57785" marT="57785" marB="57785">
                     <a:lnL w="12700" cap="flat" cmpd="sng" algn="ctr">
                       <a:solidFill>
                         <a:srgbClr val="C5C4BF"/>
@@ -16327,6 +16385,11 @@
                     </a:lnB>
                   </a:tcPr>
                 </a:tc>
+                <a:extLst>
+                  <a:ext uri="{0D108BD9-81ED-4DB2-BD59-A6C34878D82A}">
+                    <a16:rowId xmlns:a16="http://schemas.microsoft.com/office/drawing/2014/main" val="10001"/>
+                  </a:ext>
+                </a:extLst>
               </a:tr>
               <a:tr h="359321">
                 <a:tc>
@@ -16334,7 +16397,7 @@
                     <a:bodyPr/>
                     <a:lstStyle/>
                     <a:p>
-                      <a:pPr indent="0" marL="0">
+                      <a:pPr marL="0" indent="0">
                         <a:lnSpc>
                           <a:spcPts val="1820"/>
                         </a:lnSpc>
@@ -16358,7 +16421,7 @@
                       </a:endParaRPr>
                     </a:p>
                   </a:txBody>
-                  <a:tcPr marL="57785" marR="57785" marT="57785" marB="57785" anchor="t">
+                  <a:tcPr marL="57785" marR="57785" marT="57785" marB="57785">
                     <a:lnL w="12700" cap="flat" cmpd="sng" algn="ctr">
                       <a:solidFill>
                         <a:srgbClr val="C5C4BF"/>
@@ -16402,7 +16465,7 @@
                     <a:bodyPr/>
                     <a:lstStyle/>
                     <a:p>
-                      <a:pPr indent="0" marL="0">
+                      <a:pPr marL="0" indent="0">
                         <a:lnSpc>
                           <a:spcPts val="1820"/>
                         </a:lnSpc>
@@ -16426,7 +16489,7 @@
                       </a:endParaRPr>
                     </a:p>
                   </a:txBody>
-                  <a:tcPr marL="57785" marR="57785" marT="57785" marB="57785" anchor="t">
+                  <a:tcPr marL="57785" marR="57785" marT="57785" marB="57785">
                     <a:lnL w="12700" cap="flat" cmpd="sng" algn="ctr">
                       <a:solidFill>
                         <a:srgbClr val="C5C4BF"/>
@@ -16465,6 +16528,11 @@
                     </a:lnB>
                   </a:tcPr>
                 </a:tc>
+                <a:extLst>
+                  <a:ext uri="{0D108BD9-81ED-4DB2-BD59-A6C34878D82A}">
+                    <a16:rowId xmlns:a16="http://schemas.microsoft.com/office/drawing/2014/main" val="10002"/>
+                  </a:ext>
+                </a:extLst>
               </a:tr>
             </a:tbl>
           </a:graphicData>
@@ -16493,7 +16561,7 @@
           </a:bodyPr>
           <a:lstStyle/>
           <a:p>
-            <a:pPr algn="l" indent="0" marL="0">
+            <a:pPr marL="0" indent="0" algn="l">
               <a:lnSpc>
                 <a:spcPts val="1960"/>
               </a:lnSpc>
@@ -16537,7 +16605,7 @@
           </a:bodyPr>
           <a:lstStyle/>
           <a:p>
-            <a:pPr algn="l" indent="0" marL="0">
+            <a:pPr marL="0" indent="0" algn="l">
               <a:lnSpc>
                 <a:spcPts val="1680"/>
               </a:lnSpc>
@@ -16574,6 +16642,7 @@
         <a:solidFill>
           <a:srgbClr val="F7F5EF"/>
         </a:solidFill>
+        <a:effectLst/>
       </p:bgPr>
     </p:bg>
     <p:spTree>
@@ -16593,7 +16662,9 @@
       <p:sp>
         <p:nvSpPr>
           <p:cNvPr id="2" name="Text 0"/>
-          <p:cNvSpPr/>
+          <p:cNvSpPr>
+            <a:spLocks noGrp="1"/>
+          </p:cNvSpPr>
           <p:nvPr>
             <p:ph type="title"/>
           </p:nvPr>
@@ -16615,7 +16686,7 @@
           </a:bodyPr>
           <a:lstStyle/>
           <a:p>
-            <a:pPr algn="l" indent="0" marL="0">
+            <a:pPr marL="0" indent="0" algn="l">
               <a:lnSpc>
                 <a:spcPts val="3300"/>
               </a:lnSpc>
@@ -16662,6 +16733,13 @@
             <a:prstDash val="solid"/>
           </a:ln>
         </p:spPr>
+        <p:txBody>
+          <a:bodyPr/>
+          <a:lstStyle/>
+          <a:p>
+            <a:endParaRPr lang="en-US"/>
+          </a:p>
+        </p:txBody>
       </p:sp>
       <p:sp>
         <p:nvSpPr>
@@ -16686,7 +16764,7 @@
           </a:bodyPr>
           <a:lstStyle/>
           <a:p>
-            <a:pPr algn="l" indent="0" marL="0">
+            <a:pPr marL="0" indent="0" algn="l">
               <a:lnSpc>
                 <a:spcPts val="1920"/>
               </a:lnSpc>
@@ -16730,7 +16808,7 @@
           </a:bodyPr>
           <a:lstStyle/>
           <a:p>
-            <a:pPr algn="l" indent="0" marL="0">
+            <a:pPr marL="0" indent="0" algn="l">
               <a:lnSpc>
                 <a:spcPts val="1820"/>
               </a:lnSpc>
@@ -16777,6 +16855,13 @@
             <a:prstDash val="solid"/>
           </a:ln>
         </p:spPr>
+        <p:txBody>
+          <a:bodyPr/>
+          <a:lstStyle/>
+          <a:p>
+            <a:endParaRPr lang="en-US"/>
+          </a:p>
+        </p:txBody>
       </p:sp>
       <p:sp>
         <p:nvSpPr>
@@ -16801,7 +16886,7 @@
           </a:bodyPr>
           <a:lstStyle/>
           <a:p>
-            <a:pPr algn="l" indent="0" marL="0">
+            <a:pPr marL="0" indent="0" algn="l">
               <a:lnSpc>
                 <a:spcPts val="1920"/>
               </a:lnSpc>
@@ -16845,7 +16930,7 @@
           </a:bodyPr>
           <a:lstStyle/>
           <a:p>
-            <a:pPr algn="l" indent="0" marL="0">
+            <a:pPr marL="0" indent="0" algn="l">
               <a:lnSpc>
                 <a:spcPts val="1820"/>
               </a:lnSpc>
@@ -16892,6 +16977,13 @@
             <a:prstDash val="solid"/>
           </a:ln>
         </p:spPr>
+        <p:txBody>
+          <a:bodyPr/>
+          <a:lstStyle/>
+          <a:p>
+            <a:endParaRPr lang="en-US"/>
+          </a:p>
+        </p:txBody>
       </p:sp>
       <p:sp>
         <p:nvSpPr>
@@ -16916,7 +17008,7 @@
           </a:bodyPr>
           <a:lstStyle/>
           <a:p>
-            <a:pPr algn="l" indent="0" marL="0">
+            <a:pPr marL="0" indent="0" algn="l">
               <a:lnSpc>
                 <a:spcPts val="1920"/>
               </a:lnSpc>
@@ -16960,7 +17052,7 @@
           </a:bodyPr>
           <a:lstStyle/>
           <a:p>
-            <a:pPr algn="l" indent="0" marL="0">
+            <a:pPr marL="0" indent="0" algn="l">
               <a:lnSpc>
                 <a:spcPts val="1820"/>
               </a:lnSpc>
@@ -17004,7 +17096,7 @@
           </a:bodyPr>
           <a:lstStyle/>
           <a:p>
-            <a:pPr algn="l" marL="163068" indent="-163068">
+            <a:pPr marL="163068" indent="-163068" algn="l">
               <a:lnSpc>
                 <a:spcPts val="2100"/>
               </a:lnSpc>
@@ -17025,7 +17117,7 @@
             <a:endParaRPr lang="en-US" sz="1400" dirty="0"/>
           </a:p>
           <a:p>
-            <a:pPr algn="l" marL="163068" indent="-163068">
+            <a:pPr marL="163068" indent="-163068" algn="l">
               <a:lnSpc>
                 <a:spcPts val="2100"/>
               </a:lnSpc>
@@ -17046,7 +17138,7 @@
             <a:endParaRPr lang="en-US" sz="1400" dirty="0"/>
           </a:p>
           <a:p>
-            <a:pPr algn="l" marL="163068" indent="-163068">
+            <a:pPr marL="163068" indent="-163068" algn="l">
               <a:lnSpc>
                 <a:spcPts val="2100"/>
               </a:lnSpc>
@@ -17091,7 +17183,7 @@
           </a:bodyPr>
           <a:lstStyle/>
           <a:p>
-            <a:pPr algn="l" indent="0" marL="0">
+            <a:pPr marL="0" indent="0" algn="l">
               <a:lnSpc>
                 <a:spcPts val="1680"/>
               </a:lnSpc>
@@ -17128,6 +17220,7 @@
         <a:solidFill>
           <a:srgbClr val="F7F5EF"/>
         </a:solidFill>
+        <a:effectLst/>
       </p:bgPr>
     </p:bg>
     <p:spTree>
@@ -17147,7 +17240,9 @@
       <p:sp>
         <p:nvSpPr>
           <p:cNvPr id="2" name="Text 0"/>
-          <p:cNvSpPr/>
+          <p:cNvSpPr>
+            <a:spLocks noGrp="1"/>
+          </p:cNvSpPr>
           <p:nvPr>
             <p:ph type="title"/>
           </p:nvPr>
@@ -17169,7 +17264,7 @@
           </a:bodyPr>
           <a:lstStyle/>
           <a:p>
-            <a:pPr algn="l" indent="0" marL="0">
+            <a:pPr marL="0" indent="0" algn="l">
               <a:lnSpc>
                 <a:spcPts val="3300"/>
               </a:lnSpc>
@@ -17216,6 +17311,13 @@
             <a:prstDash val="solid"/>
           </a:ln>
         </p:spPr>
+        <p:txBody>
+          <a:bodyPr/>
+          <a:lstStyle/>
+          <a:p>
+            <a:endParaRPr lang="en-US"/>
+          </a:p>
+        </p:txBody>
       </p:sp>
       <p:sp>
         <p:nvSpPr>
@@ -17240,7 +17342,7 @@
           </a:bodyPr>
           <a:lstStyle/>
           <a:p>
-            <a:pPr algn="l" indent="0" marL="0">
+            <a:pPr marL="0" indent="0" algn="l">
               <a:lnSpc>
                 <a:spcPts val="2160"/>
               </a:lnSpc>
@@ -17284,7 +17386,7 @@
           </a:bodyPr>
           <a:lstStyle/>
           <a:p>
-            <a:pPr algn="l" indent="0" marL="0">
+            <a:pPr marL="0" indent="0" algn="l">
               <a:lnSpc>
                 <a:spcPts val="1960"/>
               </a:lnSpc>
@@ -17331,6 +17433,13 @@
             <a:prstDash val="solid"/>
           </a:ln>
         </p:spPr>
+        <p:txBody>
+          <a:bodyPr/>
+          <a:lstStyle/>
+          <a:p>
+            <a:endParaRPr lang="en-US"/>
+          </a:p>
+        </p:txBody>
       </p:sp>
       <p:sp>
         <p:nvSpPr>
@@ -17355,7 +17464,7 @@
           </a:bodyPr>
           <a:lstStyle/>
           <a:p>
-            <a:pPr algn="l" indent="0" marL="0">
+            <a:pPr marL="0" indent="0" algn="l">
               <a:lnSpc>
                 <a:spcPts val="2160"/>
               </a:lnSpc>
@@ -17399,7 +17508,7 @@
           </a:bodyPr>
           <a:lstStyle/>
           <a:p>
-            <a:pPr algn="l" indent="0" marL="0">
+            <a:pPr marL="0" indent="0" algn="l">
               <a:lnSpc>
                 <a:spcPts val="1960"/>
               </a:lnSpc>
@@ -17446,6 +17555,13 @@
             <a:prstDash val="solid"/>
           </a:ln>
         </p:spPr>
+        <p:txBody>
+          <a:bodyPr/>
+          <a:lstStyle/>
+          <a:p>
+            <a:endParaRPr lang="en-US"/>
+          </a:p>
+        </p:txBody>
       </p:sp>
       <p:sp>
         <p:nvSpPr>
@@ -17470,7 +17586,7 @@
           </a:bodyPr>
           <a:lstStyle/>
           <a:p>
-            <a:pPr algn="l" indent="0" marL="0">
+            <a:pPr marL="0" indent="0" algn="l">
               <a:lnSpc>
                 <a:spcPts val="2160"/>
               </a:lnSpc>
@@ -17514,7 +17630,7 @@
           </a:bodyPr>
           <a:lstStyle/>
           <a:p>
-            <a:pPr algn="l" indent="0" marL="0">
+            <a:pPr marL="0" indent="0" algn="l">
               <a:lnSpc>
                 <a:spcPts val="1960"/>
               </a:lnSpc>
@@ -17561,6 +17677,13 @@
             <a:prstDash val="solid"/>
           </a:ln>
         </p:spPr>
+        <p:txBody>
+          <a:bodyPr/>
+          <a:lstStyle/>
+          <a:p>
+            <a:endParaRPr lang="en-US"/>
+          </a:p>
+        </p:txBody>
       </p:sp>
       <p:sp>
         <p:nvSpPr>
@@ -17585,7 +17708,7 @@
           </a:bodyPr>
           <a:lstStyle/>
           <a:p>
-            <a:pPr algn="l" indent="0" marL="0">
+            <a:pPr marL="0" indent="0" algn="l">
               <a:lnSpc>
                 <a:spcPts val="2160"/>
               </a:lnSpc>
@@ -17629,7 +17752,7 @@
           </a:bodyPr>
           <a:lstStyle/>
           <a:p>
-            <a:pPr algn="l" indent="0" marL="0">
+            <a:pPr marL="0" indent="0" algn="l">
               <a:lnSpc>
                 <a:spcPts val="1960"/>
               </a:lnSpc>
@@ -17676,6 +17799,13 @@
             <a:prstDash val="solid"/>
           </a:ln>
         </p:spPr>
+        <p:txBody>
+          <a:bodyPr/>
+          <a:lstStyle/>
+          <a:p>
+            <a:endParaRPr lang="en-US"/>
+          </a:p>
+        </p:txBody>
       </p:sp>
       <p:sp>
         <p:nvSpPr>
@@ -17700,7 +17830,7 @@
           </a:bodyPr>
           <a:lstStyle/>
           <a:p>
-            <a:pPr algn="l" indent="0" marL="0">
+            <a:pPr marL="0" indent="0" algn="l">
               <a:lnSpc>
                 <a:spcPts val="2160"/>
               </a:lnSpc>
@@ -17744,7 +17874,7 @@
           </a:bodyPr>
           <a:lstStyle/>
           <a:p>
-            <a:pPr algn="l" indent="0" marL="0">
+            <a:pPr marL="0" indent="0" algn="l">
               <a:lnSpc>
                 <a:spcPts val="1960"/>
               </a:lnSpc>
@@ -17788,7 +17918,7 @@
           </a:bodyPr>
           <a:lstStyle/>
           <a:p>
-            <a:pPr algn="l" indent="0" marL="0">
+            <a:pPr marL="0" indent="0" algn="l">
               <a:lnSpc>
                 <a:spcPts val="1680"/>
               </a:lnSpc>
@@ -17825,6 +17955,7 @@
         <a:solidFill>
           <a:srgbClr val="F7F5EF"/>
         </a:solidFill>
+        <a:effectLst/>
       </p:bgPr>
     </p:bg>
     <p:spTree>
@@ -17844,7 +17975,9 @@
       <p:sp>
         <p:nvSpPr>
           <p:cNvPr id="2" name="Text 0"/>
-          <p:cNvSpPr/>
+          <p:cNvSpPr>
+            <a:spLocks noGrp="1"/>
+          </p:cNvSpPr>
           <p:nvPr>
             <p:ph type="title"/>
           </p:nvPr>
@@ -17866,7 +17999,7 @@
           </a:bodyPr>
           <a:lstStyle/>
           <a:p>
-            <a:pPr algn="l" indent="0" marL="0">
+            <a:pPr marL="0" indent="0" algn="l">
               <a:lnSpc>
                 <a:spcPts val="3300"/>
               </a:lnSpc>
@@ -17913,6 +18046,13 @@
             <a:prstDash val="solid"/>
           </a:ln>
         </p:spPr>
+        <p:txBody>
+          <a:bodyPr/>
+          <a:lstStyle/>
+          <a:p>
+            <a:endParaRPr lang="en-US"/>
+          </a:p>
+        </p:txBody>
       </p:sp>
       <p:sp>
         <p:nvSpPr>
@@ -17937,7 +18077,7 @@
           </a:bodyPr>
           <a:lstStyle/>
           <a:p>
-            <a:pPr algn="l" indent="0" marL="0">
+            <a:pPr marL="0" indent="0" algn="l">
               <a:lnSpc>
                 <a:spcPts val="1920"/>
               </a:lnSpc>
@@ -17981,7 +18121,7 @@
           </a:bodyPr>
           <a:lstStyle/>
           <a:p>
-            <a:pPr algn="l" indent="0" marL="0">
+            <a:pPr marL="0" indent="0" algn="l">
               <a:lnSpc>
                 <a:spcPts val="1820"/>
               </a:lnSpc>
@@ -18028,6 +18168,13 @@
             <a:prstDash val="solid"/>
           </a:ln>
         </p:spPr>
+        <p:txBody>
+          <a:bodyPr/>
+          <a:lstStyle/>
+          <a:p>
+            <a:endParaRPr lang="en-US"/>
+          </a:p>
+        </p:txBody>
       </p:sp>
       <p:sp>
         <p:nvSpPr>
@@ -18052,7 +18199,7 @@
           </a:bodyPr>
           <a:lstStyle/>
           <a:p>
-            <a:pPr algn="l" indent="0" marL="0">
+            <a:pPr marL="0" indent="0" algn="l">
               <a:lnSpc>
                 <a:spcPts val="1920"/>
               </a:lnSpc>
@@ -18096,7 +18243,7 @@
           </a:bodyPr>
           <a:lstStyle/>
           <a:p>
-            <a:pPr algn="l" indent="0" marL="0">
+            <a:pPr marL="0" indent="0" algn="l">
               <a:lnSpc>
                 <a:spcPts val="1820"/>
               </a:lnSpc>
@@ -18143,6 +18290,13 @@
             <a:prstDash val="solid"/>
           </a:ln>
         </p:spPr>
+        <p:txBody>
+          <a:bodyPr/>
+          <a:lstStyle/>
+          <a:p>
+            <a:endParaRPr lang="en-US"/>
+          </a:p>
+        </p:txBody>
       </p:sp>
       <p:sp>
         <p:nvSpPr>
@@ -18167,7 +18321,7 @@
           </a:bodyPr>
           <a:lstStyle/>
           <a:p>
-            <a:pPr algn="l" indent="0" marL="0">
+            <a:pPr marL="0" indent="0" algn="l">
               <a:lnSpc>
                 <a:spcPts val="1920"/>
               </a:lnSpc>
@@ -18211,7 +18365,7 @@
           </a:bodyPr>
           <a:lstStyle/>
           <a:p>
-            <a:pPr algn="l" indent="0" marL="0">
+            <a:pPr marL="0" indent="0" algn="l">
               <a:lnSpc>
                 <a:spcPts val="1820"/>
               </a:lnSpc>
@@ -18258,6 +18412,13 @@
             <a:prstDash val="solid"/>
           </a:ln>
         </p:spPr>
+        <p:txBody>
+          <a:bodyPr/>
+          <a:lstStyle/>
+          <a:p>
+            <a:endParaRPr lang="en-US"/>
+          </a:p>
+        </p:txBody>
       </p:sp>
       <p:sp>
         <p:nvSpPr>
@@ -18282,7 +18443,7 @@
           </a:bodyPr>
           <a:lstStyle/>
           <a:p>
-            <a:pPr algn="l" indent="0" marL="0">
+            <a:pPr marL="0" indent="0" algn="l">
               <a:lnSpc>
                 <a:spcPts val="1920"/>
               </a:lnSpc>
@@ -18326,7 +18487,7 @@
           </a:bodyPr>
           <a:lstStyle/>
           <a:p>
-            <a:pPr algn="l" indent="0" marL="0">
+            <a:pPr marL="0" indent="0" algn="l">
               <a:lnSpc>
                 <a:spcPts val="1820"/>
               </a:lnSpc>
@@ -18370,7 +18531,7 @@
           </a:bodyPr>
           <a:lstStyle/>
           <a:p>
-            <a:pPr algn="l" indent="0" marL="0">
+            <a:pPr marL="0" indent="0" algn="l">
               <a:lnSpc>
                 <a:spcPts val="2100"/>
               </a:lnSpc>
@@ -18414,7 +18575,7 @@
           </a:bodyPr>
           <a:lstStyle/>
           <a:p>
-            <a:pPr algn="l" indent="0" marL="0">
+            <a:pPr marL="0" indent="0" algn="l">
               <a:lnSpc>
                 <a:spcPts val="1680"/>
               </a:lnSpc>
@@ -18451,6 +18612,7 @@
         <a:solidFill>
           <a:srgbClr val="F7F5EF"/>
         </a:solidFill>
+        <a:effectLst/>
       </p:bgPr>
     </p:bg>
     <p:spTree>
@@ -18470,7 +18632,9 @@
       <p:sp>
         <p:nvSpPr>
           <p:cNvPr id="2" name="Text 0"/>
-          <p:cNvSpPr/>
+          <p:cNvSpPr>
+            <a:spLocks noGrp="1"/>
+          </p:cNvSpPr>
           <p:nvPr>
             <p:ph type="title"/>
           </p:nvPr>
@@ -18492,7 +18656,7 @@
           </a:bodyPr>
           <a:lstStyle/>
           <a:p>
-            <a:pPr algn="l" indent="0" marL="0">
+            <a:pPr marL="0" indent="0" algn="l">
               <a:lnSpc>
                 <a:spcPts val="3300"/>
               </a:lnSpc>
@@ -18536,8 +18700,20 @@
             <a:tbl>
               <a:tblPr/>
               <a:tblGrid>
-                <a:gridCol w="5276850"/>
-                <a:gridCol w="5276850"/>
+                <a:gridCol w="5276850">
+                  <a:extLst>
+                    <a:ext uri="{9D8B030D-6E8A-4147-A177-3AD203B41FA5}">
+                      <a16:colId xmlns:a16="http://schemas.microsoft.com/office/drawing/2014/main" val="20000"/>
+                    </a:ext>
+                  </a:extLst>
+                </a:gridCol>
+                <a:gridCol w="5276850">
+                  <a:extLst>
+                    <a:ext uri="{9D8B030D-6E8A-4147-A177-3AD203B41FA5}">
+                      <a16:colId xmlns:a16="http://schemas.microsoft.com/office/drawing/2014/main" val="20001"/>
+                    </a:ext>
+                  </a:extLst>
+                </a:gridCol>
               </a:tblGrid>
               <a:tr h="412750">
                 <a:tc>
@@ -18545,7 +18721,7 @@
                     <a:bodyPr/>
                     <a:lstStyle/>
                     <a:p>
-                      <a:pPr indent="0" marL="0">
+                      <a:pPr marL="0" indent="0">
                         <a:lnSpc>
                           <a:spcPts val="2100"/>
                         </a:lnSpc>
@@ -18569,7 +18745,7 @@
                       </a:endParaRPr>
                     </a:p>
                   </a:txBody>
-                  <a:tcPr marL="66675" marR="66675" marT="66675" marB="66675" anchor="t">
+                  <a:tcPr marL="66675" marR="66675" marT="66675" marB="66675">
                     <a:lnL w="12700" cap="flat" cmpd="sng" algn="ctr">
                       <a:solidFill>
                         <a:srgbClr val="C5C4BF"/>
@@ -18616,7 +18792,7 @@
                     <a:bodyPr/>
                     <a:lstStyle/>
                     <a:p>
-                      <a:pPr indent="0" marL="0">
+                      <a:pPr marL="0" indent="0">
                         <a:lnSpc>
                           <a:spcPts val="2100"/>
                         </a:lnSpc>
@@ -18640,7 +18816,7 @@
                       </a:endParaRPr>
                     </a:p>
                   </a:txBody>
-                  <a:tcPr marL="66675" marR="66675" marT="66675" marB="66675" anchor="t">
+                  <a:tcPr marL="66675" marR="66675" marT="66675" marB="66675">
                     <a:lnL w="12700" cap="flat" cmpd="sng" algn="ctr">
                       <a:solidFill>
                         <a:srgbClr val="B7B5B1"/>
@@ -18682,6 +18858,11 @@
                     </a:solidFill>
                   </a:tcPr>
                 </a:tc>
+                <a:extLst>
+                  <a:ext uri="{0D108BD9-81ED-4DB2-BD59-A6C34878D82A}">
+                    <a16:rowId xmlns:a16="http://schemas.microsoft.com/office/drawing/2014/main" val="10000"/>
+                  </a:ext>
+                </a:extLst>
               </a:tr>
               <a:tr h="412750">
                 <a:tc>
@@ -18689,7 +18870,7 @@
                     <a:bodyPr/>
                     <a:lstStyle/>
                     <a:p>
-                      <a:pPr indent="0" marL="0">
+                      <a:pPr marL="0" indent="0">
                         <a:lnSpc>
                           <a:spcPts val="2100"/>
                         </a:lnSpc>
@@ -18713,7 +18894,7 @@
                       </a:endParaRPr>
                     </a:p>
                   </a:txBody>
-                  <a:tcPr marL="66675" marR="66675" marT="66675" marB="66675" anchor="t">
+                  <a:tcPr marL="66675" marR="66675" marT="66675" marB="66675">
                     <a:lnL w="12700" cap="flat" cmpd="sng" algn="ctr">
                       <a:solidFill>
                         <a:srgbClr val="C5C4BF"/>
@@ -18757,7 +18938,7 @@
                     <a:bodyPr/>
                     <a:lstStyle/>
                     <a:p>
-                      <a:pPr indent="0" marL="0">
+                      <a:pPr marL="0" indent="0">
                         <a:lnSpc>
                           <a:spcPts val="2100"/>
                         </a:lnSpc>
@@ -18781,7 +18962,7 @@
                       </a:endParaRPr>
                     </a:p>
                   </a:txBody>
-                  <a:tcPr marL="66675" marR="66675" marT="66675" marB="66675" anchor="t">
+                  <a:tcPr marL="66675" marR="66675" marT="66675" marB="66675">
                     <a:lnL w="12700" cap="flat" cmpd="sng" algn="ctr">
                       <a:solidFill>
                         <a:srgbClr val="C5C4BF"/>
@@ -18820,6 +19001,11 @@
                     </a:lnB>
                   </a:tcPr>
                 </a:tc>
+                <a:extLst>
+                  <a:ext uri="{0D108BD9-81ED-4DB2-BD59-A6C34878D82A}">
+                    <a16:rowId xmlns:a16="http://schemas.microsoft.com/office/drawing/2014/main" val="10001"/>
+                  </a:ext>
+                </a:extLst>
               </a:tr>
               <a:tr h="412750">
                 <a:tc>
@@ -18827,7 +19013,7 @@
                     <a:bodyPr/>
                     <a:lstStyle/>
                     <a:p>
-                      <a:pPr indent="0" marL="0">
+                      <a:pPr marL="0" indent="0">
                         <a:lnSpc>
                           <a:spcPts val="2100"/>
                         </a:lnSpc>
@@ -18851,7 +19037,7 @@
                       </a:endParaRPr>
                     </a:p>
                   </a:txBody>
-                  <a:tcPr marL="66675" marR="66675" marT="66675" marB="66675" anchor="t">
+                  <a:tcPr marL="66675" marR="66675" marT="66675" marB="66675">
                     <a:lnL w="12700" cap="flat" cmpd="sng" algn="ctr">
                       <a:solidFill>
                         <a:srgbClr val="C5C4BF"/>
@@ -18895,7 +19081,7 @@
                     <a:bodyPr/>
                     <a:lstStyle/>
                     <a:p>
-                      <a:pPr indent="0" marL="0">
+                      <a:pPr marL="0" indent="0">
                         <a:lnSpc>
                           <a:spcPts val="2100"/>
                         </a:lnSpc>
@@ -18919,7 +19105,7 @@
                       </a:endParaRPr>
                     </a:p>
                   </a:txBody>
-                  <a:tcPr marL="66675" marR="66675" marT="66675" marB="66675" anchor="t">
+                  <a:tcPr marL="66675" marR="66675" marT="66675" marB="66675">
                     <a:lnL w="12700" cap="flat" cmpd="sng" algn="ctr">
                       <a:solidFill>
                         <a:srgbClr val="C5C4BF"/>
@@ -18958,6 +19144,11 @@
                     </a:lnB>
                   </a:tcPr>
                 </a:tc>
+                <a:extLst>
+                  <a:ext uri="{0D108BD9-81ED-4DB2-BD59-A6C34878D82A}">
+                    <a16:rowId xmlns:a16="http://schemas.microsoft.com/office/drawing/2014/main" val="10002"/>
+                  </a:ext>
+                </a:extLst>
               </a:tr>
               <a:tr h="412750">
                 <a:tc>
@@ -18965,7 +19156,7 @@
                     <a:bodyPr/>
                     <a:lstStyle/>
                     <a:p>
-                      <a:pPr indent="0" marL="0">
+                      <a:pPr marL="0" indent="0">
                         <a:lnSpc>
                           <a:spcPts val="2100"/>
                         </a:lnSpc>
@@ -18989,7 +19180,7 @@
                       </a:endParaRPr>
                     </a:p>
                   </a:txBody>
-                  <a:tcPr marL="66675" marR="66675" marT="66675" marB="66675" anchor="t">
+                  <a:tcPr marL="66675" marR="66675" marT="66675" marB="66675">
                     <a:lnL w="12700" cap="flat" cmpd="sng" algn="ctr">
                       <a:solidFill>
                         <a:srgbClr val="C5C4BF"/>
@@ -19033,7 +19224,7 @@
                     <a:bodyPr/>
                     <a:lstStyle/>
                     <a:p>
-                      <a:pPr indent="0" marL="0">
+                      <a:pPr marL="0" indent="0">
                         <a:lnSpc>
                           <a:spcPts val="2100"/>
                         </a:lnSpc>
@@ -19057,7 +19248,7 @@
                       </a:endParaRPr>
                     </a:p>
                   </a:txBody>
-                  <a:tcPr marL="66675" marR="66675" marT="66675" marB="66675" anchor="t">
+                  <a:tcPr marL="66675" marR="66675" marT="66675" marB="66675">
                     <a:lnL w="12700" cap="flat" cmpd="sng" algn="ctr">
                       <a:solidFill>
                         <a:srgbClr val="C5C4BF"/>
@@ -19096,6 +19287,11 @@
                     </a:lnB>
                   </a:tcPr>
                 </a:tc>
+                <a:extLst>
+                  <a:ext uri="{0D108BD9-81ED-4DB2-BD59-A6C34878D82A}">
+                    <a16:rowId xmlns:a16="http://schemas.microsoft.com/office/drawing/2014/main" val="10003"/>
+                  </a:ext>
+                </a:extLst>
               </a:tr>
               <a:tr h="412750">
                 <a:tc>
@@ -19103,7 +19299,7 @@
                     <a:bodyPr/>
                     <a:lstStyle/>
                     <a:p>
-                      <a:pPr indent="0" marL="0">
+                      <a:pPr marL="0" indent="0">
                         <a:lnSpc>
                           <a:spcPts val="2100"/>
                         </a:lnSpc>
@@ -19127,7 +19323,7 @@
                       </a:endParaRPr>
                     </a:p>
                   </a:txBody>
-                  <a:tcPr marL="66675" marR="66675" marT="66675" marB="66675" anchor="t">
+                  <a:tcPr marL="66675" marR="66675" marT="66675" marB="66675">
                     <a:lnL w="12700" cap="flat" cmpd="sng" algn="ctr">
                       <a:solidFill>
                         <a:srgbClr val="C5C4BF"/>
@@ -19171,7 +19367,7 @@
                     <a:bodyPr/>
                     <a:lstStyle/>
                     <a:p>
-                      <a:pPr indent="0" marL="0">
+                      <a:pPr marL="0" indent="0">
                         <a:lnSpc>
                           <a:spcPts val="2100"/>
                         </a:lnSpc>
@@ -19195,7 +19391,7 @@
                       </a:endParaRPr>
                     </a:p>
                   </a:txBody>
-                  <a:tcPr marL="66675" marR="66675" marT="66675" marB="66675" anchor="t">
+                  <a:tcPr marL="66675" marR="66675" marT="66675" marB="66675">
                     <a:lnL w="12700" cap="flat" cmpd="sng" algn="ctr">
                       <a:solidFill>
                         <a:srgbClr val="C5C4BF"/>
@@ -19234,6 +19430,11 @@
                     </a:lnB>
                   </a:tcPr>
                 </a:tc>
+                <a:extLst>
+                  <a:ext uri="{0D108BD9-81ED-4DB2-BD59-A6C34878D82A}">
+                    <a16:rowId xmlns:a16="http://schemas.microsoft.com/office/drawing/2014/main" val="10004"/>
+                  </a:ext>
+                </a:extLst>
               </a:tr>
             </a:tbl>
           </a:graphicData>
@@ -19262,7 +19463,7 @@
           </a:bodyPr>
           <a:lstStyle/>
           <a:p>
-            <a:pPr algn="l" indent="0" marL="0">
+            <a:pPr marL="0" indent="0" algn="l">
               <a:lnSpc>
                 <a:spcPts val="2100"/>
               </a:lnSpc>
@@ -19306,7 +19507,7 @@
           </a:bodyPr>
           <a:lstStyle/>
           <a:p>
-            <a:pPr algn="l" indent="0" marL="0">
+            <a:pPr marL="0" indent="0" algn="l">
               <a:lnSpc>
                 <a:spcPts val="1680"/>
               </a:lnSpc>
@@ -19343,6 +19544,7 @@
         <a:solidFill>
           <a:srgbClr val="F7F5EF"/>
         </a:solidFill>
+        <a:effectLst/>
       </p:bgPr>
     </p:bg>
     <p:spTree>
@@ -19362,7 +19564,9 @@
       <p:sp>
         <p:nvSpPr>
           <p:cNvPr id="2" name="Text 0"/>
-          <p:cNvSpPr/>
+          <p:cNvSpPr>
+            <a:spLocks noGrp="1"/>
+          </p:cNvSpPr>
           <p:nvPr>
             <p:ph type="title"/>
           </p:nvPr>
@@ -19384,7 +19588,7 @@
           </a:bodyPr>
           <a:lstStyle/>
           <a:p>
-            <a:pPr algn="l" indent="0" marL="0">
+            <a:pPr marL="0" indent="0" algn="l">
               <a:lnSpc>
                 <a:spcPts val="3300"/>
               </a:lnSpc>
@@ -19432,7 +19636,7 @@
           </a:bodyPr>
           <a:lstStyle/>
           <a:p>
-            <a:pPr algn="l" indent="0" marL="0">
+            <a:pPr marL="0" indent="0" algn="l">
               <a:lnSpc>
                 <a:spcPts val="2030"/>
               </a:lnSpc>
@@ -19452,7 +19656,7 @@
             <a:endParaRPr lang="en-US" sz="1400" dirty="0"/>
           </a:p>
           <a:p>
-            <a:pPr algn="l" indent="0" marL="0">
+            <a:pPr marL="0" indent="0" algn="l">
               <a:lnSpc>
                 <a:spcPts val="2030"/>
               </a:lnSpc>
@@ -19472,7 +19676,7 @@
             <a:endParaRPr lang="en-US" sz="1400" dirty="0"/>
           </a:p>
           <a:p>
-            <a:pPr algn="l" indent="0" marL="0">
+            <a:pPr marL="0" indent="0" algn="l">
               <a:lnSpc>
                 <a:spcPts val="2030"/>
               </a:lnSpc>
@@ -19492,7 +19696,7 @@
             <a:endParaRPr lang="en-US" sz="1400" dirty="0"/>
           </a:p>
           <a:p>
-            <a:pPr algn="l" indent="0" marL="0">
+            <a:pPr marL="0" indent="0" algn="l">
               <a:lnSpc>
                 <a:spcPts val="2030"/>
               </a:lnSpc>
@@ -19512,7 +19716,7 @@
             <a:endParaRPr lang="en-US" sz="1400" dirty="0"/>
           </a:p>
           <a:p>
-            <a:pPr algn="l" indent="0" marL="0">
+            <a:pPr marL="0" indent="0" algn="l">
               <a:lnSpc>
                 <a:spcPts val="2030"/>
               </a:lnSpc>
@@ -19532,7 +19736,7 @@
             <a:endParaRPr lang="en-US" sz="1400" dirty="0"/>
           </a:p>
           <a:p>
-            <a:pPr algn="l" indent="0" marL="0">
+            <a:pPr marL="0" indent="0" algn="l">
               <a:lnSpc>
                 <a:spcPts val="2030"/>
               </a:lnSpc>
@@ -19552,7 +19756,7 @@
             <a:endParaRPr lang="en-US" sz="1400" dirty="0"/>
           </a:p>
           <a:p>
-            <a:pPr algn="l" indent="0" marL="0">
+            <a:pPr marL="0" indent="0" algn="l">
               <a:lnSpc>
                 <a:spcPts val="2030"/>
               </a:lnSpc>
@@ -19596,7 +19800,7 @@
           </a:bodyPr>
           <a:lstStyle/>
           <a:p>
-            <a:pPr algn="l" indent="0" marL="0">
+            <a:pPr marL="0" indent="0" algn="l">
               <a:lnSpc>
                 <a:spcPts val="2100"/>
               </a:lnSpc>
@@ -19640,7 +19844,7 @@
           </a:bodyPr>
           <a:lstStyle/>
           <a:p>
-            <a:pPr algn="l" indent="0" marL="0">
+            <a:pPr marL="0" indent="0" algn="l">
               <a:lnSpc>
                 <a:spcPts val="1680"/>
               </a:lnSpc>
@@ -19677,6 +19881,7 @@
         <a:solidFill>
           <a:srgbClr val="F7F5EF"/>
         </a:solidFill>
+        <a:effectLst/>
       </p:bgPr>
     </p:bg>
     <p:spTree>
@@ -19696,7 +19901,9 @@
       <p:sp>
         <p:nvSpPr>
           <p:cNvPr id="2" name="Text 0"/>
-          <p:cNvSpPr/>
+          <p:cNvSpPr>
+            <a:spLocks noGrp="1"/>
+          </p:cNvSpPr>
           <p:nvPr>
             <p:ph type="title"/>
           </p:nvPr>
@@ -19718,7 +19925,7 @@
           </a:bodyPr>
           <a:lstStyle/>
           <a:p>
-            <a:pPr algn="l" indent="0" marL="0">
+            <a:pPr marL="0" indent="0" algn="l">
               <a:lnSpc>
                 <a:spcPts val="3300"/>
               </a:lnSpc>
@@ -19766,7 +19973,7 @@
           </a:bodyPr>
           <a:lstStyle/>
           <a:p>
-            <a:pPr algn="l" indent="0" marL="0">
+            <a:pPr marL="0" indent="0" algn="l">
               <a:lnSpc>
                 <a:spcPts val="2030"/>
               </a:lnSpc>
@@ -19786,7 +19993,7 @@
             <a:endParaRPr lang="en-US" sz="1400" dirty="0"/>
           </a:p>
           <a:p>
-            <a:pPr algn="l" indent="0" marL="0">
+            <a:pPr marL="0" indent="0" algn="l">
               <a:lnSpc>
                 <a:spcPts val="2030"/>
               </a:lnSpc>
@@ -19806,7 +20013,7 @@
             <a:endParaRPr lang="en-US" sz="1400" dirty="0"/>
           </a:p>
           <a:p>
-            <a:pPr algn="l" indent="0" marL="0">
+            <a:pPr marL="0" indent="0" algn="l">
               <a:lnSpc>
                 <a:spcPts val="2030"/>
               </a:lnSpc>
@@ -19826,7 +20033,7 @@
             <a:endParaRPr lang="en-US" sz="1400" dirty="0"/>
           </a:p>
           <a:p>
-            <a:pPr algn="l" indent="0" marL="0">
+            <a:pPr marL="0" indent="0" algn="l">
               <a:lnSpc>
                 <a:spcPts val="2030"/>
               </a:lnSpc>
@@ -19846,7 +20053,7 @@
             <a:endParaRPr lang="en-US" sz="1400" dirty="0"/>
           </a:p>
           <a:p>
-            <a:pPr algn="l" indent="0" marL="0">
+            <a:pPr marL="0" indent="0" algn="l">
               <a:lnSpc>
                 <a:spcPts val="2030"/>
               </a:lnSpc>
@@ -19890,7 +20097,7 @@
           </a:bodyPr>
           <a:lstStyle/>
           <a:p>
-            <a:pPr algn="l" indent="0" marL="0">
+            <a:pPr marL="0" indent="0" algn="l">
               <a:lnSpc>
                 <a:spcPts val="2100"/>
               </a:lnSpc>
@@ -19934,7 +20141,7 @@
           </a:bodyPr>
           <a:lstStyle/>
           <a:p>
-            <a:pPr algn="l" indent="0" marL="0">
+            <a:pPr marL="0" indent="0" algn="l">
               <a:lnSpc>
                 <a:spcPts val="1680"/>
               </a:lnSpc>
@@ -19971,6 +20178,7 @@
         <a:solidFill>
           <a:srgbClr val="F7F5EF"/>
         </a:solidFill>
+        <a:effectLst/>
       </p:bgPr>
     </p:bg>
     <p:spTree>
@@ -19990,7 +20198,9 @@
       <p:sp>
         <p:nvSpPr>
           <p:cNvPr id="2" name="Text 0"/>
-          <p:cNvSpPr/>
+          <p:cNvSpPr>
+            <a:spLocks noGrp="1"/>
+          </p:cNvSpPr>
           <p:nvPr>
             <p:ph type="title"/>
           </p:nvPr>
@@ -20012,7 +20222,7 @@
           </a:bodyPr>
           <a:lstStyle/>
           <a:p>
-            <a:pPr algn="l" indent="0" marL="0">
+            <a:pPr marL="0" indent="0" algn="l">
               <a:lnSpc>
                 <a:spcPts val="3300"/>
               </a:lnSpc>
@@ -20060,7 +20270,7 @@
           </a:bodyPr>
           <a:lstStyle/>
           <a:p>
-            <a:pPr algn="l" indent="0" marL="0">
+            <a:pPr marL="0" indent="0" algn="l">
               <a:lnSpc>
                 <a:spcPts val="1958"/>
               </a:lnSpc>
@@ -20080,7 +20290,7 @@
             <a:endParaRPr lang="en-US" sz="1350" dirty="0"/>
           </a:p>
           <a:p>
-            <a:pPr algn="l" indent="0" marL="0">
+            <a:pPr marL="0" indent="0" algn="l">
               <a:lnSpc>
                 <a:spcPts val="1958"/>
               </a:lnSpc>
@@ -20100,7 +20310,7 @@
             <a:endParaRPr lang="en-US" sz="1350" dirty="0"/>
           </a:p>
           <a:p>
-            <a:pPr algn="l" indent="0" marL="0">
+            <a:pPr marL="0" indent="0" algn="l">
               <a:lnSpc>
                 <a:spcPts val="1958"/>
               </a:lnSpc>
@@ -20120,7 +20330,7 @@
             <a:endParaRPr lang="en-US" sz="1350" dirty="0"/>
           </a:p>
           <a:p>
-            <a:pPr algn="l" indent="0" marL="0">
+            <a:pPr marL="0" indent="0" algn="l">
               <a:lnSpc>
                 <a:spcPts val="1958"/>
               </a:lnSpc>
@@ -20140,7 +20350,7 @@
             <a:endParaRPr lang="en-US" sz="1350" dirty="0"/>
           </a:p>
           <a:p>
-            <a:pPr algn="l" indent="0" marL="0">
+            <a:pPr marL="0" indent="0" algn="l">
               <a:lnSpc>
                 <a:spcPts val="1958"/>
               </a:lnSpc>
@@ -20184,7 +20394,7 @@
           </a:bodyPr>
           <a:lstStyle/>
           <a:p>
-            <a:pPr algn="l" indent="0" marL="0">
+            <a:pPr marL="0" indent="0" algn="l">
               <a:lnSpc>
                 <a:spcPts val="1960"/>
               </a:lnSpc>
@@ -20228,7 +20438,7 @@
           </a:bodyPr>
           <a:lstStyle/>
           <a:p>
-            <a:pPr algn="l" indent="0" marL="0">
+            <a:pPr marL="0" indent="0" algn="l">
               <a:lnSpc>
                 <a:spcPts val="1680"/>
               </a:lnSpc>
@@ -20265,6 +20475,7 @@
         <a:solidFill>
           <a:srgbClr val="F7F5EF"/>
         </a:solidFill>
+        <a:effectLst/>
       </p:bgPr>
     </p:bg>
     <p:spTree>
@@ -20284,7 +20495,9 @@
       <p:sp>
         <p:nvSpPr>
           <p:cNvPr id="2" name="Text 0"/>
-          <p:cNvSpPr/>
+          <p:cNvSpPr>
+            <a:spLocks noGrp="1"/>
+          </p:cNvSpPr>
           <p:nvPr>
             <p:ph type="title"/>
           </p:nvPr>
@@ -20306,7 +20519,7 @@
           </a:bodyPr>
           <a:lstStyle/>
           <a:p>
-            <a:pPr algn="l" indent="0" marL="0">
+            <a:pPr marL="0" indent="0" algn="l">
               <a:lnSpc>
                 <a:spcPts val="3300"/>
               </a:lnSpc>
@@ -20354,7 +20567,7 @@
           </a:bodyPr>
           <a:lstStyle/>
           <a:p>
-            <a:pPr algn="l" indent="0" marL="0">
+            <a:pPr marL="0" indent="0" algn="l">
               <a:lnSpc>
                 <a:spcPts val="1885"/>
               </a:lnSpc>
@@ -20374,7 +20587,7 @@
             <a:endParaRPr lang="en-US" sz="1300" dirty="0"/>
           </a:p>
           <a:p>
-            <a:pPr algn="l" indent="0" marL="0">
+            <a:pPr marL="0" indent="0" algn="l">
               <a:lnSpc>
                 <a:spcPts val="1885"/>
               </a:lnSpc>
@@ -20394,7 +20607,7 @@
             <a:endParaRPr lang="en-US" sz="1300" dirty="0"/>
           </a:p>
           <a:p>
-            <a:pPr algn="l" indent="0" marL="0">
+            <a:pPr marL="0" indent="0" algn="l">
               <a:lnSpc>
                 <a:spcPts val="1885"/>
               </a:lnSpc>
@@ -20414,7 +20627,7 @@
             <a:endParaRPr lang="en-US" sz="1300" dirty="0"/>
           </a:p>
           <a:p>
-            <a:pPr algn="l" indent="0" marL="0">
+            <a:pPr marL="0" indent="0" algn="l">
               <a:lnSpc>
                 <a:spcPts val="1885"/>
               </a:lnSpc>
@@ -20434,7 +20647,7 @@
             <a:endParaRPr lang="en-US" sz="1300" dirty="0"/>
           </a:p>
           <a:p>
-            <a:pPr algn="l" indent="0" marL="0">
+            <a:pPr marL="0" indent="0" algn="l">
               <a:lnSpc>
                 <a:spcPts val="1885"/>
               </a:lnSpc>
@@ -20454,7 +20667,7 @@
             <a:endParaRPr lang="en-US" sz="1300" dirty="0"/>
           </a:p>
           <a:p>
-            <a:pPr algn="l" indent="0" marL="0">
+            <a:pPr marL="0" indent="0" algn="l">
               <a:lnSpc>
                 <a:spcPts val="1885"/>
               </a:lnSpc>
@@ -20474,7 +20687,7 @@
             <a:endParaRPr lang="en-US" sz="1300" dirty="0"/>
           </a:p>
           <a:p>
-            <a:pPr algn="l" indent="0" marL="0">
+            <a:pPr marL="0" indent="0" algn="l">
               <a:lnSpc>
                 <a:spcPts val="1885"/>
               </a:lnSpc>
@@ -20518,7 +20731,7 @@
           </a:bodyPr>
           <a:lstStyle/>
           <a:p>
-            <a:pPr algn="l" indent="0" marL="0">
+            <a:pPr marL="0" indent="0" algn="l">
               <a:lnSpc>
                 <a:spcPts val="1960"/>
               </a:lnSpc>
@@ -20562,7 +20775,7 @@
           </a:bodyPr>
           <a:lstStyle/>
           <a:p>
-            <a:pPr algn="l" indent="0" marL="0">
+            <a:pPr marL="0" indent="0" algn="l">
               <a:lnSpc>
                 <a:spcPts val="1680"/>
               </a:lnSpc>
@@ -20879,4 +21092,319 @@
   <a:objectDefaults/>
   <a:extraClrSchemeLst/>
 </a:theme>
+</file>
+
+<file path=ppt/theme/theme2.xml><?xml version="1.0" encoding="utf-8"?>
+<a:theme xmlns:a="http://schemas.openxmlformats.org/drawingml/2006/main" name="Office Theme">
+  <a:themeElements>
+    <a:clrScheme name="Office">
+      <a:dk1>
+        <a:sysClr val="windowText" lastClr="000000"/>
+      </a:dk1>
+      <a:lt1>
+        <a:sysClr val="window" lastClr="FFFFFF"/>
+      </a:lt1>
+      <a:dk2>
+        <a:srgbClr val="0E2841"/>
+      </a:dk2>
+      <a:lt2>
+        <a:srgbClr val="E8E8E8"/>
+      </a:lt2>
+      <a:accent1>
+        <a:srgbClr val="156082"/>
+      </a:accent1>
+      <a:accent2>
+        <a:srgbClr val="E97132"/>
+      </a:accent2>
+      <a:accent3>
+        <a:srgbClr val="196B24"/>
+      </a:accent3>
+      <a:accent4>
+        <a:srgbClr val="0F9ED5"/>
+      </a:accent4>
+      <a:accent5>
+        <a:srgbClr val="A02B93"/>
+      </a:accent5>
+      <a:accent6>
+        <a:srgbClr val="4EA72E"/>
+      </a:accent6>
+      <a:hlink>
+        <a:srgbClr val="467886"/>
+      </a:hlink>
+      <a:folHlink>
+        <a:srgbClr val="96607D"/>
+      </a:folHlink>
+    </a:clrScheme>
+    <a:fontScheme name="Office">
+      <a:majorFont>
+        <a:latin typeface="Aptos Display" panose="02110004020202020204"/>
+        <a:ea typeface=""/>
+        <a:cs typeface=""/>
+        <a:font script="Jpan" typeface="游ゴシック Light"/>
+        <a:font script="Hang" typeface="맑은 고딕"/>
+        <a:font script="Hans" typeface="等线 Light"/>
+        <a:font script="Hant" typeface="新細明體"/>
+        <a:font script="Arab" typeface="Times New Roman"/>
+        <a:font script="Hebr" typeface="Times New Roman"/>
+        <a:font script="Thai" typeface="Angsana New"/>
+        <a:font script="Ethi" typeface="Nyala"/>
+        <a:font script="Beng" typeface="Vrinda"/>
+        <a:font script="Gujr" typeface="Shruti"/>
+        <a:font script="Khmr" typeface="MoolBoran"/>
+        <a:font script="Knda" typeface="Tunga"/>
+        <a:font script="Guru" typeface="Raavi"/>
+        <a:font script="Cans" typeface="Euphemia"/>
+        <a:font script="Cher" typeface="Plantagenet Cherokee"/>
+        <a:font script="Yiii" typeface="Microsoft Yi Baiti"/>
+        <a:font script="Tibt" typeface="Microsoft Himalaya"/>
+        <a:font script="Thaa" typeface="MV Boli"/>
+        <a:font script="Deva" typeface="Mangal"/>
+        <a:font script="Telu" typeface="Gautami"/>
+        <a:font script="Taml" typeface="Latha"/>
+        <a:font script="Syrc" typeface="Estrangelo Edessa"/>
+        <a:font script="Orya" typeface="Kalinga"/>
+        <a:font script="Mlym" typeface="Kartika"/>
+        <a:font script="Laoo" typeface="DokChampa"/>
+        <a:font script="Sinh" typeface="Iskoola Pota"/>
+        <a:font script="Mong" typeface="Mongolian Baiti"/>
+        <a:font script="Viet" typeface="Times New Roman"/>
+        <a:font script="Uigh" typeface="Microsoft Uighur"/>
+        <a:font script="Geor" typeface="Sylfaen"/>
+        <a:font script="Armn" typeface="Arial"/>
+        <a:font script="Bugi" typeface="Leelawadee UI"/>
+        <a:font script="Bopo" typeface="Microsoft JhengHei"/>
+        <a:font script="Java" typeface="Javanese Text"/>
+        <a:font script="Lisu" typeface="Segoe UI"/>
+        <a:font script="Mymr" typeface="Myanmar Text"/>
+        <a:font script="Nkoo" typeface="Ebrima"/>
+        <a:font script="Olck" typeface="Nirmala UI"/>
+        <a:font script="Osma" typeface="Ebrima"/>
+        <a:font script="Phag" typeface="Phagspa"/>
+        <a:font script="Syrn" typeface="Estrangelo Edessa"/>
+        <a:font script="Syrj" typeface="Estrangelo Edessa"/>
+        <a:font script="Syre" typeface="Estrangelo Edessa"/>
+        <a:font script="Sora" typeface="Nirmala UI"/>
+        <a:font script="Tale" typeface="Microsoft Tai Le"/>
+        <a:font script="Talu" typeface="Microsoft New Tai Lue"/>
+        <a:font script="Tfng" typeface="Ebrima"/>
+      </a:majorFont>
+      <a:minorFont>
+        <a:latin typeface="Aptos" panose="02110004020202020204"/>
+        <a:ea typeface=""/>
+        <a:cs typeface=""/>
+        <a:font script="Jpan" typeface="游ゴシック"/>
+        <a:font script="Hang" typeface="맑은 고딕"/>
+        <a:font script="Hans" typeface="等线"/>
+        <a:font script="Hant" typeface="新細明體"/>
+        <a:font script="Arab" typeface="Arial"/>
+        <a:font script="Hebr" typeface="Arial"/>
+        <a:font script="Thai" typeface="Cordia New"/>
+        <a:font script="Ethi" typeface="Nyala"/>
+        <a:font script="Beng" typeface="Vrinda"/>
+        <a:font script="Gujr" typeface="Shruti"/>
+        <a:font script="Khmr" typeface="DaunPenh"/>
+        <a:font script="Knda" typeface="Tunga"/>
+        <a:font script="Guru" typeface="Raavi"/>
+        <a:font script="Cans" typeface="Euphemia"/>
+        <a:font script="Cher" typeface="Plantagenet Cherokee"/>
+        <a:font script="Yiii" typeface="Microsoft Yi Baiti"/>
+        <a:font script="Tibt" typeface="Microsoft Himalaya"/>
+        <a:font script="Thaa" typeface="MV Boli"/>
+        <a:font script="Deva" typeface="Mangal"/>
+        <a:font script="Telu" typeface="Gautami"/>
+        <a:font script="Taml" typeface="Latha"/>
+        <a:font script="Syrc" typeface="Estrangelo Edessa"/>
+        <a:font script="Orya" typeface="Kalinga"/>
+        <a:font script="Mlym" typeface="Kartika"/>
+        <a:font script="Laoo" typeface="DokChampa"/>
+        <a:font script="Sinh" typeface="Iskoola Pota"/>
+        <a:font script="Mong" typeface="Mongolian Baiti"/>
+        <a:font script="Viet" typeface="Arial"/>
+        <a:font script="Uigh" typeface="Microsoft Uighur"/>
+        <a:font script="Geor" typeface="Sylfaen"/>
+        <a:font script="Armn" typeface="Arial"/>
+        <a:font script="Bugi" typeface="Leelawadee UI"/>
+        <a:font script="Bopo" typeface="Microsoft JhengHei"/>
+        <a:font script="Java" typeface="Javanese Text"/>
+        <a:font script="Lisu" typeface="Segoe UI"/>
+        <a:font script="Mymr" typeface="Myanmar Text"/>
+        <a:font script="Nkoo" typeface="Ebrima"/>
+        <a:font script="Olck" typeface="Nirmala UI"/>
+        <a:font script="Osma" typeface="Ebrima"/>
+        <a:font script="Phag" typeface="Phagspa"/>
+        <a:font script="Syrn" typeface="Estrangelo Edessa"/>
+        <a:font script="Syrj" typeface="Estrangelo Edessa"/>
+        <a:font script="Syre" typeface="Estrangelo Edessa"/>
+        <a:font script="Sora" typeface="Nirmala UI"/>
+        <a:font script="Tale" typeface="Microsoft Tai Le"/>
+        <a:font script="Talu" typeface="Microsoft New Tai Lue"/>
+        <a:font script="Tfng" typeface="Ebrima"/>
+      </a:minorFont>
+    </a:fontScheme>
+    <a:fmtScheme name="Office">
+      <a:fillStyleLst>
+        <a:solidFill>
+          <a:schemeClr val="phClr"/>
+        </a:solidFill>
+        <a:gradFill rotWithShape="1">
+          <a:gsLst>
+            <a:gs pos="0">
+              <a:schemeClr val="phClr">
+                <a:lumMod val="110000"/>
+                <a:satMod val="105000"/>
+                <a:tint val="67000"/>
+              </a:schemeClr>
+            </a:gs>
+            <a:gs pos="50000">
+              <a:schemeClr val="phClr">
+                <a:lumMod val="105000"/>
+                <a:satMod val="103000"/>
+                <a:tint val="73000"/>
+              </a:schemeClr>
+            </a:gs>
+            <a:gs pos="100000">
+              <a:schemeClr val="phClr">
+                <a:lumMod val="105000"/>
+                <a:satMod val="109000"/>
+                <a:tint val="81000"/>
+              </a:schemeClr>
+            </a:gs>
+          </a:gsLst>
+          <a:lin ang="5400000" scaled="0"/>
+        </a:gradFill>
+        <a:gradFill rotWithShape="1">
+          <a:gsLst>
+            <a:gs pos="0">
+              <a:schemeClr val="phClr">
+                <a:satMod val="103000"/>
+                <a:lumMod val="102000"/>
+                <a:tint val="94000"/>
+              </a:schemeClr>
+            </a:gs>
+            <a:gs pos="50000">
+              <a:schemeClr val="phClr">
+                <a:satMod val="110000"/>
+                <a:lumMod val="100000"/>
+                <a:shade val="100000"/>
+              </a:schemeClr>
+            </a:gs>
+            <a:gs pos="100000">
+              <a:schemeClr val="phClr">
+                <a:lumMod val="99000"/>
+                <a:satMod val="120000"/>
+                <a:shade val="78000"/>
+              </a:schemeClr>
+            </a:gs>
+          </a:gsLst>
+          <a:lin ang="5400000" scaled="0"/>
+        </a:gradFill>
+      </a:fillStyleLst>
+      <a:lnStyleLst>
+        <a:ln w="12700" cap="flat" cmpd="sng" algn="ctr">
+          <a:solidFill>
+            <a:schemeClr val="phClr"/>
+          </a:solidFill>
+          <a:prstDash val="solid"/>
+          <a:miter lim="800000"/>
+        </a:ln>
+        <a:ln w="19050" cap="flat" cmpd="sng" algn="ctr">
+          <a:solidFill>
+            <a:schemeClr val="phClr"/>
+          </a:solidFill>
+          <a:prstDash val="solid"/>
+          <a:miter lim="800000"/>
+        </a:ln>
+        <a:ln w="25400" cap="flat" cmpd="sng" algn="ctr">
+          <a:solidFill>
+            <a:schemeClr val="phClr"/>
+          </a:solidFill>
+          <a:prstDash val="solid"/>
+          <a:miter lim="800000"/>
+        </a:ln>
+      </a:lnStyleLst>
+      <a:effectStyleLst>
+        <a:effectStyle>
+          <a:effectLst/>
+        </a:effectStyle>
+        <a:effectStyle>
+          <a:effectLst/>
+        </a:effectStyle>
+        <a:effectStyle>
+          <a:effectLst>
+            <a:outerShdw blurRad="57150" dist="19050" dir="5400000" algn="ctr" rotWithShape="0">
+              <a:srgbClr val="000000">
+                <a:alpha val="63000"/>
+              </a:srgbClr>
+            </a:outerShdw>
+          </a:effectLst>
+        </a:effectStyle>
+      </a:effectStyleLst>
+      <a:bgFillStyleLst>
+        <a:solidFill>
+          <a:schemeClr val="phClr"/>
+        </a:solidFill>
+        <a:solidFill>
+          <a:schemeClr val="phClr">
+            <a:tint val="95000"/>
+            <a:satMod val="170000"/>
+          </a:schemeClr>
+        </a:solidFill>
+        <a:gradFill rotWithShape="1">
+          <a:gsLst>
+            <a:gs pos="0">
+              <a:schemeClr val="phClr">
+                <a:tint val="93000"/>
+                <a:satMod val="150000"/>
+                <a:shade val="98000"/>
+                <a:lumMod val="102000"/>
+              </a:schemeClr>
+            </a:gs>
+            <a:gs pos="50000">
+              <a:schemeClr val="phClr">
+                <a:tint val="98000"/>
+                <a:satMod val="130000"/>
+                <a:shade val="90000"/>
+                <a:lumMod val="103000"/>
+              </a:schemeClr>
+            </a:gs>
+            <a:gs pos="100000">
+              <a:schemeClr val="phClr">
+                <a:shade val="63000"/>
+                <a:satMod val="120000"/>
+              </a:schemeClr>
+            </a:gs>
+          </a:gsLst>
+          <a:lin ang="5400000" scaled="0"/>
+        </a:gradFill>
+      </a:bgFillStyleLst>
+    </a:fmtScheme>
+  </a:themeElements>
+  <a:objectDefaults>
+    <a:lnDef>
+      <a:spPr/>
+      <a:bodyPr/>
+      <a:lstStyle/>
+      <a:style>
+        <a:lnRef idx="2">
+          <a:schemeClr val="accent1"/>
+        </a:lnRef>
+        <a:fillRef idx="0">
+          <a:schemeClr val="accent1"/>
+        </a:fillRef>
+        <a:effectRef idx="1">
+          <a:schemeClr val="accent1"/>
+        </a:effectRef>
+        <a:fontRef idx="minor">
+          <a:schemeClr val="tx1"/>
+        </a:fontRef>
+      </a:style>
+    </a:lnDef>
+  </a:objectDefaults>
+  <a:extraClrSchemeLst/>
+  <a:extLst>
+    <a:ext uri="{05A4C25C-085E-4340-85A3-A5531E510DB2}">
+      <thm15:themeFamily xmlns:thm15="http://schemas.microsoft.com/office/thememl/2012/main" name="Office Theme" id="{2E142A2C-CD16-42D6-873A-C26D2A0506FA}" vid="{1BDDFF52-6CD6-40A5-AB3C-68EB2F1E4D0A}"/>
+    </a:ext>
+  </a:extLst>
+</a:theme>
 </file>
--- a/week 2/Intro to Data Science — Week 2 Python for Data Work.pptx
+++ b/week 2/Intro to Data Science — Week 2 Python for Data Work.pptx
@@ -3283,6 +3283,13 @@
   <p:clrMapOvr>
     <a:masterClrMapping/>
   </p:clrMapOvr>
+  <p:timing>
+    <p:tnLst>
+      <p:par>
+        <p:cTn id="1" dur="indefinite" restart="never" nodeType="tmRoot"/>
+      </p:par>
+    </p:tnLst>
+  </p:timing>
 </p:sld>
 </file>
 
@@ -3609,6 +3616,13 @@
   <p:clrMapOvr>
     <a:masterClrMapping/>
   </p:clrMapOvr>
+  <p:timing>
+    <p:tnLst>
+      <p:par>
+        <p:cTn id="1" dur="indefinite" restart="never" nodeType="tmRoot"/>
+      </p:par>
+    </p:tnLst>
+  </p:timing>
 </p:sld>
 </file>
 
@@ -4345,11 +4359,173 @@
           </a:p>
         </p:txBody>
       </p:sp>
+      <p:sp>
+        <p:nvSpPr>
+          <p:cNvPr id="17" name="Text 1"/>
+          <p:cNvSpPr/>
+          <p:nvPr/>
+        </p:nvSpPr>
+        <p:spPr>
+          <a:xfrm>
+            <a:off x="815975" y="4471393"/>
+            <a:ext cx="10566400" cy="1160480"/>
+          </a:xfrm>
+          <a:prstGeom prst="roundRect">
+            <a:avLst>
+              <a:gd name="adj" fmla="val 5993"/>
+            </a:avLst>
+          </a:prstGeom>
+          <a:solidFill>
+            <a:srgbClr val="1B2A41"/>
+          </a:solidFill>
+          <a:ln/>
+        </p:spPr>
+        <p:txBody>
+          <a:bodyPr wrap="square" lIns="173442" tIns="173442" rIns="0" bIns="148042" rtlCol="0" anchor="t">
+            <a:normAutofit/>
+          </a:bodyPr>
+          <a:lstStyle/>
+          <a:p>
+            <a:pPr marL="0" indent="0" algn="l">
+              <a:lnSpc>
+                <a:spcPts val="2030"/>
+              </a:lnSpc>
+              <a:buNone/>
+            </a:pPr>
+            <a:r>
+              <a:rPr lang="en-US" sz="1400" dirty="0">
+                <a:solidFill>
+                  <a:srgbClr val="F7F5EF"/>
+                </a:solidFill>
+                <a:latin typeface="Courier New" pitchFamily="49" charset="0"/>
+                <a:ea typeface="Courier New" pitchFamily="49" charset="-122"/>
+                <a:cs typeface="Courier New" pitchFamily="49" charset="-120"/>
+              </a:rPr>
+              <a:t>def </a:t>
+            </a:r>
+            <a:r>
+              <a:rPr lang="en-US" sz="1400" dirty="0" err="1" smtClean="0">
+                <a:solidFill>
+                  <a:srgbClr val="F7F5EF"/>
+                </a:solidFill>
+                <a:latin typeface="Courier New" pitchFamily="49" charset="0"/>
+                <a:ea typeface="Courier New" pitchFamily="49" charset="-122"/>
+                <a:cs typeface="Courier New" pitchFamily="49" charset="-120"/>
+              </a:rPr>
+              <a:t>is_missing</a:t>
+            </a:r>
+            <a:r>
+              <a:rPr lang="en-US" sz="1400" dirty="0" smtClean="0">
+                <a:solidFill>
+                  <a:srgbClr val="F7F5EF"/>
+                </a:solidFill>
+                <a:latin typeface="Courier New" pitchFamily="49" charset="0"/>
+                <a:ea typeface="Courier New" pitchFamily="49" charset="-122"/>
+                <a:cs typeface="Courier New" pitchFamily="49" charset="-120"/>
+              </a:rPr>
+              <a:t>(</a:t>
+            </a:r>
+            <a:r>
+              <a:rPr lang="en-US" sz="1400" dirty="0" err="1" smtClean="0">
+                <a:solidFill>
+                  <a:srgbClr val="F7F5EF"/>
+                </a:solidFill>
+                <a:latin typeface="Courier New" pitchFamily="49" charset="0"/>
+                <a:ea typeface="Courier New" pitchFamily="49" charset="-122"/>
+                <a:cs typeface="Courier New" pitchFamily="49" charset="-120"/>
+              </a:rPr>
+              <a:t>v:string</a:t>
+            </a:r>
+            <a:r>
+              <a:rPr lang="en-US" sz="1400" dirty="0" smtClean="0">
+                <a:solidFill>
+                  <a:srgbClr val="F7F5EF"/>
+                </a:solidFill>
+                <a:latin typeface="Courier New" pitchFamily="49" charset="0"/>
+                <a:ea typeface="Courier New" pitchFamily="49" charset="-122"/>
+                <a:cs typeface="Courier New" pitchFamily="49" charset="-120"/>
+              </a:rPr>
+              <a:t>):</a:t>
+            </a:r>
+          </a:p>
+          <a:p>
+            <a:pPr marL="0" indent="0" algn="l">
+              <a:lnSpc>
+                <a:spcPts val="2030"/>
+              </a:lnSpc>
+              <a:buNone/>
+            </a:pPr>
+            <a:r>
+              <a:rPr lang="en-US" sz="1400" dirty="0">
+                <a:solidFill>
+                  <a:srgbClr val="F7F5EF"/>
+                </a:solidFill>
+                <a:latin typeface="Courier New" pitchFamily="49" charset="0"/>
+                <a:ea typeface="Courier New" pitchFamily="49" charset="-122"/>
+                <a:cs typeface="Courier New" pitchFamily="49" charset="-120"/>
+              </a:rPr>
+              <a:t>    return </a:t>
+            </a:r>
+            <a:r>
+              <a:rPr lang="en-US" sz="1400" dirty="0" err="1" smtClean="0">
+                <a:solidFill>
+                  <a:srgbClr val="F7F5EF"/>
+                </a:solidFill>
+                <a:latin typeface="Courier New" pitchFamily="49" charset="0"/>
+                <a:ea typeface="Courier New" pitchFamily="49" charset="-122"/>
+                <a:cs typeface="Courier New" pitchFamily="49" charset="-120"/>
+              </a:rPr>
+              <a:t>v.strip</a:t>
+            </a:r>
+            <a:r>
+              <a:rPr lang="en-US" sz="1400" dirty="0" smtClean="0">
+                <a:solidFill>
+                  <a:srgbClr val="F7F5EF"/>
+                </a:solidFill>
+                <a:latin typeface="Courier New" pitchFamily="49" charset="0"/>
+                <a:ea typeface="Courier New" pitchFamily="49" charset="-122"/>
+                <a:cs typeface="Courier New" pitchFamily="49" charset="-120"/>
+              </a:rPr>
+              <a:t>().lower() in {‘’, ‘</a:t>
+            </a:r>
+            <a:r>
+              <a:rPr lang="en-US" sz="1400" dirty="0" err="1" smtClean="0">
+                <a:solidFill>
+                  <a:srgbClr val="F7F5EF"/>
+                </a:solidFill>
+                <a:latin typeface="Courier New" pitchFamily="49" charset="0"/>
+                <a:ea typeface="Courier New" pitchFamily="49" charset="-122"/>
+                <a:cs typeface="Courier New" pitchFamily="49" charset="-120"/>
+              </a:rPr>
+              <a:t>na</a:t>
+            </a:r>
+            <a:r>
+              <a:rPr lang="en-US" sz="1400" dirty="0" smtClean="0">
+                <a:solidFill>
+                  <a:srgbClr val="F7F5EF"/>
+                </a:solidFill>
+                <a:latin typeface="Courier New" pitchFamily="49" charset="0"/>
+                <a:ea typeface="Courier New" pitchFamily="49" charset="-122"/>
+                <a:cs typeface="Courier New" pitchFamily="49" charset="-120"/>
+              </a:rPr>
+              <a:t>’, ‘N/A’, ‘n/a’, ‘null’, ‘none’, ‘nan’, ‘?’}</a:t>
+            </a:r>
+            <a:endParaRPr lang="en-US" sz="1400" dirty="0"/>
+          </a:p>
+        </p:txBody>
+      </p:sp>
     </p:spTree>
   </p:cSld>
   <p:clrMapOvr>
     <a:masterClrMapping/>
   </p:clrMapOvr>
+  <p:timing>
+    <p:tnLst>
+      <p:par>
+        <p:cTn id="1" dur="indefinite" restart="never" nodeType="tmRoot"/>
+      </p:par>
+    </p:tnLst>
+  </p:timing>
 </p:sld>
 </file>
 
@@ -4627,6 +4803,13 @@
   <p:clrMapOvr>
     <a:masterClrMapping/>
   </p:clrMapOvr>
+  <p:timing>
+    <p:tnLst>
+      <p:par>
+        <p:cTn id="1" dur="indefinite" restart="never" nodeType="tmRoot"/>
+      </p:par>
+    </p:tnLst>
+  </p:timing>
 </p:sld>
 </file>
 
@@ -4719,7 +4902,7 @@
         </p:nvGraphicFramePr>
         <p:xfrm>
           <a:off x="825500" y="1473200"/>
-          <a:ext cx="10553700" cy="2608659"/>
+          <a:ext cx="10553700" cy="2608662"/>
         </p:xfrm>
         <a:graphic>
           <a:graphicData uri="http://schemas.openxmlformats.org/drawingml/2006/table">
@@ -4729,21 +4912,21 @@
                 <a:gridCol w="3517900">
                   <a:extLst>
                     <a:ext uri="{9D8B030D-6E8A-4147-A177-3AD203B41FA5}">
-                      <a16:colId xmlns:a16="http://schemas.microsoft.com/office/drawing/2014/main" val="20000"/>
+                      <a16:colId xmlns="" xmlns:a16="http://schemas.microsoft.com/office/drawing/2014/main" val="20000"/>
                     </a:ext>
                   </a:extLst>
                 </a:gridCol>
                 <a:gridCol w="3517900">
                   <a:extLst>
                     <a:ext uri="{9D8B030D-6E8A-4147-A177-3AD203B41FA5}">
-                      <a16:colId xmlns:a16="http://schemas.microsoft.com/office/drawing/2014/main" val="20001"/>
+                      <a16:colId xmlns="" xmlns:a16="http://schemas.microsoft.com/office/drawing/2014/main" val="20001"/>
                     </a:ext>
                   </a:extLst>
                 </a:gridCol>
                 <a:gridCol w="3517900">
                   <a:extLst>
                     <a:ext uri="{9D8B030D-6E8A-4147-A177-3AD203B41FA5}">
-                      <a16:colId xmlns:a16="http://schemas.microsoft.com/office/drawing/2014/main" val="20002"/>
+                      <a16:colId xmlns="" xmlns:a16="http://schemas.microsoft.com/office/drawing/2014/main" val="20002"/>
                     </a:ext>
                   </a:extLst>
                 </a:gridCol>
@@ -4964,7 +5147,7 @@
                 </a:tc>
                 <a:extLst>
                   <a:ext uri="{0D108BD9-81ED-4DB2-BD59-A6C34878D82A}">
-                    <a16:rowId xmlns:a16="http://schemas.microsoft.com/office/drawing/2014/main" val="10000"/>
+                    <a16:rowId xmlns="" xmlns:a16="http://schemas.microsoft.com/office/drawing/2014/main" val="10000"/>
                   </a:ext>
                 </a:extLst>
               </a:tr>
@@ -5175,7 +5358,7 @@
                 </a:tc>
                 <a:extLst>
                   <a:ext uri="{0D108BD9-81ED-4DB2-BD59-A6C34878D82A}">
-                    <a16:rowId xmlns:a16="http://schemas.microsoft.com/office/drawing/2014/main" val="10001"/>
+                    <a16:rowId xmlns="" xmlns:a16="http://schemas.microsoft.com/office/drawing/2014/main" val="10001"/>
                   </a:ext>
                 </a:extLst>
               </a:tr>
@@ -5386,7 +5569,7 @@
                 </a:tc>
                 <a:extLst>
                   <a:ext uri="{0D108BD9-81ED-4DB2-BD59-A6C34878D82A}">
-                    <a16:rowId xmlns:a16="http://schemas.microsoft.com/office/drawing/2014/main" val="10002"/>
+                    <a16:rowId xmlns="" xmlns:a16="http://schemas.microsoft.com/office/drawing/2014/main" val="10002"/>
                   </a:ext>
                 </a:extLst>
               </a:tr>
@@ -5597,7 +5780,7 @@
                 </a:tc>
                 <a:extLst>
                   <a:ext uri="{0D108BD9-81ED-4DB2-BD59-A6C34878D82A}">
-                    <a16:rowId xmlns:a16="http://schemas.microsoft.com/office/drawing/2014/main" val="10003"/>
+                    <a16:rowId xmlns="" xmlns:a16="http://schemas.microsoft.com/office/drawing/2014/main" val="10003"/>
                   </a:ext>
                 </a:extLst>
               </a:tr>
@@ -5808,7 +5991,7 @@
                 </a:tc>
                 <a:extLst>
                   <a:ext uri="{0D108BD9-81ED-4DB2-BD59-A6C34878D82A}">
-                    <a16:rowId xmlns:a16="http://schemas.microsoft.com/office/drawing/2014/main" val="10004"/>
+                    <a16:rowId xmlns="" xmlns:a16="http://schemas.microsoft.com/office/drawing/2014/main" val="10004"/>
                   </a:ext>
                 </a:extLst>
               </a:tr>
@@ -6019,7 +6202,7 @@
                 </a:tc>
                 <a:extLst>
                   <a:ext uri="{0D108BD9-81ED-4DB2-BD59-A6C34878D82A}">
-                    <a16:rowId xmlns:a16="http://schemas.microsoft.com/office/drawing/2014/main" val="10005"/>
+                    <a16:rowId xmlns="" xmlns:a16="http://schemas.microsoft.com/office/drawing/2014/main" val="10005"/>
                   </a:ext>
                 </a:extLst>
               </a:tr>
@@ -6230,7 +6413,7 @@
                 </a:tc>
                 <a:extLst>
                   <a:ext uri="{0D108BD9-81ED-4DB2-BD59-A6C34878D82A}">
-                    <a16:rowId xmlns:a16="http://schemas.microsoft.com/office/drawing/2014/main" val="10006"/>
+                    <a16:rowId xmlns="" xmlns:a16="http://schemas.microsoft.com/office/drawing/2014/main" val="10006"/>
                   </a:ext>
                 </a:extLst>
               </a:tr>
@@ -6287,6 +6470,13 @@
   <p:clrMapOvr>
     <a:masterClrMapping/>
   </p:clrMapOvr>
+  <p:timing>
+    <p:tnLst>
+      <p:par>
+        <p:cTn id="1" dur="indefinite" restart="never" nodeType="tmRoot"/>
+      </p:par>
+    </p:tnLst>
+  </p:timing>
 </p:sld>
 </file>
 
@@ -6935,6 +7125,416 @@
   <p:clrMapOvr>
     <a:masterClrMapping/>
   </p:clrMapOvr>
+  <p:timing>
+    <p:tnLst>
+      <p:par>
+        <p:cTn id="1" dur="indefinite" restart="never" nodeType="tmRoot">
+          <p:childTnLst>
+            <p:seq concurrent="1" nextAc="seek">
+              <p:cTn id="2" dur="indefinite" nodeType="mainSeq">
+                <p:childTnLst>
+                  <p:par>
+                    <p:cTn id="3" fill="hold">
+                      <p:stCondLst>
+                        <p:cond delay="indefinite"/>
+                      </p:stCondLst>
+                      <p:childTnLst>
+                        <p:par>
+                          <p:cTn id="4" fill="hold">
+                            <p:stCondLst>
+                              <p:cond delay="0"/>
+                            </p:stCondLst>
+                            <p:childTnLst>
+                              <p:par>
+                                <p:cTn id="5" presetID="16" presetClass="entr" presetSubtype="21" fill="hold" grpId="0" nodeType="clickEffect">
+                                  <p:stCondLst>
+                                    <p:cond delay="0"/>
+                                  </p:stCondLst>
+                                  <p:childTnLst>
+                                    <p:set>
+                                      <p:cBhvr>
+                                        <p:cTn id="6" dur="1" fill="hold">
+                                          <p:stCondLst>
+                                            <p:cond delay="0"/>
+                                          </p:stCondLst>
+                                        </p:cTn>
+                                        <p:tgtEl>
+                                          <p:spTgt spid="4"/>
+                                        </p:tgtEl>
+                                        <p:attrNameLst>
+                                          <p:attrName>style.visibility</p:attrName>
+                                        </p:attrNameLst>
+                                      </p:cBhvr>
+                                      <p:to>
+                                        <p:strVal val="visible"/>
+                                      </p:to>
+                                    </p:set>
+                                    <p:animEffect transition="in" filter="barn(inVertical)">
+                                      <p:cBhvr>
+                                        <p:cTn id="7" dur="500"/>
+                                        <p:tgtEl>
+                                          <p:spTgt spid="4"/>
+                                        </p:tgtEl>
+                                      </p:cBhvr>
+                                    </p:animEffect>
+                                  </p:childTnLst>
+                                </p:cTn>
+                              </p:par>
+                              <p:par>
+                                <p:cTn id="8" presetID="16" presetClass="entr" presetSubtype="21" fill="hold" grpId="0" nodeType="withEffect">
+                                  <p:stCondLst>
+                                    <p:cond delay="0"/>
+                                  </p:stCondLst>
+                                  <p:childTnLst>
+                                    <p:set>
+                                      <p:cBhvr>
+                                        <p:cTn id="9" dur="1" fill="hold">
+                                          <p:stCondLst>
+                                            <p:cond delay="0"/>
+                                          </p:stCondLst>
+                                        </p:cTn>
+                                        <p:tgtEl>
+                                          <p:spTgt spid="5"/>
+                                        </p:tgtEl>
+                                        <p:attrNameLst>
+                                          <p:attrName>style.visibility</p:attrName>
+                                        </p:attrNameLst>
+                                      </p:cBhvr>
+                                      <p:to>
+                                        <p:strVal val="visible"/>
+                                      </p:to>
+                                    </p:set>
+                                    <p:animEffect transition="in" filter="barn(inVertical)">
+                                      <p:cBhvr>
+                                        <p:cTn id="10" dur="500"/>
+                                        <p:tgtEl>
+                                          <p:spTgt spid="5"/>
+                                        </p:tgtEl>
+                                      </p:cBhvr>
+                                    </p:animEffect>
+                                  </p:childTnLst>
+                                </p:cTn>
+                              </p:par>
+                              <p:par>
+                                <p:cTn id="11" presetID="16" presetClass="entr" presetSubtype="21" fill="hold" grpId="0" nodeType="withEffect">
+                                  <p:stCondLst>
+                                    <p:cond delay="0"/>
+                                  </p:stCondLst>
+                                  <p:childTnLst>
+                                    <p:set>
+                                      <p:cBhvr>
+                                        <p:cTn id="12" dur="1" fill="hold">
+                                          <p:stCondLst>
+                                            <p:cond delay="0"/>
+                                          </p:stCondLst>
+                                        </p:cTn>
+                                        <p:tgtEl>
+                                          <p:spTgt spid="6"/>
+                                        </p:tgtEl>
+                                        <p:attrNameLst>
+                                          <p:attrName>style.visibility</p:attrName>
+                                        </p:attrNameLst>
+                                      </p:cBhvr>
+                                      <p:to>
+                                        <p:strVal val="visible"/>
+                                      </p:to>
+                                    </p:set>
+                                    <p:animEffect transition="in" filter="barn(inVertical)">
+                                      <p:cBhvr>
+                                        <p:cTn id="13" dur="500"/>
+                                        <p:tgtEl>
+                                          <p:spTgt spid="6"/>
+                                        </p:tgtEl>
+                                      </p:cBhvr>
+                                    </p:animEffect>
+                                  </p:childTnLst>
+                                </p:cTn>
+                              </p:par>
+                            </p:childTnLst>
+                          </p:cTn>
+                        </p:par>
+                      </p:childTnLst>
+                    </p:cTn>
+                  </p:par>
+                  <p:par>
+                    <p:cTn id="14" fill="hold">
+                      <p:stCondLst>
+                        <p:cond delay="indefinite"/>
+                      </p:stCondLst>
+                      <p:childTnLst>
+                        <p:par>
+                          <p:cTn id="15" fill="hold">
+                            <p:stCondLst>
+                              <p:cond delay="0"/>
+                            </p:stCondLst>
+                            <p:childTnLst>
+                              <p:par>
+                                <p:cTn id="16" presetID="16" presetClass="entr" presetSubtype="21" fill="hold" grpId="0" nodeType="clickEffect">
+                                  <p:stCondLst>
+                                    <p:cond delay="0"/>
+                                  </p:stCondLst>
+                                  <p:childTnLst>
+                                    <p:set>
+                                      <p:cBhvr>
+                                        <p:cTn id="17" dur="1" fill="hold">
+                                          <p:stCondLst>
+                                            <p:cond delay="0"/>
+                                          </p:stCondLst>
+                                        </p:cTn>
+                                        <p:tgtEl>
+                                          <p:spTgt spid="7"/>
+                                        </p:tgtEl>
+                                        <p:attrNameLst>
+                                          <p:attrName>style.visibility</p:attrName>
+                                        </p:attrNameLst>
+                                      </p:cBhvr>
+                                      <p:to>
+                                        <p:strVal val="visible"/>
+                                      </p:to>
+                                    </p:set>
+                                    <p:animEffect transition="in" filter="barn(inVertical)">
+                                      <p:cBhvr>
+                                        <p:cTn id="18" dur="500"/>
+                                        <p:tgtEl>
+                                          <p:spTgt spid="7"/>
+                                        </p:tgtEl>
+                                      </p:cBhvr>
+                                    </p:animEffect>
+                                  </p:childTnLst>
+                                </p:cTn>
+                              </p:par>
+                              <p:par>
+                                <p:cTn id="19" presetID="16" presetClass="entr" presetSubtype="21" fill="hold" grpId="0" nodeType="withEffect">
+                                  <p:stCondLst>
+                                    <p:cond delay="0"/>
+                                  </p:stCondLst>
+                                  <p:childTnLst>
+                                    <p:set>
+                                      <p:cBhvr>
+                                        <p:cTn id="20" dur="1" fill="hold">
+                                          <p:stCondLst>
+                                            <p:cond delay="0"/>
+                                          </p:stCondLst>
+                                        </p:cTn>
+                                        <p:tgtEl>
+                                          <p:spTgt spid="8"/>
+                                        </p:tgtEl>
+                                        <p:attrNameLst>
+                                          <p:attrName>style.visibility</p:attrName>
+                                        </p:attrNameLst>
+                                      </p:cBhvr>
+                                      <p:to>
+                                        <p:strVal val="visible"/>
+                                      </p:to>
+                                    </p:set>
+                                    <p:animEffect transition="in" filter="barn(inVertical)">
+                                      <p:cBhvr>
+                                        <p:cTn id="21" dur="500"/>
+                                        <p:tgtEl>
+                                          <p:spTgt spid="8"/>
+                                        </p:tgtEl>
+                                      </p:cBhvr>
+                                    </p:animEffect>
+                                  </p:childTnLst>
+                                </p:cTn>
+                              </p:par>
+                              <p:par>
+                                <p:cTn id="22" presetID="16" presetClass="entr" presetSubtype="21" fill="hold" grpId="0" nodeType="withEffect">
+                                  <p:stCondLst>
+                                    <p:cond delay="0"/>
+                                  </p:stCondLst>
+                                  <p:childTnLst>
+                                    <p:set>
+                                      <p:cBhvr>
+                                        <p:cTn id="23" dur="1" fill="hold">
+                                          <p:stCondLst>
+                                            <p:cond delay="0"/>
+                                          </p:stCondLst>
+                                        </p:cTn>
+                                        <p:tgtEl>
+                                          <p:spTgt spid="9"/>
+                                        </p:tgtEl>
+                                        <p:attrNameLst>
+                                          <p:attrName>style.visibility</p:attrName>
+                                        </p:attrNameLst>
+                                      </p:cBhvr>
+                                      <p:to>
+                                        <p:strVal val="visible"/>
+                                      </p:to>
+                                    </p:set>
+                                    <p:animEffect transition="in" filter="barn(inVertical)">
+                                      <p:cBhvr>
+                                        <p:cTn id="24" dur="500"/>
+                                        <p:tgtEl>
+                                          <p:spTgt spid="9"/>
+                                        </p:tgtEl>
+                                      </p:cBhvr>
+                                    </p:animEffect>
+                                  </p:childTnLst>
+                                </p:cTn>
+                              </p:par>
+                            </p:childTnLst>
+                          </p:cTn>
+                        </p:par>
+                      </p:childTnLst>
+                    </p:cTn>
+                  </p:par>
+                  <p:par>
+                    <p:cTn id="25" fill="hold">
+                      <p:stCondLst>
+                        <p:cond delay="indefinite"/>
+                      </p:stCondLst>
+                      <p:childTnLst>
+                        <p:par>
+                          <p:cTn id="26" fill="hold">
+                            <p:stCondLst>
+                              <p:cond delay="0"/>
+                            </p:stCondLst>
+                            <p:childTnLst>
+                              <p:par>
+                                <p:cTn id="27" presetID="16" presetClass="entr" presetSubtype="21" fill="hold" grpId="0" nodeType="clickEffect">
+                                  <p:stCondLst>
+                                    <p:cond delay="0"/>
+                                  </p:stCondLst>
+                                  <p:childTnLst>
+                                    <p:set>
+                                      <p:cBhvr>
+                                        <p:cTn id="28" dur="1" fill="hold">
+                                          <p:stCondLst>
+                                            <p:cond delay="0"/>
+                                          </p:stCondLst>
+                                        </p:cTn>
+                                        <p:tgtEl>
+                                          <p:spTgt spid="10"/>
+                                        </p:tgtEl>
+                                        <p:attrNameLst>
+                                          <p:attrName>style.visibility</p:attrName>
+                                        </p:attrNameLst>
+                                      </p:cBhvr>
+                                      <p:to>
+                                        <p:strVal val="visible"/>
+                                      </p:to>
+                                    </p:set>
+                                    <p:animEffect transition="in" filter="barn(inVertical)">
+                                      <p:cBhvr>
+                                        <p:cTn id="29" dur="500"/>
+                                        <p:tgtEl>
+                                          <p:spTgt spid="10"/>
+                                        </p:tgtEl>
+                                      </p:cBhvr>
+                                    </p:animEffect>
+                                  </p:childTnLst>
+                                </p:cTn>
+                              </p:par>
+                              <p:par>
+                                <p:cTn id="30" presetID="16" presetClass="entr" presetSubtype="21" fill="hold" grpId="0" nodeType="withEffect">
+                                  <p:stCondLst>
+                                    <p:cond delay="0"/>
+                                  </p:stCondLst>
+                                  <p:childTnLst>
+                                    <p:set>
+                                      <p:cBhvr>
+                                        <p:cTn id="31" dur="1" fill="hold">
+                                          <p:stCondLst>
+                                            <p:cond delay="0"/>
+                                          </p:stCondLst>
+                                        </p:cTn>
+                                        <p:tgtEl>
+                                          <p:spTgt spid="11"/>
+                                        </p:tgtEl>
+                                        <p:attrNameLst>
+                                          <p:attrName>style.visibility</p:attrName>
+                                        </p:attrNameLst>
+                                      </p:cBhvr>
+                                      <p:to>
+                                        <p:strVal val="visible"/>
+                                      </p:to>
+                                    </p:set>
+                                    <p:animEffect transition="in" filter="barn(inVertical)">
+                                      <p:cBhvr>
+                                        <p:cTn id="32" dur="500"/>
+                                        <p:tgtEl>
+                                          <p:spTgt spid="11"/>
+                                        </p:tgtEl>
+                                      </p:cBhvr>
+                                    </p:animEffect>
+                                  </p:childTnLst>
+                                </p:cTn>
+                              </p:par>
+                              <p:par>
+                                <p:cTn id="33" presetID="16" presetClass="entr" presetSubtype="21" fill="hold" grpId="0" nodeType="withEffect">
+                                  <p:stCondLst>
+                                    <p:cond delay="0"/>
+                                  </p:stCondLst>
+                                  <p:childTnLst>
+                                    <p:set>
+                                      <p:cBhvr>
+                                        <p:cTn id="34" dur="1" fill="hold">
+                                          <p:stCondLst>
+                                            <p:cond delay="0"/>
+                                          </p:stCondLst>
+                                        </p:cTn>
+                                        <p:tgtEl>
+                                          <p:spTgt spid="12"/>
+                                        </p:tgtEl>
+                                        <p:attrNameLst>
+                                          <p:attrName>style.visibility</p:attrName>
+                                        </p:attrNameLst>
+                                      </p:cBhvr>
+                                      <p:to>
+                                        <p:strVal val="visible"/>
+                                      </p:to>
+                                    </p:set>
+                                    <p:animEffect transition="in" filter="barn(inVertical)">
+                                      <p:cBhvr>
+                                        <p:cTn id="35" dur="500"/>
+                                        <p:tgtEl>
+                                          <p:spTgt spid="12"/>
+                                        </p:tgtEl>
+                                      </p:cBhvr>
+                                    </p:animEffect>
+                                  </p:childTnLst>
+                                </p:cTn>
+                              </p:par>
+                            </p:childTnLst>
+                          </p:cTn>
+                        </p:par>
+                      </p:childTnLst>
+                    </p:cTn>
+                  </p:par>
+                </p:childTnLst>
+              </p:cTn>
+              <p:prevCondLst>
+                <p:cond evt="onPrev" delay="0">
+                  <p:tgtEl>
+                    <p:sldTgt/>
+                  </p:tgtEl>
+                </p:cond>
+              </p:prevCondLst>
+              <p:nextCondLst>
+                <p:cond evt="onNext" delay="0">
+                  <p:tgtEl>
+                    <p:sldTgt/>
+                  </p:tgtEl>
+                </p:cond>
+              </p:nextCondLst>
+            </p:seq>
+          </p:childTnLst>
+        </p:cTn>
+      </p:par>
+    </p:tnLst>
+    <p:bldLst>
+      <p:bldP spid="4" grpId="0" animBg="1"/>
+      <p:bldP spid="5" grpId="0" animBg="1"/>
+      <p:bldP spid="6" grpId="0" animBg="1"/>
+      <p:bldP spid="7" grpId="0" animBg="1"/>
+      <p:bldP spid="8" grpId="0" animBg="1"/>
+      <p:bldP spid="9" grpId="0" animBg="1"/>
+      <p:bldP spid="10" grpId="0" animBg="1"/>
+      <p:bldP spid="11" grpId="0" animBg="1"/>
+      <p:bldP spid="12" grpId="0" animBg="1"/>
+    </p:bldLst>
+  </p:timing>
 </p:sld>
 </file>
 
@@ -7019,7 +7619,7 @@
         </p:nvSpPr>
         <p:spPr>
           <a:xfrm>
-            <a:off x="812800" y="1460500"/>
+            <a:off x="812800" y="1431925"/>
             <a:ext cx="10566400" cy="2395141"/>
           </a:xfrm>
           <a:prstGeom prst="roundRect">
@@ -7034,7 +7634,7 @@
         </p:spPr>
         <p:txBody>
           <a:bodyPr wrap="square" lIns="173442" tIns="173442" rIns="0" bIns="148042" rtlCol="0" anchor="t">
-            <a:normAutofit/>
+            <a:noAutofit/>
           </a:bodyPr>
           <a:lstStyle/>
           <a:p>
@@ -7045,17 +7645,20 @@
               <a:buNone/>
             </a:pPr>
             <a:r>
-              <a:rPr lang="en-US" sz="1350" dirty="0">
+              <a:rPr lang="en-US" sz="1400" dirty="0">
                 <a:solidFill>
                   <a:srgbClr val="F7F5EF"/>
                 </a:solidFill>
-                <a:latin typeface="Courier New" pitchFamily="49" charset="0"/>
-                <a:ea typeface="Courier New" pitchFamily="49" charset="-122"/>
-                <a:cs typeface="Courier New" pitchFamily="49" charset="-120"/>
+                <a:latin typeface="Courier New" panose="02070309020205020404" pitchFamily="49" charset="0"/>
+                <a:ea typeface="Courier New" pitchFamily="49" charset="-122"/>
+                <a:cs typeface="Courier New" panose="02070309020205020404" pitchFamily="49" charset="0"/>
               </a:rPr>
               <a:t>import csv</a:t>
             </a:r>
-            <a:endParaRPr lang="en-US" sz="1350" dirty="0"/>
+            <a:endParaRPr lang="en-US" sz="1400" dirty="0">
+              <a:latin typeface="Courier New" panose="02070309020205020404" pitchFamily="49" charset="0"/>
+              <a:cs typeface="Courier New" panose="02070309020205020404" pitchFamily="49" charset="0"/>
+            </a:endParaRPr>
           </a:p>
           <a:p>
             <a:pPr marL="0" indent="0" algn="l">
@@ -7065,17 +7668,31 @@
               <a:buNone/>
             </a:pPr>
             <a:r>
-              <a:rPr lang="en-US" sz="1350" dirty="0">
+              <a:rPr lang="en-US" sz="1400" dirty="0">
                 <a:solidFill>
                   <a:srgbClr val="F7F5EF"/>
                 </a:solidFill>
                 <a:latin typeface="Courier New" pitchFamily="49" charset="0"/>
                 <a:ea typeface="Courier New" pitchFamily="49" charset="-122"/>
-                <a:cs typeface="Courier New" pitchFamily="49" charset="-120"/>
-              </a:rPr>
-              <a:t>from pathlib import Path</a:t>
-            </a:r>
-            <a:endParaRPr lang="en-US" sz="1350" dirty="0"/>
+                <a:cs typeface="Courier New" panose="02070309020205020404" pitchFamily="49" charset="0"/>
+              </a:rPr>
+              <a:t>from pathlib import </a:t>
+            </a:r>
+            <a:r>
+              <a:rPr lang="en-US" sz="1400" dirty="0" smtClean="0">
+                <a:solidFill>
+                  <a:srgbClr val="F7F5EF"/>
+                </a:solidFill>
+                <a:latin typeface="Courier New" pitchFamily="49" charset="0"/>
+                <a:ea typeface="Courier New" pitchFamily="49" charset="-122"/>
+                <a:cs typeface="Courier New" panose="02070309020205020404" pitchFamily="49" charset="0"/>
+              </a:rPr>
+              <a:t>Path</a:t>
+            </a:r>
+            <a:endParaRPr lang="en-US" sz="1400" dirty="0">
+              <a:latin typeface="Courier New" panose="02070309020205020404" pitchFamily="49" charset="0"/>
+              <a:cs typeface="Courier New" panose="02070309020205020404" pitchFamily="49" charset="0"/>
+            </a:endParaRPr>
           </a:p>
           <a:p>
             <a:pPr marL="0" indent="0" algn="l">
@@ -7084,7 +7701,10 @@
               </a:lnSpc>
               <a:buNone/>
             </a:pPr>
-            <a:endParaRPr lang="en-US" sz="1350" dirty="0"/>
+            <a:endParaRPr lang="en-US" sz="1400" dirty="0">
+              <a:latin typeface="Courier New" panose="02070309020205020404" pitchFamily="49" charset="0"/>
+              <a:cs typeface="Courier New" panose="02070309020205020404" pitchFamily="49" charset="0"/>
+            </a:endParaRPr>
           </a:p>
           <a:p>
             <a:pPr marL="0" indent="0" algn="l">
@@ -7094,17 +7714,31 @@
               <a:buNone/>
             </a:pPr>
             <a:r>
-              <a:rPr lang="en-US" sz="1350" dirty="0">
+              <a:rPr lang="en-US" sz="1400" dirty="0">
                 <a:solidFill>
                   <a:srgbClr val="F7F5EF"/>
                 </a:solidFill>
                 <a:latin typeface="Courier New" pitchFamily="49" charset="0"/>
                 <a:ea typeface="Courier New" pitchFamily="49" charset="-122"/>
-                <a:cs typeface="Courier New" pitchFamily="49" charset="-120"/>
-              </a:rPr>
-              <a:t>path = Path('orders.csv')</a:t>
-            </a:r>
-            <a:endParaRPr lang="en-US" sz="1350" dirty="0"/>
+                <a:cs typeface="Courier New" panose="02070309020205020404" pitchFamily="49" charset="0"/>
+              </a:rPr>
+              <a:t>path = Path('orders.csv</a:t>
+            </a:r>
+            <a:r>
+              <a:rPr lang="en-US" sz="1400" dirty="0" smtClean="0">
+                <a:solidFill>
+                  <a:srgbClr val="F7F5EF"/>
+                </a:solidFill>
+                <a:latin typeface="Courier New" pitchFamily="49" charset="0"/>
+                <a:ea typeface="Courier New" pitchFamily="49" charset="-122"/>
+                <a:cs typeface="Courier New" panose="02070309020205020404" pitchFamily="49" charset="0"/>
+              </a:rPr>
+              <a:t>')</a:t>
+            </a:r>
+            <a:endParaRPr lang="en-US" sz="1400" dirty="0">
+              <a:latin typeface="Courier New" panose="02070309020205020404" pitchFamily="49" charset="0"/>
+              <a:cs typeface="Courier New" panose="02070309020205020404" pitchFamily="49" charset="0"/>
+            </a:endParaRPr>
           </a:p>
           <a:p>
             <a:pPr marL="0" indent="0" algn="l">
@@ -7114,17 +7748,20 @@
               <a:buNone/>
             </a:pPr>
             <a:r>
-              <a:rPr lang="en-US" sz="1350" dirty="0">
+              <a:rPr lang="en-US" sz="1400" dirty="0">
                 <a:solidFill>
                   <a:srgbClr val="F7F5EF"/>
                 </a:solidFill>
                 <a:latin typeface="Courier New" pitchFamily="49" charset="0"/>
                 <a:ea typeface="Courier New" pitchFamily="49" charset="-122"/>
-                <a:cs typeface="Courier New" pitchFamily="49" charset="-120"/>
+                <a:cs typeface="Courier New" panose="02070309020205020404" pitchFamily="49" charset="0"/>
               </a:rPr>
               <a:t>with path.open(newline='', encoding='utf-8') as f:</a:t>
             </a:r>
-            <a:endParaRPr lang="en-US" sz="1350" dirty="0"/>
+            <a:endParaRPr lang="en-US" sz="1400" dirty="0">
+              <a:latin typeface="Courier New" panose="02070309020205020404" pitchFamily="49" charset="0"/>
+              <a:cs typeface="Courier New" panose="02070309020205020404" pitchFamily="49" charset="0"/>
+            </a:endParaRPr>
           </a:p>
           <a:p>
             <a:pPr marL="0" indent="0" algn="l">
@@ -7134,17 +7771,20 @@
               <a:buNone/>
             </a:pPr>
             <a:r>
-              <a:rPr lang="en-US" sz="1350" dirty="0">
+              <a:rPr lang="en-US" sz="1400" dirty="0">
                 <a:solidFill>
                   <a:srgbClr val="F7F5EF"/>
                 </a:solidFill>
                 <a:latin typeface="Courier New" pitchFamily="49" charset="0"/>
                 <a:ea typeface="Courier New" pitchFamily="49" charset="-122"/>
-                <a:cs typeface="Courier New" pitchFamily="49" charset="-120"/>
+                <a:cs typeface="Courier New" panose="02070309020205020404" pitchFamily="49" charset="0"/>
               </a:rPr>
               <a:t>    rows = list(csv.DictReader(f))</a:t>
             </a:r>
-            <a:endParaRPr lang="en-US" sz="1350" dirty="0"/>
+            <a:endParaRPr lang="en-US" sz="1400" dirty="0">
+              <a:latin typeface="Courier New" panose="02070309020205020404" pitchFamily="49" charset="0"/>
+              <a:cs typeface="Courier New" panose="02070309020205020404" pitchFamily="49" charset="0"/>
+            </a:endParaRPr>
           </a:p>
           <a:p>
             <a:pPr marL="0" indent="0" algn="l">
@@ -7154,17 +7794,20 @@
               <a:buNone/>
             </a:pPr>
             <a:r>
-              <a:rPr lang="en-US" sz="1350" dirty="0">
+              <a:rPr lang="en-US" sz="1400" dirty="0">
                 <a:solidFill>
                   <a:srgbClr val="F7F5EF"/>
                 </a:solidFill>
                 <a:latin typeface="Courier New" pitchFamily="49" charset="0"/>
                 <a:ea typeface="Courier New" pitchFamily="49" charset="-122"/>
-                <a:cs typeface="Courier New" pitchFamily="49" charset="-120"/>
+                <a:cs typeface="Courier New" panose="02070309020205020404" pitchFamily="49" charset="0"/>
               </a:rPr>
               <a:t>print(len(rows), list(rows[0]))</a:t>
             </a:r>
-            <a:endParaRPr lang="en-US" sz="1350" dirty="0"/>
+            <a:endParaRPr lang="en-US" sz="1400" dirty="0">
+              <a:latin typeface="Courier New" panose="02070309020205020404" pitchFamily="49" charset="0"/>
+              <a:cs typeface="Courier New" panose="02070309020205020404" pitchFamily="49" charset="0"/>
+            </a:endParaRPr>
           </a:p>
           <a:p>
             <a:pPr marL="0" indent="0" algn="l">
@@ -7174,17 +7817,20 @@
               <a:buNone/>
             </a:pPr>
             <a:r>
-              <a:rPr lang="en-US" sz="1350" dirty="0">
+              <a:rPr lang="en-US" sz="1400" dirty="0">
                 <a:solidFill>
                   <a:srgbClr val="F7F5EF"/>
                 </a:solidFill>
                 <a:latin typeface="Courier New" pitchFamily="49" charset="0"/>
                 <a:ea typeface="Courier New" pitchFamily="49" charset="-122"/>
-                <a:cs typeface="Courier New" pitchFamily="49" charset="-120"/>
+                <a:cs typeface="Courier New" panose="02070309020205020404" pitchFamily="49" charset="0"/>
               </a:rPr>
               <a:t>print(repr(rows[0]['unit_price']))   # '3450': text</a:t>
             </a:r>
-            <a:endParaRPr lang="en-US" sz="1350" dirty="0"/>
+            <a:endParaRPr lang="en-US" sz="1400" dirty="0">
+              <a:latin typeface="Courier New" panose="02070309020205020404" pitchFamily="49" charset="0"/>
+              <a:cs typeface="Courier New" panose="02070309020205020404" pitchFamily="49" charset="0"/>
+            </a:endParaRPr>
           </a:p>
         </p:txBody>
       </p:sp>
@@ -7281,6 +7927,13 @@
   <p:clrMapOvr>
     <a:masterClrMapping/>
   </p:clrMapOvr>
+  <p:timing>
+    <p:tnLst>
+      <p:par>
+        <p:cTn id="1" dur="indefinite" restart="never" nodeType="tmRoot"/>
+      </p:par>
+    </p:tnLst>
+  </p:timing>
 </p:sld>
 </file>
 
@@ -7618,6 +8271,13 @@
   <p:clrMapOvr>
     <a:masterClrMapping/>
   </p:clrMapOvr>
+  <p:timing>
+    <p:tnLst>
+      <p:par>
+        <p:cTn id="1" dur="indefinite" restart="never" nodeType="tmRoot"/>
+      </p:par>
+    </p:tnLst>
+  </p:timing>
 </p:sld>
 </file>
 
@@ -7987,6 +8647,92 @@
   <p:clrMapOvr>
     <a:masterClrMapping/>
   </p:clrMapOvr>
+  <p:timing>
+    <p:tnLst>
+      <p:par>
+        <p:cTn id="1" dur="indefinite" restart="never" nodeType="tmRoot">
+          <p:childTnLst>
+            <p:seq concurrent="1" nextAc="seek">
+              <p:cTn id="2" dur="indefinite" nodeType="mainSeq">
+                <p:childTnLst>
+                  <p:par>
+                    <p:cTn id="3" fill="hold">
+                      <p:stCondLst>
+                        <p:cond delay="indefinite"/>
+                      </p:stCondLst>
+                      <p:childTnLst>
+                        <p:par>
+                          <p:cTn id="4" fill="hold">
+                            <p:stCondLst>
+                              <p:cond delay="0"/>
+                            </p:stCondLst>
+                            <p:childTnLst>
+                              <p:par>
+                                <p:cTn id="5" presetID="16" presetClass="entr" presetSubtype="21" fill="hold" grpId="0" nodeType="clickEffect">
+                                  <p:stCondLst>
+                                    <p:cond delay="0"/>
+                                  </p:stCondLst>
+                                  <p:childTnLst>
+                                    <p:set>
+                                      <p:cBhvr>
+                                        <p:cTn id="6" dur="1" fill="hold">
+                                          <p:stCondLst>
+                                            <p:cond delay="0"/>
+                                          </p:stCondLst>
+                                        </p:cTn>
+                                        <p:tgtEl>
+                                          <p:spTgt spid="6"/>
+                                        </p:tgtEl>
+                                        <p:attrNameLst>
+                                          <p:attrName>style.visibility</p:attrName>
+                                        </p:attrNameLst>
+                                      </p:cBhvr>
+                                      <p:to>
+                                        <p:strVal val="visible"/>
+                                      </p:to>
+                                    </p:set>
+                                    <p:animEffect transition="in" filter="barn(inVertical)">
+                                      <p:cBhvr>
+                                        <p:cTn id="7" dur="500"/>
+                                        <p:tgtEl>
+                                          <p:spTgt spid="6"/>
+                                        </p:tgtEl>
+                                      </p:cBhvr>
+                                    </p:animEffect>
+                                  </p:childTnLst>
+                                </p:cTn>
+                              </p:par>
+                            </p:childTnLst>
+                          </p:cTn>
+                        </p:par>
+                      </p:childTnLst>
+                    </p:cTn>
+                  </p:par>
+                </p:childTnLst>
+              </p:cTn>
+              <p:prevCondLst>
+                <p:cond evt="onPrev" delay="0">
+                  <p:tgtEl>
+                    <p:sldTgt/>
+                  </p:tgtEl>
+                </p:cond>
+              </p:prevCondLst>
+              <p:nextCondLst>
+                <p:cond evt="onNext" delay="0">
+                  <p:tgtEl>
+                    <p:sldTgt/>
+                  </p:tgtEl>
+                </p:cond>
+              </p:nextCondLst>
+            </p:seq>
+          </p:childTnLst>
+        </p:cTn>
+      </p:par>
+    </p:tnLst>
+    <p:bldLst>
+      <p:bldP spid="6" grpId="0" animBg="1"/>
+    </p:bldLst>
+  </p:timing>
 </p:sld>
 </file>
 
@@ -8308,6 +9054,92 @@
   <p:clrMapOvr>
     <a:masterClrMapping/>
   </p:clrMapOvr>
+  <p:timing>
+    <p:tnLst>
+      <p:par>
+        <p:cTn id="1" dur="indefinite" restart="never" nodeType="tmRoot">
+          <p:childTnLst>
+            <p:seq concurrent="1" nextAc="seek">
+              <p:cTn id="2" dur="indefinite" nodeType="mainSeq">
+                <p:childTnLst>
+                  <p:par>
+                    <p:cTn id="3" fill="hold">
+                      <p:stCondLst>
+                        <p:cond delay="indefinite"/>
+                      </p:stCondLst>
+                      <p:childTnLst>
+                        <p:par>
+                          <p:cTn id="4" fill="hold">
+                            <p:stCondLst>
+                              <p:cond delay="0"/>
+                            </p:stCondLst>
+                            <p:childTnLst>
+                              <p:par>
+                                <p:cTn id="5" presetID="16" presetClass="entr" presetSubtype="21" fill="hold" grpId="0" nodeType="clickEffect">
+                                  <p:stCondLst>
+                                    <p:cond delay="0"/>
+                                  </p:stCondLst>
+                                  <p:childTnLst>
+                                    <p:set>
+                                      <p:cBhvr>
+                                        <p:cTn id="6" dur="1" fill="hold">
+                                          <p:stCondLst>
+                                            <p:cond delay="0"/>
+                                          </p:stCondLst>
+                                        </p:cTn>
+                                        <p:tgtEl>
+                                          <p:spTgt spid="4"/>
+                                        </p:tgtEl>
+                                        <p:attrNameLst>
+                                          <p:attrName>style.visibility</p:attrName>
+                                        </p:attrNameLst>
+                                      </p:cBhvr>
+                                      <p:to>
+                                        <p:strVal val="visible"/>
+                                      </p:to>
+                                    </p:set>
+                                    <p:animEffect transition="in" filter="barn(inVertical)">
+                                      <p:cBhvr>
+                                        <p:cTn id="7" dur="500"/>
+                                        <p:tgtEl>
+                                          <p:spTgt spid="4"/>
+                                        </p:tgtEl>
+                                      </p:cBhvr>
+                                    </p:animEffect>
+                                  </p:childTnLst>
+                                </p:cTn>
+                              </p:par>
+                            </p:childTnLst>
+                          </p:cTn>
+                        </p:par>
+                      </p:childTnLst>
+                    </p:cTn>
+                  </p:par>
+                </p:childTnLst>
+              </p:cTn>
+              <p:prevCondLst>
+                <p:cond evt="onPrev" delay="0">
+                  <p:tgtEl>
+                    <p:sldTgt/>
+                  </p:tgtEl>
+                </p:cond>
+              </p:prevCondLst>
+              <p:nextCondLst>
+                <p:cond evt="onNext" delay="0">
+                  <p:tgtEl>
+                    <p:sldTgt/>
+                  </p:tgtEl>
+                </p:cond>
+              </p:nextCondLst>
+            </p:seq>
+          </p:childTnLst>
+        </p:cTn>
+      </p:par>
+    </p:tnLst>
+    <p:bldLst>
+      <p:bldP spid="4" grpId="0" animBg="1"/>
+    </p:bldLst>
+  </p:timing>
 </p:sld>
 </file>
 
@@ -8843,6 +9675,13 @@
   <p:clrMapOvr>
     <a:masterClrMapping/>
   </p:clrMapOvr>
+  <p:timing>
+    <p:tnLst>
+      <p:par>
+        <p:cTn id="1" dur="indefinite" restart="never" nodeType="tmRoot"/>
+      </p:par>
+    </p:tnLst>
+  </p:timing>
 </p:sld>
 </file>
 
@@ -9056,6 +9895,92 @@
   <p:clrMapOvr>
     <a:masterClrMapping/>
   </p:clrMapOvr>
+  <p:timing>
+    <p:tnLst>
+      <p:par>
+        <p:cTn id="1" dur="indefinite" restart="never" nodeType="tmRoot">
+          <p:childTnLst>
+            <p:seq concurrent="1" nextAc="seek">
+              <p:cTn id="2" dur="indefinite" nodeType="mainSeq">
+                <p:childTnLst>
+                  <p:par>
+                    <p:cTn id="3" fill="hold">
+                      <p:stCondLst>
+                        <p:cond delay="indefinite"/>
+                      </p:stCondLst>
+                      <p:childTnLst>
+                        <p:par>
+                          <p:cTn id="4" fill="hold">
+                            <p:stCondLst>
+                              <p:cond delay="0"/>
+                            </p:stCondLst>
+                            <p:childTnLst>
+                              <p:par>
+                                <p:cTn id="5" presetID="16" presetClass="entr" presetSubtype="21" fill="hold" grpId="0" nodeType="clickEffect">
+                                  <p:stCondLst>
+                                    <p:cond delay="0"/>
+                                  </p:stCondLst>
+                                  <p:childTnLst>
+                                    <p:set>
+                                      <p:cBhvr>
+                                        <p:cTn id="6" dur="1" fill="hold">
+                                          <p:stCondLst>
+                                            <p:cond delay="0"/>
+                                          </p:stCondLst>
+                                        </p:cTn>
+                                        <p:tgtEl>
+                                          <p:spTgt spid="4"/>
+                                        </p:tgtEl>
+                                        <p:attrNameLst>
+                                          <p:attrName>style.visibility</p:attrName>
+                                        </p:attrNameLst>
+                                      </p:cBhvr>
+                                      <p:to>
+                                        <p:strVal val="visible"/>
+                                      </p:to>
+                                    </p:set>
+                                    <p:animEffect transition="in" filter="barn(inVertical)">
+                                      <p:cBhvr>
+                                        <p:cTn id="7" dur="500"/>
+                                        <p:tgtEl>
+                                          <p:spTgt spid="4"/>
+                                        </p:tgtEl>
+                                      </p:cBhvr>
+                                    </p:animEffect>
+                                  </p:childTnLst>
+                                </p:cTn>
+                              </p:par>
+                            </p:childTnLst>
+                          </p:cTn>
+                        </p:par>
+                      </p:childTnLst>
+                    </p:cTn>
+                  </p:par>
+                </p:childTnLst>
+              </p:cTn>
+              <p:prevCondLst>
+                <p:cond evt="onPrev" delay="0">
+                  <p:tgtEl>
+                    <p:sldTgt/>
+                  </p:tgtEl>
+                </p:cond>
+              </p:prevCondLst>
+              <p:nextCondLst>
+                <p:cond evt="onNext" delay="0">
+                  <p:tgtEl>
+                    <p:sldTgt/>
+                  </p:tgtEl>
+                </p:cond>
+              </p:nextCondLst>
+            </p:seq>
+          </p:childTnLst>
+        </p:cTn>
+      </p:par>
+    </p:tnLst>
+    <p:bldLst>
+      <p:bldP spid="4" grpId="0" animBg="1"/>
+    </p:bldLst>
+  </p:timing>
 </p:sld>
 </file>
 
@@ -9141,14 +10066,14 @@
           <p:nvPr>
             <p:extLst>
               <p:ext uri="{D42A27DB-BD31-4B8C-83A1-F6EECF244321}">
-                <p14:modId xmlns:p14="http://schemas.microsoft.com/office/powerpoint/2010/main" val="1579011935"/>
+                <p14:modId xmlns:p14="http://schemas.microsoft.com/office/powerpoint/2010/main" val="2799271219"/>
               </p:ext>
             </p:extLst>
           </p:nvPr>
         </p:nvGraphicFramePr>
         <p:xfrm>
           <a:off x="825500" y="1473200"/>
-          <a:ext cx="10553700" cy="3088084"/>
+          <a:ext cx="10553700" cy="3088088"/>
         </p:xfrm>
         <a:graphic>
           <a:graphicData uri="http://schemas.openxmlformats.org/drawingml/2006/table">
@@ -9158,14 +10083,14 @@
                 <a:gridCol w="5276850">
                   <a:extLst>
                     <a:ext uri="{9D8B030D-6E8A-4147-A177-3AD203B41FA5}">
-                      <a16:colId xmlns:a16="http://schemas.microsoft.com/office/drawing/2014/main" val="20000"/>
+                      <a16:colId xmlns="" xmlns:a16="http://schemas.microsoft.com/office/drawing/2014/main" val="20000"/>
                     </a:ext>
                   </a:extLst>
                 </a:gridCol>
                 <a:gridCol w="5276850">
                   <a:extLst>
                     <a:ext uri="{9D8B030D-6E8A-4147-A177-3AD203B41FA5}">
-                      <a16:colId xmlns:a16="http://schemas.microsoft.com/office/drawing/2014/main" val="20001"/>
+                      <a16:colId xmlns="" xmlns:a16="http://schemas.microsoft.com/office/drawing/2014/main" val="20001"/>
                     </a:ext>
                   </a:extLst>
                 </a:gridCol>
@@ -9315,7 +10240,7 @@
                 </a:tc>
                 <a:extLst>
                   <a:ext uri="{0D108BD9-81ED-4DB2-BD59-A6C34878D82A}">
-                    <a16:rowId xmlns:a16="http://schemas.microsoft.com/office/drawing/2014/main" val="10000"/>
+                    <a16:rowId xmlns="" xmlns:a16="http://schemas.microsoft.com/office/drawing/2014/main" val="10000"/>
                   </a:ext>
                 </a:extLst>
               </a:tr>
@@ -9399,17 +10324,6 @@
                         </a:lnSpc>
                         <a:buNone/>
                       </a:pPr>
-                      <a:r>
-                        <a:rPr lang="en-US" sz="1400" dirty="0">
-                          <a:solidFill>
-                            <a:srgbClr val="1B2A41"/>
-                          </a:solidFill>
-                          <a:latin typeface="Helvetica" pitchFamily="34" charset="0"/>
-                          <a:ea typeface="Helvetica" pitchFamily="34" charset="-122"/>
-                          <a:cs typeface="Helvetica" pitchFamily="34" charset="-120"/>
-                        </a:rPr>
-                        <a:t>Open the CSV, return header and rows</a:t>
-                      </a:r>
                       <a:endParaRPr lang="en-US" sz="1400" dirty="0">
                         <a:latin typeface="Helvetica" charset="0"/>
                         <a:ea typeface="Helvetica" charset="0"/>
@@ -9458,7 +10372,7 @@
                 </a:tc>
                 <a:extLst>
                   <a:ext uri="{0D108BD9-81ED-4DB2-BD59-A6C34878D82A}">
-                    <a16:rowId xmlns:a16="http://schemas.microsoft.com/office/drawing/2014/main" val="10001"/>
+                    <a16:rowId xmlns="" xmlns:a16="http://schemas.microsoft.com/office/drawing/2014/main" val="10001"/>
                   </a:ext>
                 </a:extLst>
               </a:tr>
@@ -9542,17 +10456,6 @@
                         </a:lnSpc>
                         <a:buNone/>
                       </a:pPr>
-                      <a:r>
-                        <a:rPr lang="en-US" sz="1400" dirty="0">
-                          <a:solidFill>
-                            <a:srgbClr val="1B2A41"/>
-                          </a:solidFill>
-                          <a:latin typeface="Helvetica" pitchFamily="34" charset="0"/>
-                          <a:ea typeface="Helvetica" pitchFamily="34" charset="-122"/>
-                          <a:cs typeface="Helvetica" pitchFamily="34" charset="-120"/>
-                        </a:rPr>
-                        <a:t>True for blank, N/A, ?, null and similar</a:t>
-                      </a:r>
                       <a:endParaRPr lang="en-US" sz="1400" dirty="0">
                         <a:latin typeface="Helvetica" charset="0"/>
                         <a:ea typeface="Helvetica" charset="0"/>
@@ -9601,7 +10504,7 @@
                 </a:tc>
                 <a:extLst>
                   <a:ext uri="{0D108BD9-81ED-4DB2-BD59-A6C34878D82A}">
-                    <a16:rowId xmlns:a16="http://schemas.microsoft.com/office/drawing/2014/main" val="10002"/>
+                    <a16:rowId xmlns="" xmlns:a16="http://schemas.microsoft.com/office/drawing/2014/main" val="10002"/>
                   </a:ext>
                 </a:extLst>
               </a:tr>
@@ -9685,17 +10588,6 @@
                         </a:lnSpc>
                         <a:buNone/>
                       </a:pPr>
-                      <a:r>
-                        <a:rPr lang="en-US" sz="1400" dirty="0">
-                          <a:solidFill>
-                            <a:srgbClr val="1B2A41"/>
-                          </a:solidFill>
-                          <a:latin typeface="Helvetica" pitchFamily="34" charset="0"/>
-                          <a:ea typeface="Helvetica" pitchFamily="34" charset="-122"/>
-                          <a:cs typeface="Helvetica" pitchFamily="34" charset="-120"/>
-                        </a:rPr>
-                        <a:t>Decide int, float, str or empty for one column</a:t>
-                      </a:r>
                       <a:endParaRPr lang="en-US" sz="1400" dirty="0">
                         <a:latin typeface="Helvetica" charset="0"/>
                         <a:ea typeface="Helvetica" charset="0"/>
@@ -9744,7 +10636,7 @@
                 </a:tc>
                 <a:extLst>
                   <a:ext uri="{0D108BD9-81ED-4DB2-BD59-A6C34878D82A}">
-                    <a16:rowId xmlns:a16="http://schemas.microsoft.com/office/drawing/2014/main" val="10003"/>
+                    <a16:rowId xmlns="" xmlns:a16="http://schemas.microsoft.com/office/drawing/2014/main" val="10003"/>
                   </a:ext>
                 </a:extLst>
               </a:tr>
@@ -9828,17 +10720,6 @@
                         </a:lnSpc>
                         <a:buNone/>
                       </a:pPr>
-                      <a:r>
-                        <a:rPr lang="en-US" sz="1400" dirty="0">
-                          <a:solidFill>
-                            <a:srgbClr val="1B2A41"/>
-                          </a:solidFill>
-                          <a:latin typeface="Helvetica" pitchFamily="34" charset="0"/>
-                          <a:ea typeface="Helvetica" pitchFamily="34" charset="-122"/>
-                          <a:cs typeface="Helvetica" pitchFamily="34" charset="-120"/>
-                        </a:rPr>
-                        <a:t>Turn one column into a summary</a:t>
-                      </a:r>
                       <a:endParaRPr lang="en-US" sz="1400" dirty="0">
                         <a:latin typeface="Helvetica" charset="0"/>
                         <a:ea typeface="Helvetica" charset="0"/>
@@ -9887,7 +10768,7 @@
                 </a:tc>
                 <a:extLst>
                   <a:ext uri="{0D108BD9-81ED-4DB2-BD59-A6C34878D82A}">
-                    <a16:rowId xmlns:a16="http://schemas.microsoft.com/office/drawing/2014/main" val="10004"/>
+                    <a16:rowId xmlns="" xmlns:a16="http://schemas.microsoft.com/office/drawing/2014/main" val="10004"/>
                   </a:ext>
                 </a:extLst>
               </a:tr>
@@ -9971,17 +10852,6 @@
                         </a:lnSpc>
                         <a:buNone/>
                       </a:pPr>
-                      <a:r>
-                        <a:rPr lang="en-US" sz="1400" dirty="0">
-                          <a:solidFill>
-                            <a:srgbClr val="1B2A41"/>
-                          </a:solidFill>
-                          <a:latin typeface="Helvetica" pitchFamily="34" charset="0"/>
-                          <a:ea typeface="Helvetica" pitchFamily="34" charset="-122"/>
-                          <a:cs typeface="Helvetica" pitchFamily="34" charset="-120"/>
-                        </a:rPr>
-                        <a:t>List columns that hold identical values</a:t>
-                      </a:r>
                       <a:endParaRPr lang="en-US" sz="1400" dirty="0">
                         <a:latin typeface="Helvetica" charset="0"/>
                         <a:ea typeface="Helvetica" charset="0"/>
@@ -10030,7 +10900,7 @@
                 </a:tc>
                 <a:extLst>
                   <a:ext uri="{0D108BD9-81ED-4DB2-BD59-A6C34878D82A}">
-                    <a16:rowId xmlns:a16="http://schemas.microsoft.com/office/drawing/2014/main" val="10005"/>
+                    <a16:rowId xmlns="" xmlns:a16="http://schemas.microsoft.com/office/drawing/2014/main" val="10005"/>
                   </a:ext>
                 </a:extLst>
               </a:tr>
@@ -10114,17 +10984,6 @@
                         </a:lnSpc>
                         <a:buNone/>
                       </a:pPr>
-                      <a:r>
-                        <a:rPr lang="en-US" sz="1400" dirty="0">
-                          <a:solidFill>
-                            <a:srgbClr val="1B2A41"/>
-                          </a:solidFill>
-                          <a:latin typeface="Helvetica" pitchFamily="34" charset="0"/>
-                          <a:ea typeface="Helvetica" pitchFamily="34" charset="-122"/>
-                          <a:cs typeface="Helvetica" pitchFamily="34" charset="-120"/>
-                        </a:rPr>
-                        <a:t>Print everything for one file</a:t>
-                      </a:r>
                       <a:endParaRPr lang="en-US" sz="1400" dirty="0">
                         <a:latin typeface="Helvetica" charset="0"/>
                         <a:ea typeface="Helvetica" charset="0"/>
@@ -10173,7 +11032,7 @@
                 </a:tc>
                 <a:extLst>
                   <a:ext uri="{0D108BD9-81ED-4DB2-BD59-A6C34878D82A}">
-                    <a16:rowId xmlns:a16="http://schemas.microsoft.com/office/drawing/2014/main" val="10006"/>
+                    <a16:rowId xmlns="" xmlns:a16="http://schemas.microsoft.com/office/drawing/2014/main" val="10006"/>
                   </a:ext>
                 </a:extLst>
               </a:tr>
@@ -10257,17 +11116,6 @@
                         </a:lnSpc>
                         <a:buNone/>
                       </a:pPr>
-                      <a:r>
-                        <a:rPr lang="en-US" sz="1400" dirty="0">
-                          <a:solidFill>
-                            <a:srgbClr val="1B2A41"/>
-                          </a:solidFill>
-                          <a:latin typeface="Helvetica" pitchFamily="34" charset="0"/>
-                          <a:ea typeface="Helvetica" pitchFamily="34" charset="-122"/>
-                          <a:cs typeface="Helvetica" pitchFamily="34" charset="-120"/>
-                        </a:rPr>
-                        <a:t>Handle arguments and errors</a:t>
-                      </a:r>
                       <a:endParaRPr lang="en-US" sz="1400" dirty="0">
                         <a:latin typeface="Helvetica" charset="0"/>
                         <a:ea typeface="Helvetica" charset="0"/>
@@ -10316,7 +11164,7 @@
                 </a:tc>
                 <a:extLst>
                   <a:ext uri="{0D108BD9-81ED-4DB2-BD59-A6C34878D82A}">
-                    <a16:rowId xmlns:a16="http://schemas.microsoft.com/office/drawing/2014/main" val="10007"/>
+                    <a16:rowId xmlns="" xmlns:a16="http://schemas.microsoft.com/office/drawing/2014/main" val="10007"/>
                   </a:ext>
                 </a:extLst>
               </a:tr>
@@ -10412,11 +11260,778 @@
           </a:p>
         </p:txBody>
       </p:sp>
+      <p:sp>
+        <p:nvSpPr>
+          <p:cNvPr id="6" name="TextBox 5"/>
+          <p:cNvSpPr txBox="1"/>
+          <p:nvPr/>
+        </p:nvSpPr>
+        <p:spPr>
+          <a:xfrm>
+            <a:off x="6162130" y="1895947"/>
+            <a:ext cx="4696370" cy="307777"/>
+          </a:xfrm>
+          <a:prstGeom prst="rect">
+            <a:avLst/>
+          </a:prstGeom>
+          <a:noFill/>
+        </p:spPr>
+        <p:txBody>
+          <a:bodyPr wrap="square" rtlCol="0">
+            <a:spAutoFit/>
+          </a:bodyPr>
+          <a:lstStyle/>
+          <a:p>
+            <a:r>
+              <a:rPr lang="en-US" sz="1400" dirty="0">
+                <a:solidFill>
+                  <a:srgbClr val="1B2A41"/>
+                </a:solidFill>
+                <a:latin typeface="Helvetica" pitchFamily="34" charset="0"/>
+                <a:ea typeface="Helvetica" pitchFamily="34" charset="-122"/>
+                <a:cs typeface="Helvetica" pitchFamily="34" charset="-120"/>
+              </a:rPr>
+              <a:t>Open the CSV, return header and rows</a:t>
+            </a:r>
+            <a:endParaRPr lang="en-US" sz="1400" dirty="0"/>
+          </a:p>
+        </p:txBody>
+      </p:sp>
+      <p:sp>
+        <p:nvSpPr>
+          <p:cNvPr id="7" name="TextBox 6"/>
+          <p:cNvSpPr txBox="1"/>
+          <p:nvPr/>
+        </p:nvSpPr>
+        <p:spPr>
+          <a:xfrm>
+            <a:off x="6162130" y="2259911"/>
+            <a:ext cx="4696370" cy="325538"/>
+          </a:xfrm>
+          <a:prstGeom prst="rect">
+            <a:avLst/>
+          </a:prstGeom>
+          <a:noFill/>
+        </p:spPr>
+        <p:txBody>
+          <a:bodyPr wrap="square" rtlCol="0">
+            <a:spAutoFit/>
+          </a:bodyPr>
+          <a:lstStyle/>
+          <a:p>
+            <a:pPr>
+              <a:lnSpc>
+                <a:spcPts val="1960"/>
+              </a:lnSpc>
+            </a:pPr>
+            <a:r>
+              <a:rPr lang="en-US" sz="1400" dirty="0">
+                <a:solidFill>
+                  <a:srgbClr val="1B2A41"/>
+                </a:solidFill>
+                <a:latin typeface="Helvetica" pitchFamily="34" charset="0"/>
+                <a:ea typeface="Helvetica" pitchFamily="34" charset="-122"/>
+                <a:cs typeface="Helvetica" pitchFamily="34" charset="-120"/>
+              </a:rPr>
+              <a:t>True for blank, N/A, ?, null and similar</a:t>
+            </a:r>
+            <a:endParaRPr lang="en-US" sz="1400" dirty="0">
+              <a:latin typeface="Helvetica" charset="0"/>
+              <a:ea typeface="Helvetica" charset="0"/>
+              <a:cs typeface="Helvetica" charset="0"/>
+            </a:endParaRPr>
+          </a:p>
+        </p:txBody>
+      </p:sp>
+      <p:sp>
+        <p:nvSpPr>
+          <p:cNvPr id="8" name="TextBox 7"/>
+          <p:cNvSpPr txBox="1"/>
+          <p:nvPr/>
+        </p:nvSpPr>
+        <p:spPr>
+          <a:xfrm>
+            <a:off x="6162130" y="2641636"/>
+            <a:ext cx="4696370" cy="325538"/>
+          </a:xfrm>
+          <a:prstGeom prst="rect">
+            <a:avLst/>
+          </a:prstGeom>
+          <a:noFill/>
+        </p:spPr>
+        <p:txBody>
+          <a:bodyPr wrap="square" rtlCol="0">
+            <a:spAutoFit/>
+          </a:bodyPr>
+          <a:lstStyle/>
+          <a:p>
+            <a:pPr>
+              <a:lnSpc>
+                <a:spcPts val="1960"/>
+              </a:lnSpc>
+            </a:pPr>
+            <a:r>
+              <a:rPr lang="en-US" sz="1400" dirty="0">
+                <a:solidFill>
+                  <a:srgbClr val="1B2A41"/>
+                </a:solidFill>
+                <a:latin typeface="Helvetica" pitchFamily="34" charset="0"/>
+                <a:ea typeface="Helvetica" pitchFamily="34" charset="-122"/>
+                <a:cs typeface="Helvetica" pitchFamily="34" charset="-120"/>
+              </a:rPr>
+              <a:t>Decide </a:t>
+            </a:r>
+            <a:r>
+              <a:rPr lang="en-US" sz="1400" dirty="0" err="1">
+                <a:solidFill>
+                  <a:srgbClr val="1B2A41"/>
+                </a:solidFill>
+                <a:latin typeface="Helvetica" pitchFamily="34" charset="0"/>
+                <a:ea typeface="Helvetica" pitchFamily="34" charset="-122"/>
+                <a:cs typeface="Helvetica" pitchFamily="34" charset="-120"/>
+              </a:rPr>
+              <a:t>int</a:t>
+            </a:r>
+            <a:r>
+              <a:rPr lang="en-US" sz="1400" dirty="0">
+                <a:solidFill>
+                  <a:srgbClr val="1B2A41"/>
+                </a:solidFill>
+                <a:latin typeface="Helvetica" pitchFamily="34" charset="0"/>
+                <a:ea typeface="Helvetica" pitchFamily="34" charset="-122"/>
+                <a:cs typeface="Helvetica" pitchFamily="34" charset="-120"/>
+              </a:rPr>
+              <a:t>, float, </a:t>
+            </a:r>
+            <a:r>
+              <a:rPr lang="en-US" sz="1400" dirty="0" err="1">
+                <a:solidFill>
+                  <a:srgbClr val="1B2A41"/>
+                </a:solidFill>
+                <a:latin typeface="Helvetica" pitchFamily="34" charset="0"/>
+                <a:ea typeface="Helvetica" pitchFamily="34" charset="-122"/>
+                <a:cs typeface="Helvetica" pitchFamily="34" charset="-120"/>
+              </a:rPr>
+              <a:t>str</a:t>
+            </a:r>
+            <a:r>
+              <a:rPr lang="en-US" sz="1400" dirty="0">
+                <a:solidFill>
+                  <a:srgbClr val="1B2A41"/>
+                </a:solidFill>
+                <a:latin typeface="Helvetica" pitchFamily="34" charset="0"/>
+                <a:ea typeface="Helvetica" pitchFamily="34" charset="-122"/>
+                <a:cs typeface="Helvetica" pitchFamily="34" charset="-120"/>
+              </a:rPr>
+              <a:t> or empty for one column</a:t>
+            </a:r>
+            <a:endParaRPr lang="en-US" sz="1400" dirty="0">
+              <a:latin typeface="Helvetica" charset="0"/>
+              <a:ea typeface="Helvetica" charset="0"/>
+              <a:cs typeface="Helvetica" charset="0"/>
+            </a:endParaRPr>
+          </a:p>
+        </p:txBody>
+      </p:sp>
+      <p:sp>
+        <p:nvSpPr>
+          <p:cNvPr id="9" name="TextBox 8"/>
+          <p:cNvSpPr txBox="1"/>
+          <p:nvPr/>
+        </p:nvSpPr>
+        <p:spPr>
+          <a:xfrm>
+            <a:off x="6162130" y="3063806"/>
+            <a:ext cx="4696370" cy="325538"/>
+          </a:xfrm>
+          <a:prstGeom prst="rect">
+            <a:avLst/>
+          </a:prstGeom>
+          <a:noFill/>
+        </p:spPr>
+        <p:txBody>
+          <a:bodyPr wrap="square" rtlCol="0">
+            <a:spAutoFit/>
+          </a:bodyPr>
+          <a:lstStyle/>
+          <a:p>
+            <a:pPr>
+              <a:lnSpc>
+                <a:spcPts val="1960"/>
+              </a:lnSpc>
+            </a:pPr>
+            <a:r>
+              <a:rPr lang="en-US" sz="1400" dirty="0">
+                <a:solidFill>
+                  <a:srgbClr val="1B2A41"/>
+                </a:solidFill>
+                <a:latin typeface="Helvetica" pitchFamily="34" charset="0"/>
+                <a:ea typeface="Helvetica" pitchFamily="34" charset="-122"/>
+                <a:cs typeface="Helvetica" pitchFamily="34" charset="-120"/>
+              </a:rPr>
+              <a:t>Turn one column into a summary</a:t>
+            </a:r>
+            <a:endParaRPr lang="en-US" sz="1400" dirty="0">
+              <a:latin typeface="Helvetica" charset="0"/>
+              <a:ea typeface="Helvetica" charset="0"/>
+              <a:cs typeface="Helvetica" charset="0"/>
+            </a:endParaRPr>
+          </a:p>
+        </p:txBody>
+      </p:sp>
+      <p:sp>
+        <p:nvSpPr>
+          <p:cNvPr id="10" name="TextBox 9"/>
+          <p:cNvSpPr txBox="1"/>
+          <p:nvPr/>
+        </p:nvSpPr>
+        <p:spPr>
+          <a:xfrm>
+            <a:off x="6162130" y="3443055"/>
+            <a:ext cx="4696370" cy="325538"/>
+          </a:xfrm>
+          <a:prstGeom prst="rect">
+            <a:avLst/>
+          </a:prstGeom>
+          <a:noFill/>
+        </p:spPr>
+        <p:txBody>
+          <a:bodyPr wrap="square" rtlCol="0">
+            <a:spAutoFit/>
+          </a:bodyPr>
+          <a:lstStyle/>
+          <a:p>
+            <a:pPr>
+              <a:lnSpc>
+                <a:spcPts val="1960"/>
+              </a:lnSpc>
+            </a:pPr>
+            <a:r>
+              <a:rPr lang="en-US" sz="1400" dirty="0">
+                <a:solidFill>
+                  <a:srgbClr val="1B2A41"/>
+                </a:solidFill>
+                <a:latin typeface="Helvetica" pitchFamily="34" charset="0"/>
+                <a:ea typeface="Helvetica" pitchFamily="34" charset="-122"/>
+                <a:cs typeface="Helvetica" pitchFamily="34" charset="-120"/>
+              </a:rPr>
+              <a:t>List columns that hold identical values</a:t>
+            </a:r>
+            <a:endParaRPr lang="en-US" sz="1400" dirty="0">
+              <a:latin typeface="Helvetica" charset="0"/>
+              <a:ea typeface="Helvetica" charset="0"/>
+              <a:cs typeface="Helvetica" charset="0"/>
+            </a:endParaRPr>
+          </a:p>
+        </p:txBody>
+      </p:sp>
+      <p:sp>
+        <p:nvSpPr>
+          <p:cNvPr id="11" name="TextBox 10"/>
+          <p:cNvSpPr txBox="1"/>
+          <p:nvPr/>
+        </p:nvSpPr>
+        <p:spPr>
+          <a:xfrm>
+            <a:off x="6162130" y="3810532"/>
+            <a:ext cx="4696370" cy="325538"/>
+          </a:xfrm>
+          <a:prstGeom prst="rect">
+            <a:avLst/>
+          </a:prstGeom>
+          <a:noFill/>
+        </p:spPr>
+        <p:txBody>
+          <a:bodyPr wrap="square" rtlCol="0">
+            <a:spAutoFit/>
+          </a:bodyPr>
+          <a:lstStyle/>
+          <a:p>
+            <a:pPr>
+              <a:lnSpc>
+                <a:spcPts val="1960"/>
+              </a:lnSpc>
+            </a:pPr>
+            <a:r>
+              <a:rPr lang="en-US" sz="1400" dirty="0">
+                <a:solidFill>
+                  <a:srgbClr val="1B2A41"/>
+                </a:solidFill>
+                <a:latin typeface="Helvetica" pitchFamily="34" charset="0"/>
+                <a:ea typeface="Helvetica" pitchFamily="34" charset="-122"/>
+                <a:cs typeface="Helvetica" pitchFamily="34" charset="-120"/>
+              </a:rPr>
+              <a:t>Print everything for one file</a:t>
+            </a:r>
+            <a:endParaRPr lang="en-US" sz="1400" dirty="0">
+              <a:latin typeface="Helvetica" charset="0"/>
+              <a:ea typeface="Helvetica" charset="0"/>
+              <a:cs typeface="Helvetica" charset="0"/>
+            </a:endParaRPr>
+          </a:p>
+        </p:txBody>
+      </p:sp>
+      <p:sp>
+        <p:nvSpPr>
+          <p:cNvPr id="12" name="TextBox 11"/>
+          <p:cNvSpPr txBox="1"/>
+          <p:nvPr/>
+        </p:nvSpPr>
+        <p:spPr>
+          <a:xfrm>
+            <a:off x="6162130" y="4204945"/>
+            <a:ext cx="4696370" cy="325538"/>
+          </a:xfrm>
+          <a:prstGeom prst="rect">
+            <a:avLst/>
+          </a:prstGeom>
+          <a:noFill/>
+        </p:spPr>
+        <p:txBody>
+          <a:bodyPr wrap="square" rtlCol="0">
+            <a:spAutoFit/>
+          </a:bodyPr>
+          <a:lstStyle/>
+          <a:p>
+            <a:pPr>
+              <a:lnSpc>
+                <a:spcPts val="1960"/>
+              </a:lnSpc>
+            </a:pPr>
+            <a:r>
+              <a:rPr lang="en-US" sz="1400" dirty="0">
+                <a:solidFill>
+                  <a:srgbClr val="1B2A41"/>
+                </a:solidFill>
+                <a:latin typeface="Helvetica" pitchFamily="34" charset="0"/>
+                <a:ea typeface="Helvetica" pitchFamily="34" charset="-122"/>
+                <a:cs typeface="Helvetica" pitchFamily="34" charset="-120"/>
+              </a:rPr>
+              <a:t>Handle arguments and errors</a:t>
+            </a:r>
+            <a:endParaRPr lang="en-US" sz="1400" dirty="0">
+              <a:latin typeface="Helvetica" charset="0"/>
+              <a:ea typeface="Helvetica" charset="0"/>
+              <a:cs typeface="Helvetica" charset="0"/>
+            </a:endParaRPr>
+          </a:p>
+        </p:txBody>
+      </p:sp>
     </p:spTree>
   </p:cSld>
   <p:clrMapOvr>
     <a:masterClrMapping/>
   </p:clrMapOvr>
+  <p:timing>
+    <p:tnLst>
+      <p:par>
+        <p:cTn id="1" dur="indefinite" restart="never" nodeType="tmRoot">
+          <p:childTnLst>
+            <p:seq concurrent="1" nextAc="seek">
+              <p:cTn id="2" dur="indefinite" nodeType="mainSeq">
+                <p:childTnLst>
+                  <p:par>
+                    <p:cTn id="3" fill="hold">
+                      <p:stCondLst>
+                        <p:cond delay="indefinite"/>
+                      </p:stCondLst>
+                      <p:childTnLst>
+                        <p:par>
+                          <p:cTn id="4" fill="hold">
+                            <p:stCondLst>
+                              <p:cond delay="0"/>
+                            </p:stCondLst>
+                            <p:childTnLst>
+                              <p:par>
+                                <p:cTn id="5" presetID="16" presetClass="entr" presetSubtype="21" fill="hold" grpId="0" nodeType="clickEffect">
+                                  <p:stCondLst>
+                                    <p:cond delay="0"/>
+                                  </p:stCondLst>
+                                  <p:childTnLst>
+                                    <p:set>
+                                      <p:cBhvr>
+                                        <p:cTn id="6" dur="1" fill="hold">
+                                          <p:stCondLst>
+                                            <p:cond delay="0"/>
+                                          </p:stCondLst>
+                                        </p:cTn>
+                                        <p:tgtEl>
+                                          <p:spTgt spid="6"/>
+                                        </p:tgtEl>
+                                        <p:attrNameLst>
+                                          <p:attrName>style.visibility</p:attrName>
+                                        </p:attrNameLst>
+                                      </p:cBhvr>
+                                      <p:to>
+                                        <p:strVal val="visible"/>
+                                      </p:to>
+                                    </p:set>
+                                    <p:animEffect transition="in" filter="barn(inVertical)">
+                                      <p:cBhvr>
+                                        <p:cTn id="7" dur="500"/>
+                                        <p:tgtEl>
+                                          <p:spTgt spid="6"/>
+                                        </p:tgtEl>
+                                      </p:cBhvr>
+                                    </p:animEffect>
+                                  </p:childTnLst>
+                                </p:cTn>
+                              </p:par>
+                            </p:childTnLst>
+                          </p:cTn>
+                        </p:par>
+                      </p:childTnLst>
+                    </p:cTn>
+                  </p:par>
+                  <p:par>
+                    <p:cTn id="8" fill="hold">
+                      <p:stCondLst>
+                        <p:cond delay="indefinite"/>
+                      </p:stCondLst>
+                      <p:childTnLst>
+                        <p:par>
+                          <p:cTn id="9" fill="hold">
+                            <p:stCondLst>
+                              <p:cond delay="0"/>
+                            </p:stCondLst>
+                            <p:childTnLst>
+                              <p:par>
+                                <p:cTn id="10" presetID="16" presetClass="entr" presetSubtype="21" fill="hold" grpId="0" nodeType="clickEffect">
+                                  <p:stCondLst>
+                                    <p:cond delay="0"/>
+                                  </p:stCondLst>
+                                  <p:childTnLst>
+                                    <p:set>
+                                      <p:cBhvr>
+                                        <p:cTn id="11" dur="1" fill="hold">
+                                          <p:stCondLst>
+                                            <p:cond delay="0"/>
+                                          </p:stCondLst>
+                                        </p:cTn>
+                                        <p:tgtEl>
+                                          <p:spTgt spid="7"/>
+                                        </p:tgtEl>
+                                        <p:attrNameLst>
+                                          <p:attrName>style.visibility</p:attrName>
+                                        </p:attrNameLst>
+                                      </p:cBhvr>
+                                      <p:to>
+                                        <p:strVal val="visible"/>
+                                      </p:to>
+                                    </p:set>
+                                    <p:animEffect transition="in" filter="barn(inVertical)">
+                                      <p:cBhvr>
+                                        <p:cTn id="12" dur="500"/>
+                                        <p:tgtEl>
+                                          <p:spTgt spid="7"/>
+                                        </p:tgtEl>
+                                      </p:cBhvr>
+                                    </p:animEffect>
+                                  </p:childTnLst>
+                                </p:cTn>
+                              </p:par>
+                            </p:childTnLst>
+                          </p:cTn>
+                        </p:par>
+                      </p:childTnLst>
+                    </p:cTn>
+                  </p:par>
+                  <p:par>
+                    <p:cTn id="13" fill="hold">
+                      <p:stCondLst>
+                        <p:cond delay="indefinite"/>
+                      </p:stCondLst>
+                      <p:childTnLst>
+                        <p:par>
+                          <p:cTn id="14" fill="hold">
+                            <p:stCondLst>
+                              <p:cond delay="0"/>
+                            </p:stCondLst>
+                            <p:childTnLst>
+                              <p:par>
+                                <p:cTn id="15" presetID="16" presetClass="entr" presetSubtype="21" fill="hold" grpId="0" nodeType="clickEffect">
+                                  <p:stCondLst>
+                                    <p:cond delay="0"/>
+                                  </p:stCondLst>
+                                  <p:childTnLst>
+                                    <p:set>
+                                      <p:cBhvr>
+                                        <p:cTn id="16" dur="1" fill="hold">
+                                          <p:stCondLst>
+                                            <p:cond delay="0"/>
+                                          </p:stCondLst>
+                                        </p:cTn>
+                                        <p:tgtEl>
+                                          <p:spTgt spid="8"/>
+                                        </p:tgtEl>
+                                        <p:attrNameLst>
+                                          <p:attrName>style.visibility</p:attrName>
+                                        </p:attrNameLst>
+                                      </p:cBhvr>
+                                      <p:to>
+                                        <p:strVal val="visible"/>
+                                      </p:to>
+                                    </p:set>
+                                    <p:animEffect transition="in" filter="barn(inVertical)">
+                                      <p:cBhvr>
+                                        <p:cTn id="17" dur="500"/>
+                                        <p:tgtEl>
+                                          <p:spTgt spid="8"/>
+                                        </p:tgtEl>
+                                      </p:cBhvr>
+                                    </p:animEffect>
+                                  </p:childTnLst>
+                                </p:cTn>
+                              </p:par>
+                            </p:childTnLst>
+                          </p:cTn>
+                        </p:par>
+                      </p:childTnLst>
+                    </p:cTn>
+                  </p:par>
+                  <p:par>
+                    <p:cTn id="18" fill="hold">
+                      <p:stCondLst>
+                        <p:cond delay="indefinite"/>
+                      </p:stCondLst>
+                      <p:childTnLst>
+                        <p:par>
+                          <p:cTn id="19" fill="hold">
+                            <p:stCondLst>
+                              <p:cond delay="0"/>
+                            </p:stCondLst>
+                            <p:childTnLst>
+                              <p:par>
+                                <p:cTn id="20" presetID="16" presetClass="entr" presetSubtype="21" fill="hold" grpId="0" nodeType="clickEffect">
+                                  <p:stCondLst>
+                                    <p:cond delay="0"/>
+                                  </p:stCondLst>
+                                  <p:childTnLst>
+                                    <p:set>
+                                      <p:cBhvr>
+                                        <p:cTn id="21" dur="1" fill="hold">
+                                          <p:stCondLst>
+                                            <p:cond delay="0"/>
+                                          </p:stCondLst>
+                                        </p:cTn>
+                                        <p:tgtEl>
+                                          <p:spTgt spid="9"/>
+                                        </p:tgtEl>
+                                        <p:attrNameLst>
+                                          <p:attrName>style.visibility</p:attrName>
+                                        </p:attrNameLst>
+                                      </p:cBhvr>
+                                      <p:to>
+                                        <p:strVal val="visible"/>
+                                      </p:to>
+                                    </p:set>
+                                    <p:animEffect transition="in" filter="barn(inVertical)">
+                                      <p:cBhvr>
+                                        <p:cTn id="22" dur="500"/>
+                                        <p:tgtEl>
+                                          <p:spTgt spid="9"/>
+                                        </p:tgtEl>
+                                      </p:cBhvr>
+                                    </p:animEffect>
+                                  </p:childTnLst>
+                                </p:cTn>
+                              </p:par>
+                            </p:childTnLst>
+                          </p:cTn>
+                        </p:par>
+                      </p:childTnLst>
+                    </p:cTn>
+                  </p:par>
+                  <p:par>
+                    <p:cTn id="23" fill="hold">
+                      <p:stCondLst>
+                        <p:cond delay="indefinite"/>
+                      </p:stCondLst>
+                      <p:childTnLst>
+                        <p:par>
+                          <p:cTn id="24" fill="hold">
+                            <p:stCondLst>
+                              <p:cond delay="0"/>
+                            </p:stCondLst>
+                            <p:childTnLst>
+                              <p:par>
+                                <p:cTn id="25" presetID="16" presetClass="entr" presetSubtype="21" fill="hold" grpId="0" nodeType="clickEffect">
+                                  <p:stCondLst>
+                                    <p:cond delay="0"/>
+                                  </p:stCondLst>
+                                  <p:childTnLst>
+                                    <p:set>
+                                      <p:cBhvr>
+                                        <p:cTn id="26" dur="1" fill="hold">
+                                          <p:stCondLst>
+                                            <p:cond delay="0"/>
+                                          </p:stCondLst>
+                                        </p:cTn>
+                                        <p:tgtEl>
+                                          <p:spTgt spid="10"/>
+                                        </p:tgtEl>
+                                        <p:attrNameLst>
+                                          <p:attrName>style.visibility</p:attrName>
+                                        </p:attrNameLst>
+                                      </p:cBhvr>
+                                      <p:to>
+                                        <p:strVal val="visible"/>
+                                      </p:to>
+                                    </p:set>
+                                    <p:animEffect transition="in" filter="barn(inVertical)">
+                                      <p:cBhvr>
+                                        <p:cTn id="27" dur="500"/>
+                                        <p:tgtEl>
+                                          <p:spTgt spid="10"/>
+                                        </p:tgtEl>
+                                      </p:cBhvr>
+                                    </p:animEffect>
+                                  </p:childTnLst>
+                                </p:cTn>
+                              </p:par>
+                            </p:childTnLst>
+                          </p:cTn>
+                        </p:par>
+                      </p:childTnLst>
+                    </p:cTn>
+                  </p:par>
+                  <p:par>
+                    <p:cTn id="28" fill="hold">
+                      <p:stCondLst>
+                        <p:cond delay="indefinite"/>
+                      </p:stCondLst>
+                      <p:childTnLst>
+                        <p:par>
+                          <p:cTn id="29" fill="hold">
+                            <p:stCondLst>
+                              <p:cond delay="0"/>
+                            </p:stCondLst>
+                            <p:childTnLst>
+                              <p:par>
+                                <p:cTn id="30" presetID="16" presetClass="entr" presetSubtype="21" fill="hold" grpId="0" nodeType="clickEffect">
+                                  <p:stCondLst>
+                                    <p:cond delay="0"/>
+                                  </p:stCondLst>
+                                  <p:childTnLst>
+                                    <p:set>
+                                      <p:cBhvr>
+                                        <p:cTn id="31" dur="1" fill="hold">
+                                          <p:stCondLst>
+                                            <p:cond delay="0"/>
+                                          </p:stCondLst>
+                                        </p:cTn>
+                                        <p:tgtEl>
+                                          <p:spTgt spid="11"/>
+                                        </p:tgtEl>
+                                        <p:attrNameLst>
+                                          <p:attrName>style.visibility</p:attrName>
+                                        </p:attrNameLst>
+                                      </p:cBhvr>
+                                      <p:to>
+                                        <p:strVal val="visible"/>
+                                      </p:to>
+                                    </p:set>
+                                    <p:animEffect transition="in" filter="barn(inVertical)">
+                                      <p:cBhvr>
+                                        <p:cTn id="32" dur="500"/>
+                                        <p:tgtEl>
+                                          <p:spTgt spid="11"/>
+                                        </p:tgtEl>
+                                      </p:cBhvr>
+                                    </p:animEffect>
+                                  </p:childTnLst>
+                                </p:cTn>
+                              </p:par>
+                            </p:childTnLst>
+                          </p:cTn>
+                        </p:par>
+                      </p:childTnLst>
+                    </p:cTn>
+                  </p:par>
+                  <p:par>
+                    <p:cTn id="33" fill="hold">
+                      <p:stCondLst>
+                        <p:cond delay="indefinite"/>
+                      </p:stCondLst>
+                      <p:childTnLst>
+                        <p:par>
+                          <p:cTn id="34" fill="hold">
+                            <p:stCondLst>
+                              <p:cond delay="0"/>
+                            </p:stCondLst>
+                            <p:childTnLst>
+                              <p:par>
+                                <p:cTn id="35" presetID="16" presetClass="entr" presetSubtype="21" fill="hold" grpId="0" nodeType="clickEffect">
+                                  <p:stCondLst>
+                                    <p:cond delay="0"/>
+                                  </p:stCondLst>
+                                  <p:childTnLst>
+                                    <p:set>
+                                      <p:cBhvr>
+                                        <p:cTn id="36" dur="1" fill="hold">
+                                          <p:stCondLst>
+                                            <p:cond delay="0"/>
+                                          </p:stCondLst>
+                                        </p:cTn>
+                                        <p:tgtEl>
+                                          <p:spTgt spid="12"/>
+                                        </p:tgtEl>
+                                        <p:attrNameLst>
+                                          <p:attrName>style.visibility</p:attrName>
+                                        </p:attrNameLst>
+                                      </p:cBhvr>
+                                      <p:to>
+                                        <p:strVal val="visible"/>
+                                      </p:to>
+                                    </p:set>
+                                    <p:animEffect transition="in" filter="barn(inVertical)">
+                                      <p:cBhvr>
+                                        <p:cTn id="37" dur="500"/>
+                                        <p:tgtEl>
+                                          <p:spTgt spid="12"/>
+                                        </p:tgtEl>
+                                      </p:cBhvr>
+                                    </p:animEffect>
+                                  </p:childTnLst>
+                                </p:cTn>
+                              </p:par>
+                            </p:childTnLst>
+                          </p:cTn>
+                        </p:par>
+                      </p:childTnLst>
+                    </p:cTn>
+                  </p:par>
+                </p:childTnLst>
+              </p:cTn>
+              <p:prevCondLst>
+                <p:cond evt="onPrev" delay="0">
+                  <p:tgtEl>
+                    <p:sldTgt/>
+                  </p:tgtEl>
+                </p:cond>
+              </p:prevCondLst>
+              <p:nextCondLst>
+                <p:cond evt="onNext" delay="0">
+                  <p:tgtEl>
+                    <p:sldTgt/>
+                  </p:tgtEl>
+                </p:cond>
+              </p:nextCondLst>
+            </p:seq>
+          </p:childTnLst>
+        </p:cTn>
+      </p:par>
+    </p:tnLst>
+    <p:bldLst>
+      <p:bldP spid="6" grpId="0"/>
+      <p:bldP spid="7" grpId="0"/>
+      <p:bldP spid="8" grpId="0"/>
+      <p:bldP spid="9" grpId="0"/>
+      <p:bldP spid="10" grpId="0"/>
+      <p:bldP spid="11" grpId="0"/>
+      <p:bldP spid="12" grpId="0"/>
+    </p:bldLst>
+  </p:timing>
 </p:sld>
 </file>
 
@@ -12334,6 +13949,13 @@
   <p:clrMapOvr>
     <a:masterClrMapping/>
   </p:clrMapOvr>
+  <p:timing>
+    <p:tnLst>
+      <p:par>
+        <p:cTn id="1" dur="indefinite" restart="never" nodeType="tmRoot"/>
+      </p:par>
+    </p:tnLst>
+  </p:timing>
 </p:sld>
 </file>
 
@@ -14158,6 +15780,13 @@
   <p:clrMapOvr>
     <a:masterClrMapping/>
   </p:clrMapOvr>
+  <p:timing>
+    <p:tnLst>
+      <p:par>
+        <p:cTn id="1" dur="indefinite" restart="never" nodeType="tmRoot"/>
+      </p:par>
+    </p:tnLst>
+  </p:timing>
 </p:sld>
 </file>
 
@@ -14273,17 +15902,20 @@
               <a:buNone/>
             </a:pPr>
             <a:r>
-              <a:rPr lang="en-US" sz="850" dirty="0">
+              <a:rPr lang="en-US" sz="1400" dirty="0">
                 <a:solidFill>
                   <a:srgbClr val="1B2A41"/>
                 </a:solidFill>
-                <a:latin typeface="Courier New" pitchFamily="49" charset="0"/>
-                <a:ea typeface="Courier New" pitchFamily="49" charset="-122"/>
-                <a:cs typeface="Courier New" pitchFamily="49" charset="-120"/>
+                <a:latin typeface="Courier New" panose="02070309020205020404" pitchFamily="49" charset="0"/>
+                <a:ea typeface="Courier New" pitchFamily="49" charset="-122"/>
+                <a:cs typeface="Courier New" panose="02070309020205020404" pitchFamily="49" charset="0"/>
               </a:rPr>
               <a:t>File: orders.csv</a:t>
             </a:r>
-            <a:endParaRPr lang="en-US" sz="850" dirty="0"/>
+            <a:endParaRPr lang="en-US" sz="1400" dirty="0">
+              <a:latin typeface="Courier New" panose="02070309020205020404" pitchFamily="49" charset="0"/>
+              <a:cs typeface="Courier New" panose="02070309020205020404" pitchFamily="49" charset="0"/>
+            </a:endParaRPr>
           </a:p>
           <a:p>
             <a:pPr marL="0" indent="0" algn="l">
@@ -14293,17 +15925,20 @@
               <a:buNone/>
             </a:pPr>
             <a:r>
-              <a:rPr lang="en-US" sz="850" dirty="0">
+              <a:rPr lang="en-US" sz="1400" dirty="0">
                 <a:solidFill>
                   <a:srgbClr val="1B2A41"/>
                 </a:solidFill>
                 <a:latin typeface="Courier New" pitchFamily="49" charset="0"/>
                 <a:ea typeface="Courier New" pitchFamily="49" charset="-122"/>
-                <a:cs typeface="Courier New" pitchFamily="49" charset="-120"/>
+                <a:cs typeface="Courier New" panose="02070309020205020404" pitchFamily="49" charset="0"/>
               </a:rPr>
               <a:t>Rows: 200  Columns: 10</a:t>
             </a:r>
-            <a:endParaRPr lang="en-US" sz="850" dirty="0"/>
+            <a:endParaRPr lang="en-US" sz="1400" dirty="0">
+              <a:latin typeface="Courier New" panose="02070309020205020404" pitchFamily="49" charset="0"/>
+              <a:cs typeface="Courier New" panose="02070309020205020404" pitchFamily="49" charset="0"/>
+            </a:endParaRPr>
           </a:p>
           <a:p>
             <a:pPr marL="0" indent="0" algn="l">
@@ -14313,17 +15948,20 @@
               <a:buNone/>
             </a:pPr>
             <a:r>
-              <a:rPr lang="en-US" sz="850" dirty="0">
+              <a:rPr lang="en-US" sz="1400" dirty="0">
                 <a:solidFill>
                   <a:srgbClr val="1B2A41"/>
                 </a:solidFill>
                 <a:latin typeface="Courier New" pitchFamily="49" charset="0"/>
                 <a:ea typeface="Courier New" pitchFamily="49" charset="-122"/>
-                <a:cs typeface="Courier New" pitchFamily="49" charset="-120"/>
+                <a:cs typeface="Courier New" panose="02070309020205020404" pitchFamily="49" charset="0"/>
               </a:rPr>
               <a:t>Malformed rows: 2</a:t>
             </a:r>
-            <a:endParaRPr lang="en-US" sz="850" dirty="0"/>
+            <a:endParaRPr lang="en-US" sz="1400" dirty="0">
+              <a:latin typeface="Courier New" panose="02070309020205020404" pitchFamily="49" charset="0"/>
+              <a:cs typeface="Courier New" panose="02070309020205020404" pitchFamily="49" charset="0"/>
+            </a:endParaRPr>
           </a:p>
           <a:p>
             <a:pPr marL="0" indent="0" algn="l">
@@ -14333,17 +15971,20 @@
               <a:buNone/>
             </a:pPr>
             <a:r>
-              <a:rPr lang="en-US" sz="850" dirty="0">
+              <a:rPr lang="en-US" sz="1400" dirty="0">
                 <a:solidFill>
                   <a:srgbClr val="1B2A41"/>
                 </a:solidFill>
                 <a:latin typeface="Courier New" pitchFamily="49" charset="0"/>
                 <a:ea typeface="Courier New" pitchFamily="49" charset="-122"/>
-                <a:cs typeface="Courier New" pitchFamily="49" charset="-120"/>
+                <a:cs typeface="Courier New" panose="02070309020205020404" pitchFamily="49" charset="0"/>
               </a:rPr>
               <a:t>- order_id: int, missing=0, unique=200, min=1001, max=1200, mean=1100.50, median=1100.5</a:t>
             </a:r>
-            <a:endParaRPr lang="en-US" sz="850" dirty="0"/>
+            <a:endParaRPr lang="en-US" sz="1400" dirty="0">
+              <a:latin typeface="Courier New" panose="02070309020205020404" pitchFamily="49" charset="0"/>
+              <a:cs typeface="Courier New" panose="02070309020205020404" pitchFamily="49" charset="0"/>
+            </a:endParaRPr>
           </a:p>
           <a:p>
             <a:pPr marL="0" indent="0" algn="l">
@@ -14353,17 +15994,20 @@
               <a:buNone/>
             </a:pPr>
             <a:r>
-              <a:rPr lang="en-US" sz="850" dirty="0">
+              <a:rPr lang="en-US" sz="1400" dirty="0">
                 <a:solidFill>
                   <a:srgbClr val="1B2A41"/>
                 </a:solidFill>
                 <a:latin typeface="Courier New" pitchFamily="49" charset="0"/>
                 <a:ea typeface="Courier New" pitchFamily="49" charset="-122"/>
-                <a:cs typeface="Courier New" pitchFamily="49" charset="-120"/>
+                <a:cs typeface="Courier New" panose="02070309020205020404" pitchFamily="49" charset="0"/>
               </a:rPr>
               <a:t>- customer_id: str, missing=0, unique=59</a:t>
             </a:r>
-            <a:endParaRPr lang="en-US" sz="850" dirty="0"/>
+            <a:endParaRPr lang="en-US" sz="1400" dirty="0">
+              <a:latin typeface="Courier New" panose="02070309020205020404" pitchFamily="49" charset="0"/>
+              <a:cs typeface="Courier New" panose="02070309020205020404" pitchFamily="49" charset="0"/>
+            </a:endParaRPr>
           </a:p>
           <a:p>
             <a:pPr marL="0" indent="0" algn="l">
@@ -14373,17 +16017,20 @@
               <a:buNone/>
             </a:pPr>
             <a:r>
-              <a:rPr lang="en-US" sz="850" dirty="0">
+              <a:rPr lang="en-US" sz="1400" dirty="0">
                 <a:solidFill>
                   <a:srgbClr val="1B2A41"/>
                 </a:solidFill>
                 <a:latin typeface="Courier New" pitchFamily="49" charset="0"/>
                 <a:ea typeface="Courier New" pitchFamily="49" charset="-122"/>
-                <a:cs typeface="Courier New" pitchFamily="49" charset="-120"/>
+                <a:cs typeface="Courier New" panose="02070309020205020404" pitchFamily="49" charset="0"/>
               </a:rPr>
               <a:t>- customer_ref: str, missing=0, unique=59</a:t>
             </a:r>
-            <a:endParaRPr lang="en-US" sz="850" dirty="0"/>
+            <a:endParaRPr lang="en-US" sz="1400" dirty="0">
+              <a:latin typeface="Courier New" panose="02070309020205020404" pitchFamily="49" charset="0"/>
+              <a:cs typeface="Courier New" panose="02070309020205020404" pitchFamily="49" charset="0"/>
+            </a:endParaRPr>
           </a:p>
           <a:p>
             <a:pPr marL="0" indent="0" algn="l">
@@ -14393,17 +16040,20 @@
               <a:buNone/>
             </a:pPr>
             <a:r>
-              <a:rPr lang="en-US" sz="850" dirty="0">
+              <a:rPr lang="en-US" sz="1400" dirty="0">
                 <a:solidFill>
                   <a:srgbClr val="1B2A41"/>
                 </a:solidFill>
                 <a:latin typeface="Courier New" pitchFamily="49" charset="0"/>
                 <a:ea typeface="Courier New" pitchFamily="49" charset="-122"/>
-                <a:cs typeface="Courier New" pitchFamily="49" charset="-120"/>
+                <a:cs typeface="Courier New" panose="02070309020205020404" pitchFamily="49" charset="0"/>
               </a:rPr>
               <a:t>- city: str, missing=0, unique=5</a:t>
             </a:r>
-            <a:endParaRPr lang="en-US" sz="850" dirty="0"/>
+            <a:endParaRPr lang="en-US" sz="1400" dirty="0">
+              <a:latin typeface="Courier New" panose="02070309020205020404" pitchFamily="49" charset="0"/>
+              <a:cs typeface="Courier New" panose="02070309020205020404" pitchFamily="49" charset="0"/>
+            </a:endParaRPr>
           </a:p>
           <a:p>
             <a:pPr marL="0" indent="0" algn="l">
@@ -14413,17 +16063,20 @@
               <a:buNone/>
             </a:pPr>
             <a:r>
-              <a:rPr lang="en-US" sz="850" dirty="0">
+              <a:rPr lang="en-US" sz="1400" dirty="0">
                 <a:solidFill>
                   <a:srgbClr val="1B2A41"/>
                 </a:solidFill>
                 <a:latin typeface="Courier New" pitchFamily="49" charset="0"/>
                 <a:ea typeface="Courier New" pitchFamily="49" charset="-122"/>
-                <a:cs typeface="Courier New" pitchFamily="49" charset="-120"/>
+                <a:cs typeface="Courier New" panose="02070309020205020404" pitchFamily="49" charset="0"/>
               </a:rPr>
               <a:t>- category: str, missing=0, unique=4</a:t>
             </a:r>
-            <a:endParaRPr lang="en-US" sz="850" dirty="0"/>
+            <a:endParaRPr lang="en-US" sz="1400" dirty="0">
+              <a:latin typeface="Courier New" panose="02070309020205020404" pitchFamily="49" charset="0"/>
+              <a:cs typeface="Courier New" panose="02070309020205020404" pitchFamily="49" charset="0"/>
+            </a:endParaRPr>
           </a:p>
           <a:p>
             <a:pPr marL="0" indent="0" algn="l">
@@ -14433,17 +16086,20 @@
               <a:buNone/>
             </a:pPr>
             <a:r>
-              <a:rPr lang="en-US" sz="850" dirty="0">
+              <a:rPr lang="en-US" sz="1400" dirty="0">
                 <a:solidFill>
                   <a:srgbClr val="1B2A41"/>
                 </a:solidFill>
                 <a:latin typeface="Courier New" pitchFamily="49" charset="0"/>
                 <a:ea typeface="Courier New" pitchFamily="49" charset="-122"/>
-                <a:cs typeface="Courier New" pitchFamily="49" charset="-120"/>
+                <a:cs typeface="Courier New" panose="02070309020205020404" pitchFamily="49" charset="0"/>
               </a:rPr>
               <a:t>- quantity: str, missing=2, unique=5</a:t>
             </a:r>
-            <a:endParaRPr lang="en-US" sz="850" dirty="0"/>
+            <a:endParaRPr lang="en-US" sz="1400" dirty="0">
+              <a:latin typeface="Courier New" panose="02070309020205020404" pitchFamily="49" charset="0"/>
+              <a:cs typeface="Courier New" panose="02070309020205020404" pitchFamily="49" charset="0"/>
+            </a:endParaRPr>
           </a:p>
           <a:p>
             <a:pPr marL="0" indent="0" algn="l">
@@ -14453,17 +16109,20 @@
               <a:buNone/>
             </a:pPr>
             <a:r>
-              <a:rPr lang="en-US" sz="850" dirty="0">
+              <a:rPr lang="en-US" sz="1400" dirty="0">
                 <a:solidFill>
                   <a:srgbClr val="1B2A41"/>
                 </a:solidFill>
                 <a:latin typeface="Courier New" pitchFamily="49" charset="0"/>
                 <a:ea typeface="Courier New" pitchFamily="49" charset="-122"/>
-                <a:cs typeface="Courier New" pitchFamily="49" charset="-120"/>
+                <a:cs typeface="Courier New" panose="02070309020205020404" pitchFamily="49" charset="0"/>
               </a:rPr>
               <a:t>- unit_price: int, missing=3, unique=100, min=100, max=8850, mean=2680.71, median=2100</a:t>
             </a:r>
-            <a:endParaRPr lang="en-US" sz="850" dirty="0"/>
+            <a:endParaRPr lang="en-US" sz="1400" dirty="0">
+              <a:latin typeface="Courier New" panose="02070309020205020404" pitchFamily="49" charset="0"/>
+              <a:cs typeface="Courier New" panose="02070309020205020404" pitchFamily="49" charset="0"/>
+            </a:endParaRPr>
           </a:p>
           <a:p>
             <a:pPr marL="0" indent="0" algn="l">
@@ -14473,17 +16132,20 @@
               <a:buNone/>
             </a:pPr>
             <a:r>
-              <a:rPr lang="en-US" sz="850" dirty="0">
+              <a:rPr lang="en-US" sz="1400" dirty="0">
                 <a:solidFill>
                   <a:srgbClr val="1B2A41"/>
                 </a:solidFill>
                 <a:latin typeface="Courier New" pitchFamily="49" charset="0"/>
                 <a:ea typeface="Courier New" pitchFamily="49" charset="-122"/>
-                <a:cs typeface="Courier New" pitchFamily="49" charset="-120"/>
+                <a:cs typeface="Courier New" panose="02070309020205020404" pitchFamily="49" charset="0"/>
               </a:rPr>
               <a:t>- order_date: str, missing=5, unique=101</a:t>
             </a:r>
-            <a:endParaRPr lang="en-US" sz="850" dirty="0"/>
+            <a:endParaRPr lang="en-US" sz="1400" dirty="0">
+              <a:latin typeface="Courier New" panose="02070309020205020404" pitchFamily="49" charset="0"/>
+              <a:cs typeface="Courier New" panose="02070309020205020404" pitchFamily="49" charset="0"/>
+            </a:endParaRPr>
           </a:p>
           <a:p>
             <a:pPr marL="0" indent="0" algn="l">
@@ -14493,17 +16155,20 @@
               <a:buNone/>
             </a:pPr>
             <a:r>
-              <a:rPr lang="en-US" sz="850" dirty="0">
+              <a:rPr lang="en-US" sz="1400" dirty="0">
                 <a:solidFill>
                   <a:srgbClr val="1B2A41"/>
                 </a:solidFill>
                 <a:latin typeface="Courier New" pitchFamily="49" charset="0"/>
                 <a:ea typeface="Courier New" pitchFamily="49" charset="-122"/>
-                <a:cs typeface="Courier New" pitchFamily="49" charset="-120"/>
+                <a:cs typeface="Courier New" panose="02070309020205020404" pitchFamily="49" charset="0"/>
               </a:rPr>
               <a:t>- status: str, missing=1, unique=1  [constant]</a:t>
             </a:r>
-            <a:endParaRPr lang="en-US" sz="850" dirty="0"/>
+            <a:endParaRPr lang="en-US" sz="1400" dirty="0">
+              <a:latin typeface="Courier New" panose="02070309020205020404" pitchFamily="49" charset="0"/>
+              <a:cs typeface="Courier New" panose="02070309020205020404" pitchFamily="49" charset="0"/>
+            </a:endParaRPr>
           </a:p>
           <a:p>
             <a:pPr marL="0" indent="0" algn="l">
@@ -14513,17 +16178,20 @@
               <a:buNone/>
             </a:pPr>
             <a:r>
-              <a:rPr lang="en-US" sz="850" dirty="0">
+              <a:rPr lang="en-US" sz="1400" dirty="0">
                 <a:solidFill>
                   <a:srgbClr val="1B2A41"/>
                 </a:solidFill>
                 <a:latin typeface="Courier New" pitchFamily="49" charset="0"/>
                 <a:ea typeface="Courier New" pitchFamily="49" charset="-122"/>
-                <a:cs typeface="Courier New" pitchFamily="49" charset="-120"/>
+                <a:cs typeface="Courier New" panose="02070309020205020404" pitchFamily="49" charset="0"/>
               </a:rPr>
               <a:t>- notes: str, missing=156, unique=3</a:t>
             </a:r>
-            <a:endParaRPr lang="en-US" sz="850" dirty="0"/>
+            <a:endParaRPr lang="en-US" sz="1400" dirty="0">
+              <a:latin typeface="Courier New" panose="02070309020205020404" pitchFamily="49" charset="0"/>
+              <a:cs typeface="Courier New" panose="02070309020205020404" pitchFamily="49" charset="0"/>
+            </a:endParaRPr>
           </a:p>
           <a:p>
             <a:pPr marL="0" indent="0" algn="l">
@@ -14533,17 +16201,20 @@
               <a:buNone/>
             </a:pPr>
             <a:r>
-              <a:rPr lang="en-US" sz="850" dirty="0">
+              <a:rPr lang="en-US" sz="1400" dirty="0">
                 <a:solidFill>
                   <a:srgbClr val="1B2A41"/>
                 </a:solidFill>
                 <a:latin typeface="Courier New" pitchFamily="49" charset="0"/>
                 <a:ea typeface="Courier New" pitchFamily="49" charset="-122"/>
-                <a:cs typeface="Courier New" pitchFamily="49" charset="-120"/>
+                <a:cs typeface="Courier New" panose="02070309020205020404" pitchFamily="49" charset="0"/>
               </a:rPr>
               <a:t>Duplicate columns: customer_id and customer_ref</a:t>
             </a:r>
-            <a:endParaRPr lang="en-US" sz="850" dirty="0"/>
+            <a:endParaRPr lang="en-US" sz="1400" dirty="0">
+              <a:latin typeface="Courier New" panose="02070309020205020404" pitchFamily="49" charset="0"/>
+              <a:cs typeface="Courier New" panose="02070309020205020404" pitchFamily="49" charset="0"/>
+            </a:endParaRPr>
           </a:p>
         </p:txBody>
       </p:sp>
@@ -14683,6 +16354,13 @@
   <p:clrMapOvr>
     <a:masterClrMapping/>
   </p:clrMapOvr>
+  <p:timing>
+    <p:tnLst>
+      <p:par>
+        <p:cTn id="1" dur="indefinite" restart="never" nodeType="tmRoot"/>
+      </p:par>
+    </p:tnLst>
+  </p:timing>
 </p:sld>
 </file>
 
@@ -14775,7 +16453,7 @@
         </p:nvGraphicFramePr>
         <p:xfrm>
           <a:off x="825500" y="1473200"/>
-          <a:ext cx="10553700" cy="2702074"/>
+          <a:ext cx="10553700" cy="2702077"/>
         </p:xfrm>
         <a:graphic>
           <a:graphicData uri="http://schemas.openxmlformats.org/drawingml/2006/table">
@@ -14785,14 +16463,14 @@
                 <a:gridCol w="5276850">
                   <a:extLst>
                     <a:ext uri="{9D8B030D-6E8A-4147-A177-3AD203B41FA5}">
-                      <a16:colId xmlns:a16="http://schemas.microsoft.com/office/drawing/2014/main" val="20000"/>
+                      <a16:colId xmlns="" xmlns:a16="http://schemas.microsoft.com/office/drawing/2014/main" val="20000"/>
                     </a:ext>
                   </a:extLst>
                 </a:gridCol>
                 <a:gridCol w="5276850">
                   <a:extLst>
                     <a:ext uri="{9D8B030D-6E8A-4147-A177-3AD203B41FA5}">
-                      <a16:colId xmlns:a16="http://schemas.microsoft.com/office/drawing/2014/main" val="20001"/>
+                      <a16:colId xmlns="" xmlns:a16="http://schemas.microsoft.com/office/drawing/2014/main" val="20001"/>
                     </a:ext>
                   </a:extLst>
                 </a:gridCol>
@@ -14942,7 +16620,7 @@
                 </a:tc>
                 <a:extLst>
                   <a:ext uri="{0D108BD9-81ED-4DB2-BD59-A6C34878D82A}">
-                    <a16:rowId xmlns:a16="http://schemas.microsoft.com/office/drawing/2014/main" val="10000"/>
+                    <a16:rowId xmlns="" xmlns:a16="http://schemas.microsoft.com/office/drawing/2014/main" val="10000"/>
                   </a:ext>
                 </a:extLst>
               </a:tr>
@@ -15085,7 +16763,7 @@
                 </a:tc>
                 <a:extLst>
                   <a:ext uri="{0D108BD9-81ED-4DB2-BD59-A6C34878D82A}">
-                    <a16:rowId xmlns:a16="http://schemas.microsoft.com/office/drawing/2014/main" val="10001"/>
+                    <a16:rowId xmlns="" xmlns:a16="http://schemas.microsoft.com/office/drawing/2014/main" val="10001"/>
                   </a:ext>
                 </a:extLst>
               </a:tr>
@@ -15228,7 +16906,7 @@
                 </a:tc>
                 <a:extLst>
                   <a:ext uri="{0D108BD9-81ED-4DB2-BD59-A6C34878D82A}">
-                    <a16:rowId xmlns:a16="http://schemas.microsoft.com/office/drawing/2014/main" val="10002"/>
+                    <a16:rowId xmlns="" xmlns:a16="http://schemas.microsoft.com/office/drawing/2014/main" val="10002"/>
                   </a:ext>
                 </a:extLst>
               </a:tr>
@@ -15371,7 +17049,7 @@
                 </a:tc>
                 <a:extLst>
                   <a:ext uri="{0D108BD9-81ED-4DB2-BD59-A6C34878D82A}">
-                    <a16:rowId xmlns:a16="http://schemas.microsoft.com/office/drawing/2014/main" val="10003"/>
+                    <a16:rowId xmlns="" xmlns:a16="http://schemas.microsoft.com/office/drawing/2014/main" val="10003"/>
                   </a:ext>
                 </a:extLst>
               </a:tr>
@@ -15514,7 +17192,7 @@
                 </a:tc>
                 <a:extLst>
                   <a:ext uri="{0D108BD9-81ED-4DB2-BD59-A6C34878D82A}">
-                    <a16:rowId xmlns:a16="http://schemas.microsoft.com/office/drawing/2014/main" val="10004"/>
+                    <a16:rowId xmlns="" xmlns:a16="http://schemas.microsoft.com/office/drawing/2014/main" val="10004"/>
                   </a:ext>
                 </a:extLst>
               </a:tr>
@@ -15657,7 +17335,7 @@
                 </a:tc>
                 <a:extLst>
                   <a:ext uri="{0D108BD9-81ED-4DB2-BD59-A6C34878D82A}">
-                    <a16:rowId xmlns:a16="http://schemas.microsoft.com/office/drawing/2014/main" val="10005"/>
+                    <a16:rowId xmlns="" xmlns:a16="http://schemas.microsoft.com/office/drawing/2014/main" val="10005"/>
                   </a:ext>
                 </a:extLst>
               </a:tr>
@@ -15800,7 +17478,7 @@
                 </a:tc>
                 <a:extLst>
                   <a:ext uri="{0D108BD9-81ED-4DB2-BD59-A6C34878D82A}">
-                    <a16:rowId xmlns:a16="http://schemas.microsoft.com/office/drawing/2014/main" val="10006"/>
+                    <a16:rowId xmlns="" xmlns:a16="http://schemas.microsoft.com/office/drawing/2014/main" val="10006"/>
                   </a:ext>
                 </a:extLst>
               </a:tr>
@@ -15857,6 +17535,13 @@
   <p:clrMapOvr>
     <a:masterClrMapping/>
   </p:clrMapOvr>
+  <p:timing>
+    <p:tnLst>
+      <p:par>
+        <p:cTn id="1" dur="indefinite" restart="never" nodeType="tmRoot"/>
+      </p:par>
+    </p:tnLst>
+  </p:timing>
 </p:sld>
 </file>
 
@@ -16077,7 +17762,7 @@
         </p:nvGraphicFramePr>
         <p:xfrm>
           <a:off x="825500" y="3397052"/>
-          <a:ext cx="10553700" cy="1077962"/>
+          <a:ext cx="10553700" cy="1077963"/>
         </p:xfrm>
         <a:graphic>
           <a:graphicData uri="http://schemas.openxmlformats.org/drawingml/2006/table">
@@ -16087,14 +17772,14 @@
                 <a:gridCol w="5276850">
                   <a:extLst>
                     <a:ext uri="{9D8B030D-6E8A-4147-A177-3AD203B41FA5}">
-                      <a16:colId xmlns:a16="http://schemas.microsoft.com/office/drawing/2014/main" val="20000"/>
+                      <a16:colId xmlns="" xmlns:a16="http://schemas.microsoft.com/office/drawing/2014/main" val="20000"/>
                     </a:ext>
                   </a:extLst>
                 </a:gridCol>
                 <a:gridCol w="5276850">
                   <a:extLst>
                     <a:ext uri="{9D8B030D-6E8A-4147-A177-3AD203B41FA5}">
-                      <a16:colId xmlns:a16="http://schemas.microsoft.com/office/drawing/2014/main" val="20001"/>
+                      <a16:colId xmlns="" xmlns:a16="http://schemas.microsoft.com/office/drawing/2014/main" val="20001"/>
                     </a:ext>
                   </a:extLst>
                 </a:gridCol>
@@ -16244,7 +17929,7 @@
                 </a:tc>
                 <a:extLst>
                   <a:ext uri="{0D108BD9-81ED-4DB2-BD59-A6C34878D82A}">
-                    <a16:rowId xmlns:a16="http://schemas.microsoft.com/office/drawing/2014/main" val="10000"/>
+                    <a16:rowId xmlns="" xmlns:a16="http://schemas.microsoft.com/office/drawing/2014/main" val="10000"/>
                   </a:ext>
                 </a:extLst>
               </a:tr>
@@ -16387,7 +18072,7 @@
                 </a:tc>
                 <a:extLst>
                   <a:ext uri="{0D108BD9-81ED-4DB2-BD59-A6C34878D82A}">
-                    <a16:rowId xmlns:a16="http://schemas.microsoft.com/office/drawing/2014/main" val="10001"/>
+                    <a16:rowId xmlns="" xmlns:a16="http://schemas.microsoft.com/office/drawing/2014/main" val="10001"/>
                   </a:ext>
                 </a:extLst>
               </a:tr>
@@ -16530,7 +18215,7 @@
                 </a:tc>
                 <a:extLst>
                   <a:ext uri="{0D108BD9-81ED-4DB2-BD59-A6C34878D82A}">
-                    <a16:rowId xmlns:a16="http://schemas.microsoft.com/office/drawing/2014/main" val="10002"/>
+                    <a16:rowId xmlns="" xmlns:a16="http://schemas.microsoft.com/office/drawing/2014/main" val="10002"/>
                   </a:ext>
                 </a:extLst>
               </a:tr>
@@ -16631,6 +18316,13 @@
   <p:clrMapOvr>
     <a:masterClrMapping/>
   </p:clrMapOvr>
+  <p:timing>
+    <p:tnLst>
+      <p:par>
+        <p:cTn id="1" dur="indefinite" restart="never" nodeType="tmRoot"/>
+      </p:par>
+    </p:tnLst>
+  </p:timing>
 </p:sld>
 </file>
 
@@ -17209,6 +18901,13 @@
   <p:clrMapOvr>
     <a:masterClrMapping/>
   </p:clrMapOvr>
+  <p:timing>
+    <p:tnLst>
+      <p:par>
+        <p:cTn id="1" dur="indefinite" restart="never" nodeType="tmRoot"/>
+      </p:par>
+    </p:tnLst>
+  </p:timing>
 </p:sld>
 </file>
 
@@ -17944,6 +19643,13 @@
   <p:clrMapOvr>
     <a:masterClrMapping/>
   </p:clrMapOvr>
+  <p:timing>
+    <p:tnLst>
+      <p:par>
+        <p:cTn id="1" dur="indefinite" restart="never" nodeType="tmRoot"/>
+      </p:par>
+    </p:tnLst>
+  </p:timing>
 </p:sld>
 </file>
 
@@ -18601,6 +20307,13 @@
   <p:clrMapOvr>
     <a:masterClrMapping/>
   </p:clrMapOvr>
+  <p:timing>
+    <p:tnLst>
+      <p:par>
+        <p:cTn id="1" dur="indefinite" restart="never" nodeType="tmRoot"/>
+      </p:par>
+    </p:tnLst>
+  </p:timing>
 </p:sld>
 </file>
 
@@ -18703,14 +20416,14 @@
                 <a:gridCol w="5276850">
                   <a:extLst>
                     <a:ext uri="{9D8B030D-6E8A-4147-A177-3AD203B41FA5}">
-                      <a16:colId xmlns:a16="http://schemas.microsoft.com/office/drawing/2014/main" val="20000"/>
+                      <a16:colId xmlns="" xmlns:a16="http://schemas.microsoft.com/office/drawing/2014/main" val="20000"/>
                     </a:ext>
                   </a:extLst>
                 </a:gridCol>
                 <a:gridCol w="5276850">
                   <a:extLst>
                     <a:ext uri="{9D8B030D-6E8A-4147-A177-3AD203B41FA5}">
-                      <a16:colId xmlns:a16="http://schemas.microsoft.com/office/drawing/2014/main" val="20001"/>
+                      <a16:colId xmlns="" xmlns:a16="http://schemas.microsoft.com/office/drawing/2014/main" val="20001"/>
                     </a:ext>
                   </a:extLst>
                 </a:gridCol>
@@ -18860,7 +20573,7 @@
                 </a:tc>
                 <a:extLst>
                   <a:ext uri="{0D108BD9-81ED-4DB2-BD59-A6C34878D82A}">
-                    <a16:rowId xmlns:a16="http://schemas.microsoft.com/office/drawing/2014/main" val="10000"/>
+                    <a16:rowId xmlns="" xmlns:a16="http://schemas.microsoft.com/office/drawing/2014/main" val="10000"/>
                   </a:ext>
                 </a:extLst>
               </a:tr>
@@ -19003,7 +20716,7 @@
                 </a:tc>
                 <a:extLst>
                   <a:ext uri="{0D108BD9-81ED-4DB2-BD59-A6C34878D82A}">
-                    <a16:rowId xmlns:a16="http://schemas.microsoft.com/office/drawing/2014/main" val="10001"/>
+                    <a16:rowId xmlns="" xmlns:a16="http://schemas.microsoft.com/office/drawing/2014/main" val="10001"/>
                   </a:ext>
                 </a:extLst>
               </a:tr>
@@ -19146,7 +20859,7 @@
                 </a:tc>
                 <a:extLst>
                   <a:ext uri="{0D108BD9-81ED-4DB2-BD59-A6C34878D82A}">
-                    <a16:rowId xmlns:a16="http://schemas.microsoft.com/office/drawing/2014/main" val="10002"/>
+                    <a16:rowId xmlns="" xmlns:a16="http://schemas.microsoft.com/office/drawing/2014/main" val="10002"/>
                   </a:ext>
                 </a:extLst>
               </a:tr>
@@ -19289,7 +21002,7 @@
                 </a:tc>
                 <a:extLst>
                   <a:ext uri="{0D108BD9-81ED-4DB2-BD59-A6C34878D82A}">
-                    <a16:rowId xmlns:a16="http://schemas.microsoft.com/office/drawing/2014/main" val="10003"/>
+                    <a16:rowId xmlns="" xmlns:a16="http://schemas.microsoft.com/office/drawing/2014/main" val="10003"/>
                   </a:ext>
                 </a:extLst>
               </a:tr>
@@ -19432,7 +21145,7 @@
                 </a:tc>
                 <a:extLst>
                   <a:ext uri="{0D108BD9-81ED-4DB2-BD59-A6C34878D82A}">
-                    <a16:rowId xmlns:a16="http://schemas.microsoft.com/office/drawing/2014/main" val="10004"/>
+                    <a16:rowId xmlns="" xmlns:a16="http://schemas.microsoft.com/office/drawing/2014/main" val="10004"/>
                   </a:ext>
                 </a:extLst>
               </a:tr>
@@ -19533,6 +21246,13 @@
   <p:clrMapOvr>
     <a:masterClrMapping/>
   </p:clrMapOvr>
+  <p:timing>
+    <p:tnLst>
+      <p:par>
+        <p:cTn id="1" dur="indefinite" restart="never" nodeType="tmRoot"/>
+      </p:par>
+    </p:tnLst>
+  </p:timing>
 </p:sld>
 </file>
 
@@ -19870,6 +21590,13 @@
   <p:clrMapOvr>
     <a:masterClrMapping/>
   </p:clrMapOvr>
+  <p:timing>
+    <p:tnLst>
+      <p:par>
+        <p:cTn id="1" dur="indefinite" restart="never" nodeType="tmRoot"/>
+      </p:par>
+    </p:tnLst>
+  </p:timing>
 </p:sld>
 </file>
 
@@ -20167,6 +21894,13 @@
   <p:clrMapOvr>
     <a:masterClrMapping/>
   </p:clrMapOvr>
+  <p:timing>
+    <p:tnLst>
+      <p:par>
+        <p:cTn id="1" dur="indefinite" restart="never" nodeType="tmRoot"/>
+      </p:par>
+    </p:tnLst>
+  </p:timing>
 </p:sld>
 </file>
 
@@ -20266,7 +22000,7 @@
         </p:spPr>
         <p:txBody>
           <a:bodyPr wrap="square" lIns="173442" tIns="173442" rIns="0" bIns="148042" rtlCol="0" anchor="t">
-            <a:normAutofit/>
+            <a:noAutofit/>
           </a:bodyPr>
           <a:lstStyle/>
           <a:p>
@@ -20277,17 +22011,20 @@
               <a:buNone/>
             </a:pPr>
             <a:r>
-              <a:rPr lang="en-US" sz="1350" dirty="0">
+              <a:rPr lang="en-US" sz="1400" dirty="0">
                 <a:solidFill>
                   <a:srgbClr val="F7F5EF"/>
                 </a:solidFill>
-                <a:latin typeface="Courier New" pitchFamily="49" charset="0"/>
-                <a:ea typeface="Courier New" pitchFamily="49" charset="-122"/>
-                <a:cs typeface="Courier New" pitchFamily="49" charset="-120"/>
+                <a:latin typeface="Courier New" panose="02070309020205020404" pitchFamily="49" charset="0"/>
+                <a:ea typeface="Courier New" pitchFamily="49" charset="-122"/>
+                <a:cs typeface="Courier New" panose="02070309020205020404" pitchFamily="49" charset="0"/>
               </a:rPr>
               <a:t>amounts = [1200, 450, 3000, 80, 950, 5000]</a:t>
             </a:r>
-            <a:endParaRPr lang="en-US" sz="1350" dirty="0"/>
+            <a:endParaRPr lang="en-US" sz="1400" dirty="0">
+              <a:latin typeface="Courier New" panose="02070309020205020404" pitchFamily="49" charset="0"/>
+              <a:cs typeface="Courier New" panose="02070309020205020404" pitchFamily="49" charset="0"/>
+            </a:endParaRPr>
           </a:p>
           <a:p>
             <a:pPr marL="0" indent="0" algn="l">
@@ -20297,17 +22034,20 @@
               <a:buNone/>
             </a:pPr>
             <a:r>
-              <a:rPr lang="en-US" sz="1350" dirty="0">
+              <a:rPr lang="en-US" sz="1400" dirty="0">
                 <a:solidFill>
                   <a:srgbClr val="F7F5EF"/>
                 </a:solidFill>
                 <a:latin typeface="Courier New" pitchFamily="49" charset="0"/>
                 <a:ea typeface="Courier New" pitchFamily="49" charset="-122"/>
-                <a:cs typeface="Courier New" pitchFamily="49" charset="-120"/>
+                <a:cs typeface="Courier New" panose="02070309020205020404" pitchFamily="49" charset="0"/>
               </a:rPr>
               <a:t>amounts[0], amounts[-1]              # 1200, 5000</a:t>
             </a:r>
-            <a:endParaRPr lang="en-US" sz="1350" dirty="0"/>
+            <a:endParaRPr lang="en-US" sz="1400" dirty="0">
+              <a:latin typeface="Courier New" panose="02070309020205020404" pitchFamily="49" charset="0"/>
+              <a:cs typeface="Courier New" panose="02070309020205020404" pitchFamily="49" charset="0"/>
+            </a:endParaRPr>
           </a:p>
           <a:p>
             <a:pPr marL="0" indent="0" algn="l">
@@ -20317,17 +22057,20 @@
               <a:buNone/>
             </a:pPr>
             <a:r>
-              <a:rPr lang="en-US" sz="1350" dirty="0">
+              <a:rPr lang="en-US" sz="1400" dirty="0">
                 <a:solidFill>
                   <a:srgbClr val="F7F5EF"/>
                 </a:solidFill>
                 <a:latin typeface="Courier New" pitchFamily="49" charset="0"/>
                 <a:ea typeface="Courier New" pitchFamily="49" charset="-122"/>
-                <a:cs typeface="Courier New" pitchFamily="49" charset="-120"/>
+                <a:cs typeface="Courier New" panose="02070309020205020404" pitchFamily="49" charset="0"/>
               </a:rPr>
               <a:t>amounts[1:4]                         # [450, 3000, 80]</a:t>
             </a:r>
-            <a:endParaRPr lang="en-US" sz="1350" dirty="0"/>
+            <a:endParaRPr lang="en-US" sz="1400" dirty="0">
+              <a:latin typeface="Courier New" panose="02070309020205020404" pitchFamily="49" charset="0"/>
+              <a:cs typeface="Courier New" panose="02070309020205020404" pitchFamily="49" charset="0"/>
+            </a:endParaRPr>
           </a:p>
           <a:p>
             <a:pPr marL="0" indent="0" algn="l">
@@ -20337,17 +22080,20 @@
               <a:buNone/>
             </a:pPr>
             <a:r>
-              <a:rPr lang="en-US" sz="1350" dirty="0">
+              <a:rPr lang="en-US" sz="1400" dirty="0">
                 <a:solidFill>
                   <a:srgbClr val="F7F5EF"/>
                 </a:solidFill>
                 <a:latin typeface="Courier New" pitchFamily="49" charset="0"/>
                 <a:ea typeface="Courier New" pitchFamily="49" charset="-122"/>
-                <a:cs typeface="Courier New" pitchFamily="49" charset="-120"/>
+                <a:cs typeface="Courier New" panose="02070309020205020404" pitchFamily="49" charset="0"/>
               </a:rPr>
               <a:t>big = [a for a in amounts if a &gt; 1000]   # [1200, 3000, 5000]</a:t>
             </a:r>
-            <a:endParaRPr lang="en-US" sz="1350" dirty="0"/>
+            <a:endParaRPr lang="en-US" sz="1400" dirty="0">
+              <a:latin typeface="Courier New" panose="02070309020205020404" pitchFamily="49" charset="0"/>
+              <a:cs typeface="Courier New" panose="02070309020205020404" pitchFamily="49" charset="0"/>
+            </a:endParaRPr>
           </a:p>
           <a:p>
             <a:pPr marL="0" indent="0" algn="l">
@@ -20357,17 +22103,20 @@
               <a:buNone/>
             </a:pPr>
             <a:r>
-              <a:rPr lang="en-US" sz="1350" dirty="0">
+              <a:rPr lang="en-US" sz="1400" dirty="0">
                 <a:solidFill>
                   <a:srgbClr val="F7F5EF"/>
                 </a:solidFill>
                 <a:latin typeface="Courier New" pitchFamily="49" charset="0"/>
                 <a:ea typeface="Courier New" pitchFamily="49" charset="-122"/>
-                <a:cs typeface="Courier New" pitchFamily="49" charset="-120"/>
+                <a:cs typeface="Courier New" panose="02070309020205020404" pitchFamily="49" charset="0"/>
               </a:rPr>
               <a:t>sorted(amounts, reverse=True)[:3]    # [5000, 3000, 1200]</a:t>
             </a:r>
-            <a:endParaRPr lang="en-US" sz="1350" dirty="0"/>
+            <a:endParaRPr lang="en-US" sz="1400" dirty="0">
+              <a:latin typeface="Courier New" panose="02070309020205020404" pitchFamily="49" charset="0"/>
+              <a:cs typeface="Courier New" panose="02070309020205020404" pitchFamily="49" charset="0"/>
+            </a:endParaRPr>
           </a:p>
         </p:txBody>
       </p:sp>
@@ -20464,6 +22213,13 @@
   <p:clrMapOvr>
     <a:masterClrMapping/>
   </p:clrMapOvr>
+  <p:timing>
+    <p:tnLst>
+      <p:par>
+        <p:cTn id="1" dur="indefinite" restart="never" nodeType="tmRoot"/>
+      </p:par>
+    </p:tnLst>
+  </p:timing>
 </p:sld>
 </file>
 
@@ -20801,6 +22557,13 @@
   <p:clrMapOvr>
     <a:masterClrMapping/>
   </p:clrMapOvr>
+  <p:timing>
+    <p:tnLst>
+      <p:par>
+        <p:cTn id="1" dur="indefinite" restart="never" nodeType="tmRoot"/>
+      </p:par>
+    </p:tnLst>
+  </p:timing>
 </p:sld>
 </file>
 
